--- a/Logs/Development Log and Alpha Testing.pptx
+++ b/Logs/Development Log and Alpha Testing.pptx
@@ -326,7 +326,7 @@
           <a:p>
             <a:fld id="{846CE7D5-CF57-46EF-B807-FDD0502418D4}" type="datetimeFigureOut">
               <a:rPr lang="en-GB" smtClean="0"/>
-              <a:t>13/02/2026</a:t>
+              <a:t>16/02/2026</a:t>
             </a:fld>
             <a:endParaRPr lang="en-GB"/>
           </a:p>
@@ -496,7 +496,7 @@
           <a:p>
             <a:fld id="{846CE7D5-CF57-46EF-B807-FDD0502418D4}" type="datetimeFigureOut">
               <a:rPr lang="en-GB" smtClean="0"/>
-              <a:t>13/02/2026</a:t>
+              <a:t>16/02/2026</a:t>
             </a:fld>
             <a:endParaRPr lang="en-GB"/>
           </a:p>
@@ -676,7 +676,7 @@
           <a:p>
             <a:fld id="{846CE7D5-CF57-46EF-B807-FDD0502418D4}" type="datetimeFigureOut">
               <a:rPr lang="en-GB" smtClean="0"/>
-              <a:t>13/02/2026</a:t>
+              <a:t>16/02/2026</a:t>
             </a:fld>
             <a:endParaRPr lang="en-GB"/>
           </a:p>
@@ -846,7 +846,7 @@
           <a:p>
             <a:fld id="{846CE7D5-CF57-46EF-B807-FDD0502418D4}" type="datetimeFigureOut">
               <a:rPr lang="en-GB" smtClean="0"/>
-              <a:t>13/02/2026</a:t>
+              <a:t>16/02/2026</a:t>
             </a:fld>
             <a:endParaRPr lang="en-GB"/>
           </a:p>
@@ -1092,7 +1092,7 @@
           <a:p>
             <a:fld id="{846CE7D5-CF57-46EF-B807-FDD0502418D4}" type="datetimeFigureOut">
               <a:rPr lang="en-GB" smtClean="0"/>
-              <a:t>13/02/2026</a:t>
+              <a:t>16/02/2026</a:t>
             </a:fld>
             <a:endParaRPr lang="en-GB"/>
           </a:p>
@@ -1324,7 +1324,7 @@
           <a:p>
             <a:fld id="{846CE7D5-CF57-46EF-B807-FDD0502418D4}" type="datetimeFigureOut">
               <a:rPr lang="en-GB" smtClean="0"/>
-              <a:t>13/02/2026</a:t>
+              <a:t>16/02/2026</a:t>
             </a:fld>
             <a:endParaRPr lang="en-GB"/>
           </a:p>
@@ -1691,7 +1691,7 @@
           <a:p>
             <a:fld id="{846CE7D5-CF57-46EF-B807-FDD0502418D4}" type="datetimeFigureOut">
               <a:rPr lang="en-GB" smtClean="0"/>
-              <a:t>13/02/2026</a:t>
+              <a:t>16/02/2026</a:t>
             </a:fld>
             <a:endParaRPr lang="en-GB"/>
           </a:p>
@@ -1809,7 +1809,7 @@
           <a:p>
             <a:fld id="{846CE7D5-CF57-46EF-B807-FDD0502418D4}" type="datetimeFigureOut">
               <a:rPr lang="en-GB" smtClean="0"/>
-              <a:t>13/02/2026</a:t>
+              <a:t>16/02/2026</a:t>
             </a:fld>
             <a:endParaRPr lang="en-GB"/>
           </a:p>
@@ -1904,7 +1904,7 @@
           <a:p>
             <a:fld id="{846CE7D5-CF57-46EF-B807-FDD0502418D4}" type="datetimeFigureOut">
               <a:rPr lang="en-GB" smtClean="0"/>
-              <a:t>13/02/2026</a:t>
+              <a:t>16/02/2026</a:t>
             </a:fld>
             <a:endParaRPr lang="en-GB"/>
           </a:p>
@@ -2181,7 +2181,7 @@
           <a:p>
             <a:fld id="{846CE7D5-CF57-46EF-B807-FDD0502418D4}" type="datetimeFigureOut">
               <a:rPr lang="en-GB" smtClean="0"/>
-              <a:t>13/02/2026</a:t>
+              <a:t>16/02/2026</a:t>
             </a:fld>
             <a:endParaRPr lang="en-GB"/>
           </a:p>
@@ -2438,7 +2438,7 @@
           <a:p>
             <a:fld id="{846CE7D5-CF57-46EF-B807-FDD0502418D4}" type="datetimeFigureOut">
               <a:rPr lang="en-GB" smtClean="0"/>
-              <a:t>13/02/2026</a:t>
+              <a:t>16/02/2026</a:t>
             </a:fld>
             <a:endParaRPr lang="en-GB"/>
           </a:p>
@@ -2651,7 +2651,7 @@
           <a:p>
             <a:fld id="{846CE7D5-CF57-46EF-B807-FDD0502418D4}" type="datetimeFigureOut">
               <a:rPr lang="en-GB" smtClean="0"/>
-              <a:t>13/02/2026</a:t>
+              <a:t>16/02/2026</a:t>
             </a:fld>
             <a:endParaRPr lang="en-GB"/>
           </a:p>
@@ -19176,13 +19176,13 @@
           <p:nvPr>
             <p:extLst>
               <p:ext uri="{D42A27DB-BD31-4B8C-83A1-F6EECF244321}">
-                <p14:modId xmlns:p14="http://schemas.microsoft.com/office/powerpoint/2010/main" val="1683071542"/>
+                <p14:modId xmlns:p14="http://schemas.microsoft.com/office/powerpoint/2010/main" val="122315289"/>
               </p:ext>
             </p:extLst>
           </p:nvPr>
         </p:nvGraphicFramePr>
         <p:xfrm>
-          <a:off x="76200" y="318407"/>
+          <a:off x="38100" y="391885"/>
           <a:ext cx="12115800" cy="6218272"/>
         </p:xfrm>
         <a:graphic>
@@ -19705,7 +19705,7 @@
                       </a:r>
                       <a:r>
                         <a:rPr lang="en-GB" sz="800" dirty="0"/>
-                        <a:t> starts in Camera Zone 17 then makes his way to Camera Zone 2. His code is similar to the two previous versions of him with the addition of zones 17,13,16 and 12. he moves from Camera Zone. Moves as normal speed.</a:t>
+                        <a:t> starts in Camera Zone 17 then makes his way to Camera Zone 2. His code is like the two previous versions of him with the addition of zones 17,13,16 and 12 at his disposal. he moves from Camera Zone. Moves as normal speed.</a:t>
                       </a:r>
                     </a:p>
                   </a:txBody>
@@ -19853,7 +19853,7 @@
                       </a:r>
                       <a:r>
                         <a:rPr lang="en-GB" sz="800" dirty="0"/>
-                        <a:t> starts in Camera Zone 17 then makes his way to Camera Zone 2. His code is similar to the two previous versions of him with the addition of zones 17,13,16 and 12. he moves from Camera Zone. Moves as normal speed.</a:t>
+                        <a:t> starts in Camera Zone 17 then makes his way to Camera Zone 2. His code is like the two previous versions of him with the addition of zones 17,13,16 and 12 at his disposal. he moves from Camera Zone. Moves as normal speed.</a:t>
                       </a:r>
                     </a:p>
                     <a:p>
@@ -20434,6 +20434,41 @@
           </a:graphicData>
         </a:graphic>
       </p:graphicFrame>
+      <p:sp>
+        <p:nvSpPr>
+          <p:cNvPr id="2" name="TextBox 1">
+            <a:extLst>
+              <a:ext uri="{FF2B5EF4-FFF2-40B4-BE49-F238E27FC236}">
+                <a16:creationId xmlns:a16="http://schemas.microsoft.com/office/drawing/2014/main" id="{F9129CF1-E1CC-4A65-2531-AC82C7C0D75D}"/>
+              </a:ext>
+            </a:extLst>
+          </p:cNvPr>
+          <p:cNvSpPr txBox="1"/>
+          <p:nvPr/>
+        </p:nvSpPr>
+        <p:spPr>
+          <a:xfrm>
+            <a:off x="0" y="22553"/>
+            <a:ext cx="1601592" cy="369332"/>
+          </a:xfrm>
+          <a:prstGeom prst="rect">
+            <a:avLst/>
+          </a:prstGeom>
+          <a:noFill/>
+        </p:spPr>
+        <p:txBody>
+          <a:bodyPr wrap="none" rtlCol="0">
+            <a:spAutoFit/>
+          </a:bodyPr>
+          <a:lstStyle/>
+          <a:p>
+            <a:r>
+              <a:rPr lang="en-GB" dirty="0"/>
+              <a:t>Enemy Testing</a:t>
+            </a:r>
+          </a:p>
+        </p:txBody>
+      </p:sp>
     </p:spTree>
     <p:extLst>
       <p:ext uri="{BB962C8B-B14F-4D97-AF65-F5344CB8AC3E}">
@@ -25591,7 +25626,7 @@
           <p:nvPr>
             <p:extLst>
               <p:ext uri="{D42A27DB-BD31-4B8C-83A1-F6EECF244321}">
-                <p14:modId xmlns:p14="http://schemas.microsoft.com/office/powerpoint/2010/main" val="1340194370"/>
+                <p14:modId xmlns:p14="http://schemas.microsoft.com/office/powerpoint/2010/main" val="3169553721"/>
               </p:ext>
             </p:extLst>
           </p:nvPr>
@@ -25756,7 +25791,7 @@
                     <a:p>
                       <a:r>
                         <a:rPr lang="en-GB" sz="800" dirty="0"/>
-                        <a:t> Bulker zone change level 3</a:t>
+                        <a:t> Bulker zone change level 2</a:t>
                       </a:r>
                     </a:p>
                   </a:txBody>
@@ -25769,7 +25804,7 @@
                     <a:p>
                       <a:r>
                         <a:rPr lang="en-GB" sz="800" dirty="0"/>
-                        <a:t>Rm_level3</a:t>
+                        <a:t>Rm_level2</a:t>
                       </a:r>
                     </a:p>
                   </a:txBody>
@@ -25782,7 +25817,7 @@
                     <a:p>
                       <a:r>
                         <a:rPr lang="en-GB" sz="800" dirty="0"/>
-                        <a:t>Obj_amcd_bulker_lvl3</a:t>
+                        <a:t>Obj_amcd_bulker_lvl2</a:t>
                       </a:r>
                     </a:p>
                   </a:txBody>
@@ -25834,12 +25869,8 @@
                     <a:lstStyle/>
                     <a:p>
                       <a:r>
-                        <a:rPr lang="en-GB" sz="800"/>
-                        <a:t>Bulker </a:t>
-                      </a:r>
-                      <a:r>
                         <a:rPr lang="en-GB" sz="800" dirty="0"/>
-                        <a:t>zone change level 2</a:t>
+                        <a:t>Bulker zone change level 3</a:t>
                       </a:r>
                     </a:p>
                   </a:txBody>
@@ -25869,7 +25900,7 @@
                       </a:pPr>
                       <a:r>
                         <a:rPr lang="en-GB" sz="800" dirty="0"/>
-                        <a:t>Rm_level2</a:t>
+                        <a:t>Rm_level3</a:t>
                       </a:r>
                     </a:p>
                     <a:p>
@@ -25902,7 +25933,7 @@
                       </a:pPr>
                       <a:r>
                         <a:rPr lang="en-GB" sz="800" dirty="0"/>
-                        <a:t>Obj_amcd_gwiber_lvl2</a:t>
+                        <a:t>Obj_amcd_bulker_lvl3</a:t>
                       </a:r>
                     </a:p>
                     <a:p>
@@ -25974,12 +26005,8 @@
                         <a:defRPr/>
                       </a:pPr>
                       <a:r>
-                        <a:rPr lang="en-GB" sz="800" dirty="0" err="1"/>
-                        <a:t>Gwiber</a:t>
-                      </a:r>
-                      <a:r>
                         <a:rPr lang="en-GB" sz="800" dirty="0"/>
-                        <a:t> zone change level 3</a:t>
+                        <a:t>Bulker zone change level 5</a:t>
                       </a:r>
                     </a:p>
                     <a:p>
@@ -26012,7 +26039,7 @@
                       </a:pPr>
                       <a:r>
                         <a:rPr lang="en-GB" sz="800" dirty="0"/>
-                        <a:t>Rm_level3</a:t>
+                        <a:t>Rm_level5</a:t>
                       </a:r>
                     </a:p>
                   </a:txBody>
@@ -26042,7 +26069,7 @@
                       </a:pPr>
                       <a:r>
                         <a:rPr lang="en-GB" sz="800" dirty="0"/>
-                        <a:t>Obj_amcd_gwiber_lvl3</a:t>
+                        <a:t>Obj_amcd_bulker_lvl5</a:t>
                       </a:r>
                     </a:p>
                     <a:p>
@@ -26114,12 +26141,8 @@
                         <a:defRPr/>
                       </a:pPr>
                       <a:r>
-                        <a:rPr lang="en-GB" sz="800" dirty="0" err="1"/>
-                        <a:t>Gwiber</a:t>
-                      </a:r>
-                      <a:r>
                         <a:rPr lang="en-GB" sz="800" dirty="0"/>
-                        <a:t> zone change level 5</a:t>
+                        <a:t>Prototype zone change level 4</a:t>
                       </a:r>
                     </a:p>
                     <a:p>
@@ -26152,7 +26175,7 @@
                       </a:pPr>
                       <a:r>
                         <a:rPr lang="en-GB" sz="800" dirty="0"/>
-                        <a:t>Rm_level5</a:t>
+                        <a:t>Rm_level4</a:t>
                       </a:r>
                     </a:p>
                   </a:txBody>
@@ -26182,7 +26205,7 @@
                       </a:pPr>
                       <a:r>
                         <a:rPr lang="en-GB" sz="800" dirty="0"/>
-                        <a:t>Obj_amcd_gwiber_lvl5</a:t>
+                        <a:t>Obj_amcd_prototype_lvl4</a:t>
                       </a:r>
                     </a:p>
                   </a:txBody>
@@ -26252,7 +26275,7 @@
                       </a:pPr>
                       <a:r>
                         <a:rPr lang="en-GB" sz="800" dirty="0"/>
-                        <a:t>K9 zone change level 1</a:t>
+                        <a:t>Prototype zone change level 5</a:t>
                       </a:r>
                     </a:p>
                     <a:p>
@@ -26285,7 +26308,7 @@
                       </a:pPr>
                       <a:r>
                         <a:rPr lang="en-GB" sz="800" dirty="0"/>
-                        <a:t>Rm_level1</a:t>
+                        <a:t>Rm_level5</a:t>
                       </a:r>
                     </a:p>
                     <a:p>
@@ -26318,7 +26341,7 @@
                       </a:pPr>
                       <a:r>
                         <a:rPr lang="en-GB" sz="800" dirty="0"/>
-                        <a:t>Obj_amcd_gwiber_lvl1</a:t>
+                        <a:t>Obj_amcd_prototype_lvl5</a:t>
                       </a:r>
                     </a:p>
                     <a:p>
@@ -26363,6 +26386,16 @@
                         <a:rPr lang="en-GB" sz="800" dirty="0"/>
                         <a:t>43.</a:t>
                       </a:r>
+                    </a:p>
+                  </a:txBody>
+                  <a:tcPr/>
+                </a:tc>
+                <a:tc>
+                  <a:txBody>
+                    <a:bodyPr/>
+                    <a:lstStyle/>
+                    <a:p>
+                      <a:endParaRPr lang="en-GB" sz="800" dirty="0"/>
                     </a:p>
                   </a:txBody>
                   <a:tcPr/>
@@ -26391,7 +26424,7 @@
                       </a:pPr>
                       <a:r>
                         <a:rPr lang="en-GB" sz="800" dirty="0"/>
-                        <a:t>K9 zone change level 2</a:t>
+                        <a:t>Rm_level2</a:t>
                       </a:r>
                     </a:p>
                     <a:p>
@@ -26424,9 +26457,56 @@
                       </a:pPr>
                       <a:r>
                         <a:rPr lang="en-GB" sz="800" dirty="0"/>
-                        <a:t>Rm_level2</a:t>
-                      </a:r>
-                    </a:p>
+                        <a:t>Obj_amcd_gwiber_lvl2</a:t>
+                      </a:r>
+                    </a:p>
+                  </a:txBody>
+                  <a:tcPr/>
+                </a:tc>
+                <a:tc>
+                  <a:txBody>
+                    <a:bodyPr/>
+                    <a:lstStyle/>
+                    <a:p>
+                      <a:endParaRPr lang="en-GB" sz="800" dirty="0"/>
+                    </a:p>
+                  </a:txBody>
+                  <a:tcPr/>
+                </a:tc>
+                <a:tc>
+                  <a:txBody>
+                    <a:bodyPr/>
+                    <a:lstStyle/>
+                    <a:p>
+                      <a:endParaRPr lang="en-GB" sz="800" dirty="0"/>
+                    </a:p>
+                  </a:txBody>
+                  <a:tcPr/>
+                </a:tc>
+                <a:extLst>
+                  <a:ext uri="{0D108BD9-81ED-4DB2-BD59-A6C34878D82A}">
+                    <a16:rowId xmlns:a16="http://schemas.microsoft.com/office/drawing/2014/main" val="2830951609"/>
+                  </a:ext>
+                </a:extLst>
+              </a:tr>
+              <a:tr h="648831">
+                <a:tc>
+                  <a:txBody>
+                    <a:bodyPr/>
+                    <a:lstStyle/>
+                    <a:p>
+                      <a:r>
+                        <a:rPr lang="en-GB" sz="800" dirty="0"/>
+                        <a:t>44.</a:t>
+                      </a:r>
+                    </a:p>
+                  </a:txBody>
+                  <a:tcPr/>
+                </a:tc>
+                <a:tc>
+                  <a:txBody>
+                    <a:bodyPr/>
+                    <a:lstStyle/>
                     <a:p>
                       <a:endParaRPr lang="en-GB" sz="800" dirty="0"/>
                     </a:p>
@@ -26457,48 +26537,11 @@
                       </a:pPr>
                       <a:r>
                         <a:rPr lang="en-GB" sz="800" dirty="0"/>
-                        <a:t>Obj_amcd_gwiber_lvl2</a:t>
-                      </a:r>
-                    </a:p>
-                  </a:txBody>
-                  <a:tcPr/>
-                </a:tc>
-                <a:tc>
-                  <a:txBody>
-                    <a:bodyPr/>
-                    <a:lstStyle/>
+                        <a:t>Rm_level3</a:t>
+                      </a:r>
+                    </a:p>
                     <a:p>
                       <a:endParaRPr lang="en-GB" sz="800" dirty="0"/>
-                    </a:p>
-                  </a:txBody>
-                  <a:tcPr/>
-                </a:tc>
-                <a:tc>
-                  <a:txBody>
-                    <a:bodyPr/>
-                    <a:lstStyle/>
-                    <a:p>
-                      <a:endParaRPr lang="en-GB" sz="800" dirty="0"/>
-                    </a:p>
-                  </a:txBody>
-                  <a:tcPr/>
-                </a:tc>
-                <a:extLst>
-                  <a:ext uri="{0D108BD9-81ED-4DB2-BD59-A6C34878D82A}">
-                    <a16:rowId xmlns:a16="http://schemas.microsoft.com/office/drawing/2014/main" val="2830951609"/>
-                  </a:ext>
-                </a:extLst>
-              </a:tr>
-              <a:tr h="648831">
-                <a:tc>
-                  <a:txBody>
-                    <a:bodyPr/>
-                    <a:lstStyle/>
-                    <a:p>
-                      <a:r>
-                        <a:rPr lang="en-GB" sz="800" dirty="0"/>
-                        <a:t>44.</a:t>
-                      </a:r>
                     </a:p>
                   </a:txBody>
                   <a:tcPr/>
@@ -26527,72 +26570,6 @@
                       </a:pPr>
                       <a:r>
                         <a:rPr lang="en-GB" sz="800" dirty="0"/>
-                        <a:t>K9 zone change level 3</a:t>
-                      </a:r>
-                    </a:p>
-                    <a:p>
-                      <a:endParaRPr lang="en-GB" sz="800" dirty="0"/>
-                    </a:p>
-                  </a:txBody>
-                  <a:tcPr/>
-                </a:tc>
-                <a:tc>
-                  <a:txBody>
-                    <a:bodyPr/>
-                    <a:lstStyle/>
-                    <a:p>
-                      <a:pPr marL="0" marR="0" lvl="0" indent="0" algn="l" defTabSz="914400" rtl="0" eaLnBrk="1" fontAlgn="auto" latinLnBrk="0" hangingPunct="1">
-                        <a:lnSpc>
-                          <a:spcPct val="100000"/>
-                        </a:lnSpc>
-                        <a:spcBef>
-                          <a:spcPts val="0"/>
-                        </a:spcBef>
-                        <a:spcAft>
-                          <a:spcPts val="0"/>
-                        </a:spcAft>
-                        <a:buClrTx/>
-                        <a:buSzTx/>
-                        <a:buFontTx/>
-                        <a:buNone/>
-                        <a:tabLst/>
-                        <a:defRPr/>
-                      </a:pPr>
-                      <a:r>
-                        <a:rPr lang="en-GB" sz="800" dirty="0"/>
-                        <a:t>Rm_level3</a:t>
-                      </a:r>
-                    </a:p>
-                    <a:p>
-                      <a:endParaRPr lang="en-GB" sz="800" dirty="0"/>
-                    </a:p>
-                  </a:txBody>
-                  <a:tcPr/>
-                </a:tc>
-                <a:tc>
-                  <a:txBody>
-                    <a:bodyPr/>
-                    <a:lstStyle/>
-                    <a:p>
-                      <a:pPr marL="0" marR="0" lvl="0" indent="0" algn="l" defTabSz="914400" rtl="0" eaLnBrk="1" fontAlgn="auto" latinLnBrk="0" hangingPunct="1">
-                        <a:lnSpc>
-                          <a:spcPct val="100000"/>
-                        </a:lnSpc>
-                        <a:spcBef>
-                          <a:spcPts val="0"/>
-                        </a:spcBef>
-                        <a:spcAft>
-                          <a:spcPts val="0"/>
-                        </a:spcAft>
-                        <a:buClrTx/>
-                        <a:buSzTx/>
-                        <a:buFontTx/>
-                        <a:buNone/>
-                        <a:tabLst/>
-                        <a:defRPr/>
-                      </a:pPr>
-                      <a:r>
-                        <a:rPr lang="en-GB" sz="800" dirty="0"/>
                         <a:t>Obj_amcd_gwiber_lvl3</a:t>
                       </a:r>
                     </a:p>
@@ -26646,29 +26623,6 @@
                   <a:txBody>
                     <a:bodyPr/>
                     <a:lstStyle/>
-                    <a:p>
-                      <a:pPr marL="0" marR="0" lvl="0" indent="0" algn="l" defTabSz="914400" rtl="0" eaLnBrk="1" fontAlgn="auto" latinLnBrk="0" hangingPunct="1">
-                        <a:lnSpc>
-                          <a:spcPct val="100000"/>
-                        </a:lnSpc>
-                        <a:spcBef>
-                          <a:spcPts val="0"/>
-                        </a:spcBef>
-                        <a:spcAft>
-                          <a:spcPts val="0"/>
-                        </a:spcAft>
-                        <a:buClrTx/>
-                        <a:buSzTx/>
-                        <a:buFontTx/>
-                        <a:buNone/>
-                        <a:tabLst/>
-                        <a:defRPr/>
-                      </a:pPr>
-                      <a:r>
-                        <a:rPr lang="en-GB" sz="800" dirty="0"/>
-                        <a:t>K9 zone change level 5</a:t>
-                      </a:r>
-                    </a:p>
                     <a:p>
                       <a:endParaRPr lang="en-GB" sz="800" dirty="0"/>
                     </a:p>

--- a/Logs/Development Log and Alpha Testing.pptx
+++ b/Logs/Development Log and Alpha Testing.pptx
@@ -53,6 +53,7 @@
     <p:sldId id="303" r:id="rId47"/>
     <p:sldId id="304" r:id="rId48"/>
     <p:sldId id="305" r:id="rId49"/>
+    <p:sldId id="306" r:id="rId50"/>
   </p:sldIdLst>
   <p:sldSz cx="12192000" cy="6858000"/>
   <p:notesSz cx="6858000" cy="9144000"/>
@@ -326,7 +327,7 @@
           <a:p>
             <a:fld id="{846CE7D5-CF57-46EF-B807-FDD0502418D4}" type="datetimeFigureOut">
               <a:rPr lang="en-GB" smtClean="0"/>
-              <a:t>16/02/2026</a:t>
+              <a:t>24/02/2026</a:t>
             </a:fld>
             <a:endParaRPr lang="en-GB"/>
           </a:p>
@@ -496,7 +497,7 @@
           <a:p>
             <a:fld id="{846CE7D5-CF57-46EF-B807-FDD0502418D4}" type="datetimeFigureOut">
               <a:rPr lang="en-GB" smtClean="0"/>
-              <a:t>16/02/2026</a:t>
+              <a:t>24/02/2026</a:t>
             </a:fld>
             <a:endParaRPr lang="en-GB"/>
           </a:p>
@@ -676,7 +677,7 @@
           <a:p>
             <a:fld id="{846CE7D5-CF57-46EF-B807-FDD0502418D4}" type="datetimeFigureOut">
               <a:rPr lang="en-GB" smtClean="0"/>
-              <a:t>16/02/2026</a:t>
+              <a:t>24/02/2026</a:t>
             </a:fld>
             <a:endParaRPr lang="en-GB"/>
           </a:p>
@@ -846,7 +847,7 @@
           <a:p>
             <a:fld id="{846CE7D5-CF57-46EF-B807-FDD0502418D4}" type="datetimeFigureOut">
               <a:rPr lang="en-GB" smtClean="0"/>
-              <a:t>16/02/2026</a:t>
+              <a:t>24/02/2026</a:t>
             </a:fld>
             <a:endParaRPr lang="en-GB"/>
           </a:p>
@@ -1092,7 +1093,7 @@
           <a:p>
             <a:fld id="{846CE7D5-CF57-46EF-B807-FDD0502418D4}" type="datetimeFigureOut">
               <a:rPr lang="en-GB" smtClean="0"/>
-              <a:t>16/02/2026</a:t>
+              <a:t>24/02/2026</a:t>
             </a:fld>
             <a:endParaRPr lang="en-GB"/>
           </a:p>
@@ -1324,7 +1325,7 @@
           <a:p>
             <a:fld id="{846CE7D5-CF57-46EF-B807-FDD0502418D4}" type="datetimeFigureOut">
               <a:rPr lang="en-GB" smtClean="0"/>
-              <a:t>16/02/2026</a:t>
+              <a:t>24/02/2026</a:t>
             </a:fld>
             <a:endParaRPr lang="en-GB"/>
           </a:p>
@@ -1691,7 +1692,7 @@
           <a:p>
             <a:fld id="{846CE7D5-CF57-46EF-B807-FDD0502418D4}" type="datetimeFigureOut">
               <a:rPr lang="en-GB" smtClean="0"/>
-              <a:t>16/02/2026</a:t>
+              <a:t>24/02/2026</a:t>
             </a:fld>
             <a:endParaRPr lang="en-GB"/>
           </a:p>
@@ -1809,7 +1810,7 @@
           <a:p>
             <a:fld id="{846CE7D5-CF57-46EF-B807-FDD0502418D4}" type="datetimeFigureOut">
               <a:rPr lang="en-GB" smtClean="0"/>
-              <a:t>16/02/2026</a:t>
+              <a:t>24/02/2026</a:t>
             </a:fld>
             <a:endParaRPr lang="en-GB"/>
           </a:p>
@@ -1904,7 +1905,7 @@
           <a:p>
             <a:fld id="{846CE7D5-CF57-46EF-B807-FDD0502418D4}" type="datetimeFigureOut">
               <a:rPr lang="en-GB" smtClean="0"/>
-              <a:t>16/02/2026</a:t>
+              <a:t>24/02/2026</a:t>
             </a:fld>
             <a:endParaRPr lang="en-GB"/>
           </a:p>
@@ -2181,7 +2182,7 @@
           <a:p>
             <a:fld id="{846CE7D5-CF57-46EF-B807-FDD0502418D4}" type="datetimeFigureOut">
               <a:rPr lang="en-GB" smtClean="0"/>
-              <a:t>16/02/2026</a:t>
+              <a:t>24/02/2026</a:t>
             </a:fld>
             <a:endParaRPr lang="en-GB"/>
           </a:p>
@@ -2438,7 +2439,7 @@
           <a:p>
             <a:fld id="{846CE7D5-CF57-46EF-B807-FDD0502418D4}" type="datetimeFigureOut">
               <a:rPr lang="en-GB" smtClean="0"/>
-              <a:t>16/02/2026</a:t>
+              <a:t>24/02/2026</a:t>
             </a:fld>
             <a:endParaRPr lang="en-GB"/>
           </a:p>
@@ -2651,7 +2652,7 @@
           <a:p>
             <a:fld id="{846CE7D5-CF57-46EF-B807-FDD0502418D4}" type="datetimeFigureOut">
               <a:rPr lang="en-GB" smtClean="0"/>
-              <a:t>16/02/2026</a:t>
+              <a:t>24/02/2026</a:t>
             </a:fld>
             <a:endParaRPr lang="en-GB"/>
           </a:p>
@@ -24355,14 +24356,14 @@
           <p:nvPr>
             <p:extLst>
               <p:ext uri="{D42A27DB-BD31-4B8C-83A1-F6EECF244321}">
-                <p14:modId xmlns:p14="http://schemas.microsoft.com/office/powerpoint/2010/main" val="4069774066"/>
+                <p14:modId xmlns:p14="http://schemas.microsoft.com/office/powerpoint/2010/main" val="1228830394"/>
               </p:ext>
             </p:extLst>
           </p:nvPr>
         </p:nvGraphicFramePr>
         <p:xfrm>
           <a:off x="0" y="391886"/>
-          <a:ext cx="12034157" cy="5697752"/>
+          <a:ext cx="12034157" cy="6026734"/>
         </p:xfrm>
         <a:graphic>
           <a:graphicData uri="http://schemas.openxmlformats.org/drawingml/2006/table">
@@ -24378,35 +24379,35 @@
                     </a:ext>
                   </a:extLst>
                 </a:gridCol>
-                <a:gridCol w="2465614">
+                <a:gridCol w="1428750">
                   <a:extLst>
                     <a:ext uri="{9D8B030D-6E8A-4147-A177-3AD203B41FA5}">
                       <a16:colId xmlns:a16="http://schemas.microsoft.com/office/drawing/2014/main" val="3102287305"/>
                     </a:ext>
                   </a:extLst>
                 </a:gridCol>
-                <a:gridCol w="917472">
+                <a:gridCol w="677635">
                   <a:extLst>
                     <a:ext uri="{9D8B030D-6E8A-4147-A177-3AD203B41FA5}">
                       <a16:colId xmlns:a16="http://schemas.microsoft.com/office/drawing/2014/main" val="4080696647"/>
                     </a:ext>
                   </a:extLst>
                 </a:gridCol>
-                <a:gridCol w="1517600">
+                <a:gridCol w="1306286">
                   <a:extLst>
                     <a:ext uri="{9D8B030D-6E8A-4147-A177-3AD203B41FA5}">
                       <a16:colId xmlns:a16="http://schemas.microsoft.com/office/drawing/2014/main" val="132880537"/>
                     </a:ext>
                   </a:extLst>
                 </a:gridCol>
-                <a:gridCol w="4120849">
+                <a:gridCol w="7143750">
                   <a:extLst>
                     <a:ext uri="{9D8B030D-6E8A-4147-A177-3AD203B41FA5}">
                       <a16:colId xmlns:a16="http://schemas.microsoft.com/office/drawing/2014/main" val="786884226"/>
                     </a:ext>
                   </a:extLst>
                 </a:gridCol>
-                <a:gridCol w="2310493">
+                <a:gridCol w="775607">
                   <a:extLst>
                     <a:ext uri="{9D8B030D-6E8A-4147-A177-3AD203B41FA5}">
                       <a16:colId xmlns:a16="http://schemas.microsoft.com/office/drawing/2014/main" val="259252547"/>
@@ -24562,7 +24563,90 @@
                     <a:bodyPr/>
                     <a:lstStyle/>
                     <a:p>
-                      <a:endParaRPr lang="en-GB" sz="800" dirty="0"/>
+                      <a:r>
+                        <a:rPr lang="en-GB" sz="800" dirty="0"/>
+                        <a:t>When </a:t>
+                      </a:r>
+                      <a:r>
+                        <a:rPr lang="en-GB" sz="800" dirty="0" err="1"/>
+                        <a:t>Gwiber</a:t>
+                      </a:r>
+                      <a:r>
+                        <a:rPr lang="en-GB" sz="800" dirty="0"/>
+                        <a:t> moves between zones, he checks to see if any other </a:t>
+                      </a:r>
+                      <a:r>
+                        <a:rPr lang="en-GB" sz="800" dirty="0" err="1"/>
+                        <a:t>amcd</a:t>
+                      </a:r>
+                      <a:r>
+                        <a:rPr lang="en-GB" sz="800" dirty="0"/>
+                        <a:t> is in the zone he’s moving to. If there is an </a:t>
+                      </a:r>
+                      <a:r>
+                        <a:rPr lang="en-GB" sz="800" dirty="0" err="1"/>
+                        <a:t>amcd</a:t>
+                      </a:r>
+                      <a:r>
+                        <a:rPr lang="en-GB" sz="800" dirty="0"/>
+                        <a:t> like K9 in the same zone </a:t>
+                      </a:r>
+                      <a:r>
+                        <a:rPr lang="en-GB" sz="800" dirty="0" err="1"/>
+                        <a:t>Gwiber</a:t>
+                      </a:r>
+                      <a:r>
+                        <a:rPr lang="en-GB" sz="800" dirty="0"/>
+                        <a:t> is moving to, then the zone </a:t>
+                      </a:r>
+                      <a:r>
+                        <a:rPr lang="en-GB" sz="800" dirty="0" err="1"/>
+                        <a:t>gwiber</a:t>
+                      </a:r>
+                      <a:r>
+                        <a:rPr lang="en-GB" sz="800" dirty="0"/>
+                        <a:t> is moving to, will change its object to display the zone with both </a:t>
+                      </a:r>
+                      <a:r>
+                        <a:rPr lang="en-GB" sz="800" dirty="0" err="1"/>
+                        <a:t>Gwiber</a:t>
+                      </a:r>
+                      <a:r>
+                        <a:rPr lang="en-GB" sz="800" dirty="0"/>
+                        <a:t> and K9. If </a:t>
+                      </a:r>
+                      <a:r>
+                        <a:rPr lang="en-GB" sz="800" dirty="0" err="1"/>
+                        <a:t>Gwiber</a:t>
+                      </a:r>
+                      <a:r>
+                        <a:rPr lang="en-GB" sz="800" dirty="0"/>
+                        <a:t> moves to a zone, then the previous zone he was in, will return to normal, or if K9 was in the same zone, it will only display the K9 zone after </a:t>
+                      </a:r>
+                      <a:r>
+                        <a:rPr lang="en-GB" sz="800" dirty="0" err="1"/>
+                        <a:t>Gwiber</a:t>
+                      </a:r>
+                      <a:r>
+                        <a:rPr lang="en-GB" sz="800" dirty="0"/>
+                        <a:t> leaves it. If </a:t>
+                      </a:r>
+                      <a:r>
+                        <a:rPr lang="en-GB" sz="800" dirty="0" err="1"/>
+                        <a:t>Gwiber</a:t>
+                      </a:r>
+                      <a:r>
+                        <a:rPr lang="en-GB" sz="800" dirty="0"/>
+                        <a:t> moves to a zone that K9 is not in, the zone he moves to displays </a:t>
+                      </a:r>
+                      <a:r>
+                        <a:rPr lang="en-GB" sz="800" dirty="0" err="1"/>
+                        <a:t>Gwiber</a:t>
+                      </a:r>
+                      <a:r>
+                        <a:rPr lang="en-GB" sz="800" dirty="0"/>
+                        <a:t> only.</a:t>
+                      </a:r>
                     </a:p>
                   </a:txBody>
                   <a:tcPr/>
@@ -24583,7 +24667,7 @@
                   </a:ext>
                 </a:extLst>
               </a:tr>
-              <a:tr h="648831">
+              <a:tr h="548322">
                 <a:tc>
                   <a:txBody>
                     <a:bodyPr/>
@@ -24685,46 +24769,6 @@
                     <a:bodyPr/>
                     <a:lstStyle/>
                     <a:p>
-                      <a:endParaRPr lang="en-GB" sz="800" dirty="0"/>
-                    </a:p>
-                  </a:txBody>
-                  <a:tcPr/>
-                </a:tc>
-                <a:tc>
-                  <a:txBody>
-                    <a:bodyPr/>
-                    <a:lstStyle/>
-                    <a:p>
-                      <a:endParaRPr lang="en-GB" sz="800" dirty="0"/>
-                    </a:p>
-                  </a:txBody>
-                  <a:tcPr/>
-                </a:tc>
-                <a:extLst>
-                  <a:ext uri="{0D108BD9-81ED-4DB2-BD59-A6C34878D82A}">
-                    <a16:rowId xmlns:a16="http://schemas.microsoft.com/office/drawing/2014/main" val="4133394058"/>
-                  </a:ext>
-                </a:extLst>
-              </a:tr>
-              <a:tr h="648831">
-                <a:tc>
-                  <a:txBody>
-                    <a:bodyPr/>
-                    <a:lstStyle/>
-                    <a:p>
-                      <a:r>
-                        <a:rPr lang="en-GB" sz="800" dirty="0"/>
-                        <a:t>32.</a:t>
-                      </a:r>
-                    </a:p>
-                  </a:txBody>
-                  <a:tcPr/>
-                </a:tc>
-                <a:tc>
-                  <a:txBody>
-                    <a:bodyPr/>
-                    <a:lstStyle/>
-                    <a:p>
                       <a:pPr marL="0" marR="0" lvl="0" indent="0" algn="l" defTabSz="914400" rtl="0" eaLnBrk="1" fontAlgn="auto" latinLnBrk="0" hangingPunct="1">
                         <a:lnSpc>
                           <a:spcPct val="100000"/>
@@ -24743,16 +24787,122 @@
                         <a:defRPr/>
                       </a:pPr>
                       <a:r>
+                        <a:rPr lang="en-GB" sz="800" dirty="0"/>
+                        <a:t>When </a:t>
+                      </a:r>
+                      <a:r>
                         <a:rPr lang="en-GB" sz="800" dirty="0" err="1"/>
                         <a:t>Gwiber</a:t>
                       </a:r>
                       <a:r>
                         <a:rPr lang="en-GB" sz="800" dirty="0"/>
-                        <a:t> zone change level 3</a:t>
+                        <a:t> moves between zones, he checks to see if any other </a:t>
+                      </a:r>
+                      <a:r>
+                        <a:rPr lang="en-GB" sz="800" dirty="0" err="1"/>
+                        <a:t>amcd</a:t>
+                      </a:r>
+                      <a:r>
+                        <a:rPr lang="en-GB" sz="800" dirty="0"/>
+                        <a:t> is in the zone he’s moving to. If there is an </a:t>
+                      </a:r>
+                      <a:r>
+                        <a:rPr lang="en-GB" sz="800" dirty="0" err="1"/>
+                        <a:t>amcd</a:t>
+                      </a:r>
+                      <a:r>
+                        <a:rPr lang="en-GB" sz="800" dirty="0"/>
+                        <a:t> like K9 in the same zone </a:t>
+                      </a:r>
+                      <a:r>
+                        <a:rPr lang="en-GB" sz="800" dirty="0" err="1"/>
+                        <a:t>Gwiber</a:t>
+                      </a:r>
+                      <a:r>
+                        <a:rPr lang="en-GB" sz="800" dirty="0"/>
+                        <a:t> is moving to, then the zone </a:t>
+                      </a:r>
+                      <a:r>
+                        <a:rPr lang="en-GB" sz="800" dirty="0" err="1"/>
+                        <a:t>gwiber</a:t>
+                      </a:r>
+                      <a:r>
+                        <a:rPr lang="en-GB" sz="800" dirty="0"/>
+                        <a:t> is moving to, will change its object to display the zone with both </a:t>
+                      </a:r>
+                      <a:r>
+                        <a:rPr lang="en-GB" sz="800" dirty="0" err="1"/>
+                        <a:t>Gwiber</a:t>
+                      </a:r>
+                      <a:r>
+                        <a:rPr lang="en-GB" sz="800" dirty="0"/>
+                        <a:t> and K9. If </a:t>
+                      </a:r>
+                      <a:r>
+                        <a:rPr lang="en-GB" sz="800" dirty="0" err="1"/>
+                        <a:t>Gwiber</a:t>
+                      </a:r>
+                      <a:r>
+                        <a:rPr lang="en-GB" sz="800" dirty="0"/>
+                        <a:t> moves to a zone, then the previous zone he was in, will return to normal, or if K9 was in the same zone, it will only display the K9 zone after </a:t>
+                      </a:r>
+                      <a:r>
+                        <a:rPr lang="en-GB" sz="800" dirty="0" err="1"/>
+                        <a:t>Gwiber</a:t>
+                      </a:r>
+                      <a:r>
+                        <a:rPr lang="en-GB" sz="800" dirty="0"/>
+                        <a:t> leaves it. If </a:t>
+                      </a:r>
+                      <a:r>
+                        <a:rPr lang="en-GB" sz="800" dirty="0" err="1"/>
+                        <a:t>Gwiber</a:t>
+                      </a:r>
+                      <a:r>
+                        <a:rPr lang="en-GB" sz="800" dirty="0"/>
+                        <a:t> moves to a zone that K9 is not in, the zone he moves to displays </a:t>
+                      </a:r>
+                      <a:r>
+                        <a:rPr lang="en-GB" sz="800" dirty="0" err="1"/>
+                        <a:t>Gwiber</a:t>
+                      </a:r>
+                      <a:r>
+                        <a:rPr lang="en-GB" sz="800" dirty="0"/>
+                        <a:t> only.</a:t>
                       </a:r>
                     </a:p>
                     <a:p>
                       <a:endParaRPr lang="en-GB" sz="800" dirty="0"/>
+                    </a:p>
+                  </a:txBody>
+                  <a:tcPr/>
+                </a:tc>
+                <a:tc>
+                  <a:txBody>
+                    <a:bodyPr/>
+                    <a:lstStyle/>
+                    <a:p>
+                      <a:endParaRPr lang="en-GB" sz="800" dirty="0"/>
+                    </a:p>
+                  </a:txBody>
+                  <a:tcPr/>
+                </a:tc>
+                <a:extLst>
+                  <a:ext uri="{0D108BD9-81ED-4DB2-BD59-A6C34878D82A}">
+                    <a16:rowId xmlns:a16="http://schemas.microsoft.com/office/drawing/2014/main" val="4133394058"/>
+                  </a:ext>
+                </a:extLst>
+              </a:tr>
+              <a:tr h="648831">
+                <a:tc>
+                  <a:txBody>
+                    <a:bodyPr/>
+                    <a:lstStyle/>
+                    <a:p>
+                      <a:r>
+                        <a:rPr lang="en-GB" sz="800" dirty="0"/>
+                        <a:t>32.</a:t>
+                      </a:r>
                     </a:p>
                   </a:txBody>
                   <a:tcPr/>
@@ -24780,9 +24930,16 @@
                         <a:defRPr/>
                       </a:pPr>
                       <a:r>
-                        <a:rPr lang="en-GB" sz="800" dirty="0"/>
-                        <a:t>Rm_level3</a:t>
-                      </a:r>
+                        <a:rPr lang="en-GB" sz="800" dirty="0" err="1"/>
+                        <a:t>Gwiber</a:t>
+                      </a:r>
+                      <a:r>
+                        <a:rPr lang="en-GB" sz="800" dirty="0"/>
+                        <a:t> zone change level 3</a:t>
+                      </a:r>
+                    </a:p>
+                    <a:p>
+                      <a:endParaRPr lang="en-GB" sz="800" dirty="0"/>
                     </a:p>
                   </a:txBody>
                   <a:tcPr/>
@@ -24811,50 +24968,7 @@
                       </a:pPr>
                       <a:r>
                         <a:rPr lang="en-GB" sz="800" dirty="0"/>
-                        <a:t>Obj_amcd_gwiber_lvl3</a:t>
-                      </a:r>
-                    </a:p>
-                    <a:p>
-                      <a:endParaRPr lang="en-GB" sz="800" dirty="0"/>
-                    </a:p>
-                  </a:txBody>
-                  <a:tcPr/>
-                </a:tc>
-                <a:tc>
-                  <a:txBody>
-                    <a:bodyPr/>
-                    <a:lstStyle/>
-                    <a:p>
-                      <a:endParaRPr lang="en-GB" sz="800" dirty="0"/>
-                    </a:p>
-                  </a:txBody>
-                  <a:tcPr/>
-                </a:tc>
-                <a:tc>
-                  <a:txBody>
-                    <a:bodyPr/>
-                    <a:lstStyle/>
-                    <a:p>
-                      <a:endParaRPr lang="en-GB" sz="800" dirty="0"/>
-                    </a:p>
-                  </a:txBody>
-                  <a:tcPr/>
-                </a:tc>
-                <a:extLst>
-                  <a:ext uri="{0D108BD9-81ED-4DB2-BD59-A6C34878D82A}">
-                    <a16:rowId xmlns:a16="http://schemas.microsoft.com/office/drawing/2014/main" val="3113226149"/>
-                  </a:ext>
-                </a:extLst>
-              </a:tr>
-              <a:tr h="685312">
-                <a:tc>
-                  <a:txBody>
-                    <a:bodyPr/>
-                    <a:lstStyle/>
-                    <a:p>
-                      <a:r>
-                        <a:rPr lang="en-GB" sz="800" dirty="0"/>
-                        <a:t>33.</a:t>
+                        <a:t>Rm_level3</a:t>
                       </a:r>
                     </a:p>
                   </a:txBody>
@@ -24883,12 +24997,8 @@
                         <a:defRPr/>
                       </a:pPr>
                       <a:r>
-                        <a:rPr lang="en-GB" sz="800" dirty="0" err="1"/>
-                        <a:t>Gwiber</a:t>
-                      </a:r>
-                      <a:r>
-                        <a:rPr lang="en-GB" sz="800" dirty="0"/>
-                        <a:t> zone change level 5</a:t>
+                        <a:rPr lang="en-GB" sz="800" dirty="0"/>
+                        <a:t>Obj_amcd_gwiber_lvl3</a:t>
                       </a:r>
                     </a:p>
                     <a:p>
@@ -24921,7 +25031,120 @@
                       </a:pPr>
                       <a:r>
                         <a:rPr lang="en-GB" sz="800" dirty="0"/>
-                        <a:t>Rm_level5</a:t>
+                        <a:t>When </a:t>
+                      </a:r>
+                      <a:r>
+                        <a:rPr lang="en-GB" sz="800" dirty="0" err="1"/>
+                        <a:t>Gwiber</a:t>
+                      </a:r>
+                      <a:r>
+                        <a:rPr lang="en-GB" sz="800" dirty="0"/>
+                        <a:t> moves between zones, he checks to see if any other </a:t>
+                      </a:r>
+                      <a:r>
+                        <a:rPr lang="en-GB" sz="800" dirty="0" err="1"/>
+                        <a:t>amcd</a:t>
+                      </a:r>
+                      <a:r>
+                        <a:rPr lang="en-GB" sz="800" dirty="0"/>
+                        <a:t> is in the zone he’s moving to. If there is an </a:t>
+                      </a:r>
+                      <a:r>
+                        <a:rPr lang="en-GB" sz="800" dirty="0" err="1"/>
+                        <a:t>amcd</a:t>
+                      </a:r>
+                      <a:r>
+                        <a:rPr lang="en-GB" sz="800" dirty="0"/>
+                        <a:t> like K9 in the same zone </a:t>
+                      </a:r>
+                      <a:r>
+                        <a:rPr lang="en-GB" sz="800" dirty="0" err="1"/>
+                        <a:t>Gwiber</a:t>
+                      </a:r>
+                      <a:r>
+                        <a:rPr lang="en-GB" sz="800" dirty="0"/>
+                        <a:t> is moving to, then the zone </a:t>
+                      </a:r>
+                      <a:r>
+                        <a:rPr lang="en-GB" sz="800" dirty="0" err="1"/>
+                        <a:t>gwiber</a:t>
+                      </a:r>
+                      <a:r>
+                        <a:rPr lang="en-GB" sz="800" dirty="0"/>
+                        <a:t> is moving to, will change its object to display the zone with both </a:t>
+                      </a:r>
+                      <a:r>
+                        <a:rPr lang="en-GB" sz="800" dirty="0" err="1"/>
+                        <a:t>Gwiber</a:t>
+                      </a:r>
+                      <a:r>
+                        <a:rPr lang="en-GB" sz="800" dirty="0"/>
+                        <a:t> and K9. If </a:t>
+                      </a:r>
+                      <a:r>
+                        <a:rPr lang="en-GB" sz="800" dirty="0" err="1"/>
+                        <a:t>Gwiber</a:t>
+                      </a:r>
+                      <a:r>
+                        <a:rPr lang="en-GB" sz="800" dirty="0"/>
+                        <a:t> moves to a zone, then the previous zone he was in, will return to normal, or if K9 was in the same zone, it will only display the K9 zone after </a:t>
+                      </a:r>
+                      <a:r>
+                        <a:rPr lang="en-GB" sz="800" dirty="0" err="1"/>
+                        <a:t>Gwiber</a:t>
+                      </a:r>
+                      <a:r>
+                        <a:rPr lang="en-GB" sz="800" dirty="0"/>
+                        <a:t> leaves it. If </a:t>
+                      </a:r>
+                      <a:r>
+                        <a:rPr lang="en-GB" sz="800" dirty="0" err="1"/>
+                        <a:t>Gwiber</a:t>
+                      </a:r>
+                      <a:r>
+                        <a:rPr lang="en-GB" sz="800" dirty="0"/>
+                        <a:t> moves to a zone that K9 is not in, the zone he moves to displays </a:t>
+                      </a:r>
+                      <a:r>
+                        <a:rPr lang="en-GB" sz="800" dirty="0" err="1"/>
+                        <a:t>Gwiber</a:t>
+                      </a:r>
+                      <a:r>
+                        <a:rPr lang="en-GB" sz="800" dirty="0"/>
+                        <a:t> only.</a:t>
+                      </a:r>
+                    </a:p>
+                    <a:p>
+                      <a:endParaRPr lang="en-GB" sz="800" dirty="0"/>
+                    </a:p>
+                  </a:txBody>
+                  <a:tcPr/>
+                </a:tc>
+                <a:tc>
+                  <a:txBody>
+                    <a:bodyPr/>
+                    <a:lstStyle/>
+                    <a:p>
+                      <a:endParaRPr lang="en-GB" sz="800" dirty="0"/>
+                    </a:p>
+                  </a:txBody>
+                  <a:tcPr/>
+                </a:tc>
+                <a:extLst>
+                  <a:ext uri="{0D108BD9-81ED-4DB2-BD59-A6C34878D82A}">
+                    <a16:rowId xmlns:a16="http://schemas.microsoft.com/office/drawing/2014/main" val="3113226149"/>
+                  </a:ext>
+                </a:extLst>
+              </a:tr>
+              <a:tr h="685312">
+                <a:tc>
+                  <a:txBody>
+                    <a:bodyPr/>
+                    <a:lstStyle/>
+                    <a:p>
+                      <a:r>
+                        <a:rPr lang="en-GB" sz="800" dirty="0"/>
+                        <a:t>33.</a:t>
                       </a:r>
                     </a:p>
                   </a:txBody>
@@ -24950,49 +25173,16 @@
                         <a:defRPr/>
                       </a:pPr>
                       <a:r>
-                        <a:rPr lang="en-GB" sz="800" dirty="0"/>
-                        <a:t>Obj_amcd_gwiber_lvl5</a:t>
-                      </a:r>
-                    </a:p>
-                  </a:txBody>
-                  <a:tcPr/>
-                </a:tc>
-                <a:tc>
-                  <a:txBody>
-                    <a:bodyPr/>
-                    <a:lstStyle/>
+                        <a:rPr lang="en-GB" sz="800" dirty="0" err="1"/>
+                        <a:t>Gwiber</a:t>
+                      </a:r>
+                      <a:r>
+                        <a:rPr lang="en-GB" sz="800" dirty="0"/>
+                        <a:t> zone change level 5</a:t>
+                      </a:r>
+                    </a:p>
                     <a:p>
                       <a:endParaRPr lang="en-GB" sz="800" dirty="0"/>
-                    </a:p>
-                  </a:txBody>
-                  <a:tcPr/>
-                </a:tc>
-                <a:tc>
-                  <a:txBody>
-                    <a:bodyPr/>
-                    <a:lstStyle/>
-                    <a:p>
-                      <a:endParaRPr lang="en-GB" sz="800" dirty="0"/>
-                    </a:p>
-                  </a:txBody>
-                  <a:tcPr/>
-                </a:tc>
-                <a:extLst>
-                  <a:ext uri="{0D108BD9-81ED-4DB2-BD59-A6C34878D82A}">
-                    <a16:rowId xmlns:a16="http://schemas.microsoft.com/office/drawing/2014/main" val="156842521"/>
-                  </a:ext>
-                </a:extLst>
-              </a:tr>
-              <a:tr h="648831">
-                <a:tc>
-                  <a:txBody>
-                    <a:bodyPr/>
-                    <a:lstStyle/>
-                    <a:p>
-                      <a:r>
-                        <a:rPr lang="en-GB" sz="800" dirty="0"/>
-                        <a:t>34.</a:t>
-                      </a:r>
                     </a:p>
                   </a:txBody>
                   <a:tcPr/>
@@ -25021,11 +25211,8 @@
                       </a:pPr>
                       <a:r>
                         <a:rPr lang="en-GB" sz="800" dirty="0"/>
-                        <a:t>K9 zone change level 1</a:t>
-                      </a:r>
-                    </a:p>
-                    <a:p>
-                      <a:endParaRPr lang="en-GB" sz="800" dirty="0"/>
+                        <a:t>Rm_level5</a:t>
+                      </a:r>
                     </a:p>
                   </a:txBody>
                   <a:tcPr/>
@@ -25054,11 +25241,8 @@
                       </a:pPr>
                       <a:r>
                         <a:rPr lang="en-GB" sz="800" dirty="0"/>
-                        <a:t>Rm_level1</a:t>
-                      </a:r>
-                    </a:p>
-                    <a:p>
-                      <a:endParaRPr lang="en-GB" sz="800" dirty="0"/>
+                        <a:t>Obj_amcd_gwiber_lvl5</a:t>
+                      </a:r>
                     </a:p>
                   </a:txBody>
                   <a:tcPr/>
@@ -25087,19 +25271,89 @@
                       </a:pPr>
                       <a:r>
                         <a:rPr lang="en-GB" sz="800" dirty="0"/>
-                        <a:t>Obj_amcd_gwiber_lvl1</a:t>
-                      </a:r>
-                    </a:p>
-                    <a:p>
-                      <a:endParaRPr lang="en-GB" sz="800" dirty="0"/>
-                    </a:p>
-                  </a:txBody>
-                  <a:tcPr/>
-                </a:tc>
-                <a:tc>
-                  <a:txBody>
-                    <a:bodyPr/>
-                    <a:lstStyle/>
+                        <a:t>When </a:t>
+                      </a:r>
+                      <a:r>
+                        <a:rPr lang="en-GB" sz="800" dirty="0" err="1"/>
+                        <a:t>Gwiber</a:t>
+                      </a:r>
+                      <a:r>
+                        <a:rPr lang="en-GB" sz="800" dirty="0"/>
+                        <a:t> moves between zones, he checks to see if any other </a:t>
+                      </a:r>
+                      <a:r>
+                        <a:rPr lang="en-GB" sz="800" dirty="0" err="1"/>
+                        <a:t>amcd</a:t>
+                      </a:r>
+                      <a:r>
+                        <a:rPr lang="en-GB" sz="800" dirty="0"/>
+                        <a:t> is in the zone he’s moving to. If there is an </a:t>
+                      </a:r>
+                      <a:r>
+                        <a:rPr lang="en-GB" sz="800" dirty="0" err="1"/>
+                        <a:t>amcd</a:t>
+                      </a:r>
+                      <a:r>
+                        <a:rPr lang="en-GB" sz="800" dirty="0"/>
+                        <a:t> like K9 in the same zone </a:t>
+                      </a:r>
+                      <a:r>
+                        <a:rPr lang="en-GB" sz="800" dirty="0" err="1"/>
+                        <a:t>Gwiber</a:t>
+                      </a:r>
+                      <a:r>
+                        <a:rPr lang="en-GB" sz="800" dirty="0"/>
+                        <a:t> is moving to, then the zone </a:t>
+                      </a:r>
+                      <a:r>
+                        <a:rPr lang="en-GB" sz="800" dirty="0" err="1"/>
+                        <a:t>gwiber</a:t>
+                      </a:r>
+                      <a:r>
+                        <a:rPr lang="en-GB" sz="800" dirty="0"/>
+                        <a:t> is moving to, will change its object to display the zone with both </a:t>
+                      </a:r>
+                      <a:r>
+                        <a:rPr lang="en-GB" sz="800" dirty="0" err="1"/>
+                        <a:t>Gwiber</a:t>
+                      </a:r>
+                      <a:r>
+                        <a:rPr lang="en-GB" sz="800" dirty="0"/>
+                        <a:t> and K9. If </a:t>
+                      </a:r>
+                      <a:r>
+                        <a:rPr lang="en-GB" sz="800" dirty="0" err="1"/>
+                        <a:t>Gwiber</a:t>
+                      </a:r>
+                      <a:r>
+                        <a:rPr lang="en-GB" sz="800" dirty="0"/>
+                        <a:t> moves to a zone, then the previous zone he was in, will return to normal, or if K9 was in the same zone, it will only display the K9 zone after </a:t>
+                      </a:r>
+                      <a:r>
+                        <a:rPr lang="en-GB" sz="800" dirty="0" err="1"/>
+                        <a:t>Gwiber</a:t>
+                      </a:r>
+                      <a:r>
+                        <a:rPr lang="en-GB" sz="800" dirty="0"/>
+                        <a:t> leaves it. If </a:t>
+                      </a:r>
+                      <a:r>
+                        <a:rPr lang="en-GB" sz="800" dirty="0" err="1"/>
+                        <a:t>Gwiber</a:t>
+                      </a:r>
+                      <a:r>
+                        <a:rPr lang="en-GB" sz="800" dirty="0"/>
+                        <a:t> moves to a zone that K9 is not in, the zone he moves to displays </a:t>
+                      </a:r>
+                      <a:r>
+                        <a:rPr lang="en-GB" sz="800" dirty="0" err="1"/>
+                        <a:t>Gwiber</a:t>
+                      </a:r>
+                      <a:r>
+                        <a:rPr lang="en-GB" sz="800" dirty="0"/>
+                        <a:t> only.</a:t>
+                      </a:r>
+                    </a:p>
                     <a:p>
                       <a:endParaRPr lang="en-GB" sz="800" dirty="0"/>
                     </a:p>
@@ -25118,7 +25372,7 @@
                 </a:tc>
                 <a:extLst>
                   <a:ext uri="{0D108BD9-81ED-4DB2-BD59-A6C34878D82A}">
-                    <a16:rowId xmlns:a16="http://schemas.microsoft.com/office/drawing/2014/main" val="3341429027"/>
+                    <a16:rowId xmlns:a16="http://schemas.microsoft.com/office/drawing/2014/main" val="156842521"/>
                   </a:ext>
                 </a:extLst>
               </a:tr>
@@ -25130,7 +25384,7 @@
                     <a:p>
                       <a:r>
                         <a:rPr lang="en-GB" sz="800" dirty="0"/>
-                        <a:t>35.</a:t>
+                        <a:t>34.</a:t>
                       </a:r>
                     </a:p>
                   </a:txBody>
@@ -25160,7 +25414,7 @@
                       </a:pPr>
                       <a:r>
                         <a:rPr lang="en-GB" sz="800" dirty="0"/>
-                        <a:t>K9 zone change level 2</a:t>
+                        <a:t>K9 zone change level 1</a:t>
                       </a:r>
                     </a:p>
                     <a:p>
@@ -25193,7 +25447,7 @@
                       </a:pPr>
                       <a:r>
                         <a:rPr lang="en-GB" sz="800" dirty="0"/>
-                        <a:t>Rm_level2</a:t>
+                        <a:t>Rm_level1</a:t>
                       </a:r>
                     </a:p>
                     <a:p>
@@ -25226,48 +25480,11 @@
                       </a:pPr>
                       <a:r>
                         <a:rPr lang="en-GB" sz="800" dirty="0"/>
-                        <a:t>Obj_amcd_gwiber_lvl2</a:t>
-                      </a:r>
-                    </a:p>
-                  </a:txBody>
-                  <a:tcPr/>
-                </a:tc>
-                <a:tc>
-                  <a:txBody>
-                    <a:bodyPr/>
-                    <a:lstStyle/>
+                        <a:t>Obj_amcd_k9_lvl1</a:t>
+                      </a:r>
+                    </a:p>
                     <a:p>
                       <a:endParaRPr lang="en-GB" sz="800" dirty="0"/>
-                    </a:p>
-                  </a:txBody>
-                  <a:tcPr/>
-                </a:tc>
-                <a:tc>
-                  <a:txBody>
-                    <a:bodyPr/>
-                    <a:lstStyle/>
-                    <a:p>
-                      <a:endParaRPr lang="en-GB" sz="800" dirty="0"/>
-                    </a:p>
-                  </a:txBody>
-                  <a:tcPr/>
-                </a:tc>
-                <a:extLst>
-                  <a:ext uri="{0D108BD9-81ED-4DB2-BD59-A6C34878D82A}">
-                    <a16:rowId xmlns:a16="http://schemas.microsoft.com/office/drawing/2014/main" val="2830951609"/>
-                  </a:ext>
-                </a:extLst>
-              </a:tr>
-              <a:tr h="648831">
-                <a:tc>
-                  <a:txBody>
-                    <a:bodyPr/>
-                    <a:lstStyle/>
-                    <a:p>
-                      <a:r>
-                        <a:rPr lang="en-GB" sz="800" dirty="0"/>
-                        <a:t>36.</a:t>
-                      </a:r>
                     </a:p>
                   </a:txBody>
                   <a:tcPr/>
@@ -25296,11 +25513,97 @@
                       </a:pPr>
                       <a:r>
                         <a:rPr lang="en-GB" sz="800" dirty="0"/>
-                        <a:t>K9 zone change level 3</a:t>
+                        <a:t>When K9 moves between zones, he checks to see if any other </a:t>
+                      </a:r>
+                      <a:r>
+                        <a:rPr lang="en-GB" sz="800" dirty="0" err="1"/>
+                        <a:t>amcd</a:t>
+                      </a:r>
+                      <a:r>
+                        <a:rPr lang="en-GB" sz="800" dirty="0"/>
+                        <a:t> is in the zone he’s moving to. If there is an </a:t>
+                      </a:r>
+                      <a:r>
+                        <a:rPr lang="en-GB" sz="800" dirty="0" err="1"/>
+                        <a:t>amcd</a:t>
+                      </a:r>
+                      <a:r>
+                        <a:rPr lang="en-GB" sz="800" dirty="0"/>
+                        <a:t> like </a:t>
+                      </a:r>
+                      <a:r>
+                        <a:rPr lang="en-GB" sz="800" dirty="0" err="1"/>
+                        <a:t>Gwiber</a:t>
+                      </a:r>
+                      <a:r>
+                        <a:rPr lang="en-GB" sz="800" dirty="0"/>
+                        <a:t> in the same zone K9 is moving to, then the zone K9 is moving to, will change its object to display the zone with both K9 and </a:t>
+                      </a:r>
+                      <a:r>
+                        <a:rPr lang="en-GB" sz="800" dirty="0" err="1"/>
+                        <a:t>Gwiber</a:t>
+                      </a:r>
+                      <a:r>
+                        <a:rPr lang="en-GB" sz="800" dirty="0"/>
+                        <a:t>. If K9 moves to a zone, then the previous zone he was in, will return to normal, or if </a:t>
+                      </a:r>
+                      <a:r>
+                        <a:rPr lang="en-GB" sz="800" dirty="0" err="1"/>
+                        <a:t>Gwiber</a:t>
+                      </a:r>
+                      <a:r>
+                        <a:rPr lang="en-GB" sz="800" dirty="0"/>
+                        <a:t> was in the same zone, it will only display the </a:t>
+                      </a:r>
+                      <a:r>
+                        <a:rPr lang="en-GB" sz="800" dirty="0" err="1"/>
+                        <a:t>Gwiber</a:t>
+                      </a:r>
+                      <a:r>
+                        <a:rPr lang="en-GB" sz="800" dirty="0"/>
+                        <a:t> zone after K9 leaves it. If K9 moves to a zone that </a:t>
+                      </a:r>
+                      <a:r>
+                        <a:rPr lang="en-GB" sz="800" dirty="0" err="1"/>
+                        <a:t>Gwiber</a:t>
+                      </a:r>
+                      <a:r>
+                        <a:rPr lang="en-GB" sz="800" dirty="0"/>
+                        <a:t> is not in, the zone he moves to displays K9 only.</a:t>
                       </a:r>
                     </a:p>
                     <a:p>
                       <a:endParaRPr lang="en-GB" sz="800" dirty="0"/>
+                    </a:p>
+                  </a:txBody>
+                  <a:tcPr/>
+                </a:tc>
+                <a:tc>
+                  <a:txBody>
+                    <a:bodyPr/>
+                    <a:lstStyle/>
+                    <a:p>
+                      <a:endParaRPr lang="en-GB" sz="800" dirty="0"/>
+                    </a:p>
+                  </a:txBody>
+                  <a:tcPr/>
+                </a:tc>
+                <a:extLst>
+                  <a:ext uri="{0D108BD9-81ED-4DB2-BD59-A6C34878D82A}">
+                    <a16:rowId xmlns:a16="http://schemas.microsoft.com/office/drawing/2014/main" val="3341429027"/>
+                  </a:ext>
+                </a:extLst>
+              </a:tr>
+              <a:tr h="648831">
+                <a:tc>
+                  <a:txBody>
+                    <a:bodyPr/>
+                    <a:lstStyle/>
+                    <a:p>
+                      <a:r>
+                        <a:rPr lang="en-GB" sz="800" dirty="0"/>
+                        <a:t>35.</a:t>
+                      </a:r>
                     </a:p>
                   </a:txBody>
                   <a:tcPr/>
@@ -25329,7 +25632,7 @@
                       </a:pPr>
                       <a:r>
                         <a:rPr lang="en-GB" sz="800" dirty="0"/>
-                        <a:t>Rm_level3</a:t>
+                        <a:t>K9 zone change level 2</a:t>
                       </a:r>
                     </a:p>
                     <a:p>
@@ -25362,51 +25665,11 @@
                       </a:pPr>
                       <a:r>
                         <a:rPr lang="en-GB" sz="800" dirty="0"/>
-                        <a:t>Obj_amcd_gwiber_lvl3</a:t>
+                        <a:t>Rm_level2</a:t>
                       </a:r>
                     </a:p>
                     <a:p>
                       <a:endParaRPr lang="en-GB" sz="800" dirty="0"/>
-                    </a:p>
-                  </a:txBody>
-                  <a:tcPr/>
-                </a:tc>
-                <a:tc>
-                  <a:txBody>
-                    <a:bodyPr/>
-                    <a:lstStyle/>
-                    <a:p>
-                      <a:endParaRPr lang="en-GB" sz="800" dirty="0"/>
-                    </a:p>
-                  </a:txBody>
-                  <a:tcPr/>
-                </a:tc>
-                <a:tc>
-                  <a:txBody>
-                    <a:bodyPr/>
-                    <a:lstStyle/>
-                    <a:p>
-                      <a:endParaRPr lang="en-GB" sz="800" dirty="0"/>
-                    </a:p>
-                  </a:txBody>
-                  <a:tcPr/>
-                </a:tc>
-                <a:extLst>
-                  <a:ext uri="{0D108BD9-81ED-4DB2-BD59-A6C34878D82A}">
-                    <a16:rowId xmlns:a16="http://schemas.microsoft.com/office/drawing/2014/main" val="2951929266"/>
-                  </a:ext>
-                </a:extLst>
-              </a:tr>
-              <a:tr h="648831">
-                <a:tc>
-                  <a:txBody>
-                    <a:bodyPr/>
-                    <a:lstStyle/>
-                    <a:p>
-                      <a:r>
-                        <a:rPr lang="en-GB" sz="800" dirty="0"/>
-                        <a:t>37.</a:t>
-                      </a:r>
                     </a:p>
                   </a:txBody>
                   <a:tcPr/>
@@ -25435,11 +25698,8 @@
                       </a:pPr>
                       <a:r>
                         <a:rPr lang="en-GB" sz="800" dirty="0"/>
-                        <a:t>K9 zone change level 5</a:t>
-                      </a:r>
-                    </a:p>
-                    <a:p>
-                      <a:endParaRPr lang="en-GB" sz="800" dirty="0"/>
+                        <a:t>Obj_amcd_k9_lvl2</a:t>
+                      </a:r>
                     </a:p>
                   </a:txBody>
                   <a:tcPr/>
@@ -25468,11 +25728,97 @@
                       </a:pPr>
                       <a:r>
                         <a:rPr lang="en-GB" sz="800" dirty="0"/>
-                        <a:t>Rm_level5</a:t>
+                        <a:t>When K9 moves between zones, he checks to see if any other </a:t>
+                      </a:r>
+                      <a:r>
+                        <a:rPr lang="en-GB" sz="800" dirty="0" err="1"/>
+                        <a:t>amcd</a:t>
+                      </a:r>
+                      <a:r>
+                        <a:rPr lang="en-GB" sz="800" dirty="0"/>
+                        <a:t> is in the zone he’s moving to. If there is an </a:t>
+                      </a:r>
+                      <a:r>
+                        <a:rPr lang="en-GB" sz="800" dirty="0" err="1"/>
+                        <a:t>amcd</a:t>
+                      </a:r>
+                      <a:r>
+                        <a:rPr lang="en-GB" sz="800" dirty="0"/>
+                        <a:t> like </a:t>
+                      </a:r>
+                      <a:r>
+                        <a:rPr lang="en-GB" sz="800" dirty="0" err="1"/>
+                        <a:t>Gwiber</a:t>
+                      </a:r>
+                      <a:r>
+                        <a:rPr lang="en-GB" sz="800" dirty="0"/>
+                        <a:t> in the same zone K9 is moving to, then the zone K9 is moving to, will change its object to display the zone with both K9 and </a:t>
+                      </a:r>
+                      <a:r>
+                        <a:rPr lang="en-GB" sz="800" dirty="0" err="1"/>
+                        <a:t>Gwiber</a:t>
+                      </a:r>
+                      <a:r>
+                        <a:rPr lang="en-GB" sz="800" dirty="0"/>
+                        <a:t>. If K9 moves to a zone, then the previous zone he was in, will return to normal, or if </a:t>
+                      </a:r>
+                      <a:r>
+                        <a:rPr lang="en-GB" sz="800" dirty="0" err="1"/>
+                        <a:t>Gwiber</a:t>
+                      </a:r>
+                      <a:r>
+                        <a:rPr lang="en-GB" sz="800" dirty="0"/>
+                        <a:t> was in the same zone, it will only display the </a:t>
+                      </a:r>
+                      <a:r>
+                        <a:rPr lang="en-GB" sz="800" dirty="0" err="1"/>
+                        <a:t>Gwiber</a:t>
+                      </a:r>
+                      <a:r>
+                        <a:rPr lang="en-GB" sz="800" dirty="0"/>
+                        <a:t> zone after K9 leaves it. If K9 moves to a zone that </a:t>
+                      </a:r>
+                      <a:r>
+                        <a:rPr lang="en-GB" sz="800" dirty="0" err="1"/>
+                        <a:t>Gwiber</a:t>
+                      </a:r>
+                      <a:r>
+                        <a:rPr lang="en-GB" sz="800" dirty="0"/>
+                        <a:t> is not in, the zone he moves to displays K9 only.</a:t>
                       </a:r>
                     </a:p>
                     <a:p>
                       <a:endParaRPr lang="en-GB" sz="800" dirty="0"/>
+                    </a:p>
+                  </a:txBody>
+                  <a:tcPr/>
+                </a:tc>
+                <a:tc>
+                  <a:txBody>
+                    <a:bodyPr/>
+                    <a:lstStyle/>
+                    <a:p>
+                      <a:endParaRPr lang="en-GB" sz="800" dirty="0"/>
+                    </a:p>
+                  </a:txBody>
+                  <a:tcPr/>
+                </a:tc>
+                <a:extLst>
+                  <a:ext uri="{0D108BD9-81ED-4DB2-BD59-A6C34878D82A}">
+                    <a16:rowId xmlns:a16="http://schemas.microsoft.com/office/drawing/2014/main" val="2830951609"/>
+                  </a:ext>
+                </a:extLst>
+              </a:tr>
+              <a:tr h="648831">
+                <a:tc>
+                  <a:txBody>
+                    <a:bodyPr/>
+                    <a:lstStyle/>
+                    <a:p>
+                      <a:r>
+                        <a:rPr lang="en-GB" sz="800" dirty="0"/>
+                        <a:t>36.</a:t>
+                      </a:r>
                     </a:p>
                   </a:txBody>
                   <a:tcPr/>
@@ -25501,7 +25847,7 @@
                       </a:pPr>
                       <a:r>
                         <a:rPr lang="en-GB" sz="800" dirty="0"/>
-                        <a:t>Obj_amcd_gwiber_lvl5</a:t>
+                        <a:t>K9 zone change level 3</a:t>
                       </a:r>
                     </a:p>
                     <a:p>
@@ -25514,6 +25860,369 @@
                   <a:txBody>
                     <a:bodyPr/>
                     <a:lstStyle/>
+                    <a:p>
+                      <a:pPr marL="0" marR="0" lvl="0" indent="0" algn="l" defTabSz="914400" rtl="0" eaLnBrk="1" fontAlgn="auto" latinLnBrk="0" hangingPunct="1">
+                        <a:lnSpc>
+                          <a:spcPct val="100000"/>
+                        </a:lnSpc>
+                        <a:spcBef>
+                          <a:spcPts val="0"/>
+                        </a:spcBef>
+                        <a:spcAft>
+                          <a:spcPts val="0"/>
+                        </a:spcAft>
+                        <a:buClrTx/>
+                        <a:buSzTx/>
+                        <a:buFontTx/>
+                        <a:buNone/>
+                        <a:tabLst/>
+                        <a:defRPr/>
+                      </a:pPr>
+                      <a:r>
+                        <a:rPr lang="en-GB" sz="800" dirty="0"/>
+                        <a:t>Rm_level3</a:t>
+                      </a:r>
+                    </a:p>
+                    <a:p>
+                      <a:endParaRPr lang="en-GB" sz="800" dirty="0"/>
+                    </a:p>
+                  </a:txBody>
+                  <a:tcPr/>
+                </a:tc>
+                <a:tc>
+                  <a:txBody>
+                    <a:bodyPr/>
+                    <a:lstStyle/>
+                    <a:p>
+                      <a:pPr marL="0" marR="0" lvl="0" indent="0" algn="l" defTabSz="914400" rtl="0" eaLnBrk="1" fontAlgn="auto" latinLnBrk="0" hangingPunct="1">
+                        <a:lnSpc>
+                          <a:spcPct val="100000"/>
+                        </a:lnSpc>
+                        <a:spcBef>
+                          <a:spcPts val="0"/>
+                        </a:spcBef>
+                        <a:spcAft>
+                          <a:spcPts val="0"/>
+                        </a:spcAft>
+                        <a:buClrTx/>
+                        <a:buSzTx/>
+                        <a:buFontTx/>
+                        <a:buNone/>
+                        <a:tabLst/>
+                        <a:defRPr/>
+                      </a:pPr>
+                      <a:r>
+                        <a:rPr lang="en-GB" sz="800" dirty="0"/>
+                        <a:t>Obj_amcd_k9_lvl3</a:t>
+                      </a:r>
+                    </a:p>
+                    <a:p>
+                      <a:endParaRPr lang="en-GB" sz="800" dirty="0"/>
+                    </a:p>
+                  </a:txBody>
+                  <a:tcPr/>
+                </a:tc>
+                <a:tc>
+                  <a:txBody>
+                    <a:bodyPr/>
+                    <a:lstStyle/>
+                    <a:p>
+                      <a:pPr marL="0" marR="0" lvl="0" indent="0" algn="l" defTabSz="914400" rtl="0" eaLnBrk="1" fontAlgn="auto" latinLnBrk="0" hangingPunct="1">
+                        <a:lnSpc>
+                          <a:spcPct val="100000"/>
+                        </a:lnSpc>
+                        <a:spcBef>
+                          <a:spcPts val="0"/>
+                        </a:spcBef>
+                        <a:spcAft>
+                          <a:spcPts val="0"/>
+                        </a:spcAft>
+                        <a:buClrTx/>
+                        <a:buSzTx/>
+                        <a:buFontTx/>
+                        <a:buNone/>
+                        <a:tabLst/>
+                        <a:defRPr/>
+                      </a:pPr>
+                      <a:r>
+                        <a:rPr lang="en-GB" sz="800" dirty="0"/>
+                        <a:t>When K9 moves between zones, he checks to see if any other </a:t>
+                      </a:r>
+                      <a:r>
+                        <a:rPr lang="en-GB" sz="800" dirty="0" err="1"/>
+                        <a:t>amcd</a:t>
+                      </a:r>
+                      <a:r>
+                        <a:rPr lang="en-GB" sz="800" dirty="0"/>
+                        <a:t> is in the zone he’s moving to. If there is an </a:t>
+                      </a:r>
+                      <a:r>
+                        <a:rPr lang="en-GB" sz="800" dirty="0" err="1"/>
+                        <a:t>amcd</a:t>
+                      </a:r>
+                      <a:r>
+                        <a:rPr lang="en-GB" sz="800" dirty="0"/>
+                        <a:t> like </a:t>
+                      </a:r>
+                      <a:r>
+                        <a:rPr lang="en-GB" sz="800" dirty="0" err="1"/>
+                        <a:t>Gwiber</a:t>
+                      </a:r>
+                      <a:r>
+                        <a:rPr lang="en-GB" sz="800" dirty="0"/>
+                        <a:t> in the same zone K9 is moving to, then the zone K9 is moving to, will change its object to display the zone with both K9 and </a:t>
+                      </a:r>
+                      <a:r>
+                        <a:rPr lang="en-GB" sz="800" dirty="0" err="1"/>
+                        <a:t>Gwiber</a:t>
+                      </a:r>
+                      <a:r>
+                        <a:rPr lang="en-GB" sz="800" dirty="0"/>
+                        <a:t>. If K9 moves to a zone, then the previous zone he was in, will return to normal, or if </a:t>
+                      </a:r>
+                      <a:r>
+                        <a:rPr lang="en-GB" sz="800" dirty="0" err="1"/>
+                        <a:t>Gwiber</a:t>
+                      </a:r>
+                      <a:r>
+                        <a:rPr lang="en-GB" sz="800" dirty="0"/>
+                        <a:t> was in the same zone, it will only display the </a:t>
+                      </a:r>
+                      <a:r>
+                        <a:rPr lang="en-GB" sz="800" dirty="0" err="1"/>
+                        <a:t>Gwiber</a:t>
+                      </a:r>
+                      <a:r>
+                        <a:rPr lang="en-GB" sz="800" dirty="0"/>
+                        <a:t> zone after K9 leaves it. If K9 moves to a zone that </a:t>
+                      </a:r>
+                      <a:r>
+                        <a:rPr lang="en-GB" sz="800" dirty="0" err="1"/>
+                        <a:t>Gwiber</a:t>
+                      </a:r>
+                      <a:r>
+                        <a:rPr lang="en-GB" sz="800" dirty="0"/>
+                        <a:t> is not in, the zone he moves to displays K9 only.</a:t>
+                      </a:r>
+                    </a:p>
+                    <a:p>
+                      <a:endParaRPr lang="en-GB" sz="800" dirty="0"/>
+                    </a:p>
+                  </a:txBody>
+                  <a:tcPr/>
+                </a:tc>
+                <a:tc>
+                  <a:txBody>
+                    <a:bodyPr/>
+                    <a:lstStyle/>
+                    <a:p>
+                      <a:endParaRPr lang="en-GB" sz="800" dirty="0"/>
+                    </a:p>
+                  </a:txBody>
+                  <a:tcPr/>
+                </a:tc>
+                <a:extLst>
+                  <a:ext uri="{0D108BD9-81ED-4DB2-BD59-A6C34878D82A}">
+                    <a16:rowId xmlns:a16="http://schemas.microsoft.com/office/drawing/2014/main" val="2951929266"/>
+                  </a:ext>
+                </a:extLst>
+              </a:tr>
+              <a:tr h="648831">
+                <a:tc>
+                  <a:txBody>
+                    <a:bodyPr/>
+                    <a:lstStyle/>
+                    <a:p>
+                      <a:r>
+                        <a:rPr lang="en-GB" sz="800" dirty="0"/>
+                        <a:t>37.</a:t>
+                      </a:r>
+                    </a:p>
+                  </a:txBody>
+                  <a:tcPr/>
+                </a:tc>
+                <a:tc>
+                  <a:txBody>
+                    <a:bodyPr/>
+                    <a:lstStyle/>
+                    <a:p>
+                      <a:pPr marL="0" marR="0" lvl="0" indent="0" algn="l" defTabSz="914400" rtl="0" eaLnBrk="1" fontAlgn="auto" latinLnBrk="0" hangingPunct="1">
+                        <a:lnSpc>
+                          <a:spcPct val="100000"/>
+                        </a:lnSpc>
+                        <a:spcBef>
+                          <a:spcPts val="0"/>
+                        </a:spcBef>
+                        <a:spcAft>
+                          <a:spcPts val="0"/>
+                        </a:spcAft>
+                        <a:buClrTx/>
+                        <a:buSzTx/>
+                        <a:buFontTx/>
+                        <a:buNone/>
+                        <a:tabLst/>
+                        <a:defRPr/>
+                      </a:pPr>
+                      <a:r>
+                        <a:rPr lang="en-GB" sz="800" dirty="0"/>
+                        <a:t>K9 zone change level 5</a:t>
+                      </a:r>
+                    </a:p>
+                    <a:p>
+                      <a:endParaRPr lang="en-GB" sz="800" dirty="0"/>
+                    </a:p>
+                  </a:txBody>
+                  <a:tcPr/>
+                </a:tc>
+                <a:tc>
+                  <a:txBody>
+                    <a:bodyPr/>
+                    <a:lstStyle/>
+                    <a:p>
+                      <a:pPr marL="0" marR="0" lvl="0" indent="0" algn="l" defTabSz="914400" rtl="0" eaLnBrk="1" fontAlgn="auto" latinLnBrk="0" hangingPunct="1">
+                        <a:lnSpc>
+                          <a:spcPct val="100000"/>
+                        </a:lnSpc>
+                        <a:spcBef>
+                          <a:spcPts val="0"/>
+                        </a:spcBef>
+                        <a:spcAft>
+                          <a:spcPts val="0"/>
+                        </a:spcAft>
+                        <a:buClrTx/>
+                        <a:buSzTx/>
+                        <a:buFontTx/>
+                        <a:buNone/>
+                        <a:tabLst/>
+                        <a:defRPr/>
+                      </a:pPr>
+                      <a:r>
+                        <a:rPr lang="en-GB" sz="800" dirty="0"/>
+                        <a:t>Rm_level5</a:t>
+                      </a:r>
+                    </a:p>
+                    <a:p>
+                      <a:endParaRPr lang="en-GB" sz="800" dirty="0"/>
+                    </a:p>
+                  </a:txBody>
+                  <a:tcPr/>
+                </a:tc>
+                <a:tc>
+                  <a:txBody>
+                    <a:bodyPr/>
+                    <a:lstStyle/>
+                    <a:p>
+                      <a:pPr marL="0" marR="0" lvl="0" indent="0" algn="l" defTabSz="914400" rtl="0" eaLnBrk="1" fontAlgn="auto" latinLnBrk="0" hangingPunct="1">
+                        <a:lnSpc>
+                          <a:spcPct val="100000"/>
+                        </a:lnSpc>
+                        <a:spcBef>
+                          <a:spcPts val="0"/>
+                        </a:spcBef>
+                        <a:spcAft>
+                          <a:spcPts val="0"/>
+                        </a:spcAft>
+                        <a:buClrTx/>
+                        <a:buSzTx/>
+                        <a:buFontTx/>
+                        <a:buNone/>
+                        <a:tabLst/>
+                        <a:defRPr/>
+                      </a:pPr>
+                      <a:r>
+                        <a:rPr lang="en-GB" sz="800" dirty="0"/>
+                        <a:t>Obj_amcd_k9_lvl5</a:t>
+                      </a:r>
+                    </a:p>
+                    <a:p>
+                      <a:endParaRPr lang="en-GB" sz="800" dirty="0"/>
+                    </a:p>
+                  </a:txBody>
+                  <a:tcPr/>
+                </a:tc>
+                <a:tc>
+                  <a:txBody>
+                    <a:bodyPr/>
+                    <a:lstStyle/>
+                    <a:p>
+                      <a:pPr marL="0" marR="0" lvl="0" indent="0" algn="l" defTabSz="914400" rtl="0" eaLnBrk="1" fontAlgn="auto" latinLnBrk="0" hangingPunct="1">
+                        <a:lnSpc>
+                          <a:spcPct val="100000"/>
+                        </a:lnSpc>
+                        <a:spcBef>
+                          <a:spcPts val="0"/>
+                        </a:spcBef>
+                        <a:spcAft>
+                          <a:spcPts val="0"/>
+                        </a:spcAft>
+                        <a:buClrTx/>
+                        <a:buSzTx/>
+                        <a:buFontTx/>
+                        <a:buNone/>
+                        <a:tabLst/>
+                        <a:defRPr/>
+                      </a:pPr>
+                      <a:r>
+                        <a:rPr lang="en-GB" sz="800" dirty="0"/>
+                        <a:t>When K9 moves between zones, he checks to see if any other </a:t>
+                      </a:r>
+                      <a:r>
+                        <a:rPr lang="en-GB" sz="800" dirty="0" err="1"/>
+                        <a:t>amcd</a:t>
+                      </a:r>
+                      <a:r>
+                        <a:rPr lang="en-GB" sz="800" dirty="0"/>
+                        <a:t> is in the zone he’s moving to. If there is an </a:t>
+                      </a:r>
+                      <a:r>
+                        <a:rPr lang="en-GB" sz="800" dirty="0" err="1"/>
+                        <a:t>amcd</a:t>
+                      </a:r>
+                      <a:r>
+                        <a:rPr lang="en-GB" sz="800" dirty="0"/>
+                        <a:t> like </a:t>
+                      </a:r>
+                      <a:r>
+                        <a:rPr lang="en-GB" sz="800" dirty="0" err="1"/>
+                        <a:t>Gwiber</a:t>
+                      </a:r>
+                      <a:r>
+                        <a:rPr lang="en-GB" sz="800" dirty="0"/>
+                        <a:t> in the same zone K9 is moving to, then the zone K9 is moving to, will change its object to display the zone with both K9 and </a:t>
+                      </a:r>
+                      <a:r>
+                        <a:rPr lang="en-GB" sz="800" dirty="0" err="1"/>
+                        <a:t>Gwiber</a:t>
+                      </a:r>
+                      <a:r>
+                        <a:rPr lang="en-GB" sz="800" dirty="0"/>
+                        <a:t>. If K9 moves to a zone, then the previous zone he was in, will return to normal, or if </a:t>
+                      </a:r>
+                      <a:r>
+                        <a:rPr lang="en-GB" sz="800" dirty="0" err="1"/>
+                        <a:t>Gwiber</a:t>
+                      </a:r>
+                      <a:r>
+                        <a:rPr lang="en-GB" sz="800" dirty="0"/>
+                        <a:t> was in the same zone, it will only display the </a:t>
+                      </a:r>
+                      <a:r>
+                        <a:rPr lang="en-GB" sz="800" dirty="0" err="1"/>
+                        <a:t>Gwiber</a:t>
+                      </a:r>
+                      <a:r>
+                        <a:rPr lang="en-GB" sz="800" dirty="0"/>
+                        <a:t> zone after K9 leaves it. If K9 moves to a zone that </a:t>
+                      </a:r>
+                      <a:r>
+                        <a:rPr lang="en-GB" sz="800" dirty="0" err="1"/>
+                        <a:t>Gwiber</a:t>
+                      </a:r>
+                      <a:r>
+                        <a:rPr lang="en-GB" sz="800" dirty="0"/>
+                        <a:t> is not in, the zone he moves to displays K9 only.</a:t>
+                      </a:r>
+                    </a:p>
                     <a:p>
                       <a:endParaRPr lang="en-GB" sz="800" dirty="0"/>
                     </a:p>
@@ -25626,14 +26335,14 @@
           <p:nvPr>
             <p:extLst>
               <p:ext uri="{D42A27DB-BD31-4B8C-83A1-F6EECF244321}">
-                <p14:modId xmlns:p14="http://schemas.microsoft.com/office/powerpoint/2010/main" val="3169553721"/>
+                <p14:modId xmlns:p14="http://schemas.microsoft.com/office/powerpoint/2010/main" val="3433890630"/>
               </p:ext>
             </p:extLst>
           </p:nvPr>
         </p:nvGraphicFramePr>
         <p:xfrm>
           <a:off x="0" y="391886"/>
-          <a:ext cx="12034157" cy="5783707"/>
+          <a:ext cx="12034157" cy="4585423"/>
         </p:xfrm>
         <a:graphic>
           <a:graphicData uri="http://schemas.openxmlformats.org/drawingml/2006/table">
@@ -25670,14 +26379,14 @@
                     </a:ext>
                   </a:extLst>
                 </a:gridCol>
-                <a:gridCol w="4120849">
+                <a:gridCol w="5337328">
                   <a:extLst>
                     <a:ext uri="{9D8B030D-6E8A-4147-A177-3AD203B41FA5}">
                       <a16:colId xmlns:a16="http://schemas.microsoft.com/office/drawing/2014/main" val="786884226"/>
                     </a:ext>
                   </a:extLst>
                 </a:gridCol>
-                <a:gridCol w="2310493">
+                <a:gridCol w="1094014">
                   <a:extLst>
                     <a:ext uri="{9D8B030D-6E8A-4147-A177-3AD203B41FA5}">
                       <a16:colId xmlns:a16="http://schemas.microsoft.com/office/drawing/2014/main" val="259252547"/>
@@ -25818,59 +26527,6 @@
                       <a:r>
                         <a:rPr lang="en-GB" sz="800" dirty="0"/>
                         <a:t>Obj_amcd_bulker_lvl2</a:t>
-                      </a:r>
-                    </a:p>
-                  </a:txBody>
-                  <a:tcPr/>
-                </a:tc>
-                <a:tc>
-                  <a:txBody>
-                    <a:bodyPr/>
-                    <a:lstStyle/>
-                    <a:p>
-                      <a:endParaRPr lang="en-GB" sz="800" dirty="0"/>
-                    </a:p>
-                  </a:txBody>
-                  <a:tcPr/>
-                </a:tc>
-                <a:tc>
-                  <a:txBody>
-                    <a:bodyPr/>
-                    <a:lstStyle/>
-                    <a:p>
-                      <a:endParaRPr lang="en-GB" sz="800" dirty="0"/>
-                    </a:p>
-                  </a:txBody>
-                  <a:tcPr/>
-                </a:tc>
-                <a:extLst>
-                  <a:ext uri="{0D108BD9-81ED-4DB2-BD59-A6C34878D82A}">
-                    <a16:rowId xmlns:a16="http://schemas.microsoft.com/office/drawing/2014/main" val="2541011158"/>
-                  </a:ext>
-                </a:extLst>
-              </a:tr>
-              <a:tr h="648831">
-                <a:tc>
-                  <a:txBody>
-                    <a:bodyPr/>
-                    <a:lstStyle/>
-                    <a:p>
-                      <a:r>
-                        <a:rPr lang="en-GB" sz="800" dirty="0"/>
-                        <a:t>39.</a:t>
-                      </a:r>
-                    </a:p>
-                  </a:txBody>
-                  <a:tcPr/>
-                </a:tc>
-                <a:tc>
-                  <a:txBody>
-                    <a:bodyPr/>
-                    <a:lstStyle/>
-                    <a:p>
-                      <a:r>
-                        <a:rPr lang="en-GB" sz="800" dirty="0"/>
-                        <a:t>Bulker zone change level 3</a:t>
                       </a:r>
                     </a:p>
                   </a:txBody>
@@ -25900,11 +26556,70 @@
                       </a:pPr>
                       <a:r>
                         <a:rPr lang="en-GB" sz="800" dirty="0"/>
-                        <a:t>Rm_level3</a:t>
+                        <a:t>When Bulker moves between zones, he checks to see if any other </a:t>
+                      </a:r>
+                      <a:r>
+                        <a:rPr lang="en-GB" sz="800" dirty="0" err="1"/>
+                        <a:t>amcd</a:t>
+                      </a:r>
+                      <a:r>
+                        <a:rPr lang="en-GB" sz="800" dirty="0"/>
+                        <a:t> is in the zone he’s moving to. If there is an </a:t>
+                      </a:r>
+                      <a:r>
+                        <a:rPr lang="en-GB" sz="800" dirty="0" err="1"/>
+                        <a:t>amcd</a:t>
+                      </a:r>
+                      <a:r>
+                        <a:rPr lang="en-GB" sz="800" dirty="0"/>
+                        <a:t> like K9 in the same zone Bulker is moving to, then the zone Bulker is moving to, will change its object to display the zone with both Bulker and K9. If Bulker moves to a zone, then the previous zone he was in, will return to normal, or if K9 was in the same zone, it will only display the K9 zone after Bulker leaves it. If Bulker moves to a zone that K9 is not in, the zone he moves to displays K9 only.</a:t>
                       </a:r>
                     </a:p>
                     <a:p>
                       <a:endParaRPr lang="en-GB" sz="800" dirty="0"/>
+                    </a:p>
+                  </a:txBody>
+                  <a:tcPr/>
+                </a:tc>
+                <a:tc>
+                  <a:txBody>
+                    <a:bodyPr/>
+                    <a:lstStyle/>
+                    <a:p>
+                      <a:endParaRPr lang="en-GB" sz="800" dirty="0"/>
+                    </a:p>
+                  </a:txBody>
+                  <a:tcPr/>
+                </a:tc>
+                <a:extLst>
+                  <a:ext uri="{0D108BD9-81ED-4DB2-BD59-A6C34878D82A}">
+                    <a16:rowId xmlns:a16="http://schemas.microsoft.com/office/drawing/2014/main" val="2541011158"/>
+                  </a:ext>
+                </a:extLst>
+              </a:tr>
+              <a:tr h="648831">
+                <a:tc>
+                  <a:txBody>
+                    <a:bodyPr/>
+                    <a:lstStyle/>
+                    <a:p>
+                      <a:r>
+                        <a:rPr lang="en-GB" sz="800" dirty="0"/>
+                        <a:t>39.</a:t>
+                      </a:r>
+                    </a:p>
+                  </a:txBody>
+                  <a:tcPr/>
+                </a:tc>
+                <a:tc>
+                  <a:txBody>
+                    <a:bodyPr/>
+                    <a:lstStyle/>
+                    <a:p>
+                      <a:r>
+                        <a:rPr lang="en-GB" sz="800" dirty="0"/>
+                        <a:t>Bulker zone change level 3</a:t>
+                      </a:r>
                     </a:p>
                   </a:txBody>
                   <a:tcPr/>
@@ -25933,51 +26648,11 @@
                       </a:pPr>
                       <a:r>
                         <a:rPr lang="en-GB" sz="800" dirty="0"/>
-                        <a:t>Obj_amcd_bulker_lvl3</a:t>
+                        <a:t>Rm_level3</a:t>
                       </a:r>
                     </a:p>
                     <a:p>
                       <a:endParaRPr lang="en-GB" sz="800" dirty="0"/>
-                    </a:p>
-                  </a:txBody>
-                  <a:tcPr/>
-                </a:tc>
-                <a:tc>
-                  <a:txBody>
-                    <a:bodyPr/>
-                    <a:lstStyle/>
-                    <a:p>
-                      <a:endParaRPr lang="en-GB" sz="800" dirty="0"/>
-                    </a:p>
-                  </a:txBody>
-                  <a:tcPr/>
-                </a:tc>
-                <a:tc>
-                  <a:txBody>
-                    <a:bodyPr/>
-                    <a:lstStyle/>
-                    <a:p>
-                      <a:endParaRPr lang="en-GB" sz="800" dirty="0"/>
-                    </a:p>
-                  </a:txBody>
-                  <a:tcPr/>
-                </a:tc>
-                <a:extLst>
-                  <a:ext uri="{0D108BD9-81ED-4DB2-BD59-A6C34878D82A}">
-                    <a16:rowId xmlns:a16="http://schemas.microsoft.com/office/drawing/2014/main" val="4133394058"/>
-                  </a:ext>
-                </a:extLst>
-              </a:tr>
-              <a:tr h="648831">
-                <a:tc>
-                  <a:txBody>
-                    <a:bodyPr/>
-                    <a:lstStyle/>
-                    <a:p>
-                      <a:r>
-                        <a:rPr lang="en-GB" sz="800" dirty="0"/>
-                        <a:t>40.</a:t>
-                      </a:r>
                     </a:p>
                   </a:txBody>
                   <a:tcPr/>
@@ -26006,7 +26681,7 @@
                       </a:pPr>
                       <a:r>
                         <a:rPr lang="en-GB" sz="800" dirty="0"/>
-                        <a:t>Bulker zone change level 5</a:t>
+                        <a:t>Obj_amcd_bulker_lvl3</a:t>
                       </a:r>
                     </a:p>
                     <a:p>
@@ -26039,7 +26714,56 @@
                       </a:pPr>
                       <a:r>
                         <a:rPr lang="en-GB" sz="800" dirty="0"/>
-                        <a:t>Rm_level5</a:t>
+                        <a:t>When Bulker moves between zones, he checks to see if any other </a:t>
+                      </a:r>
+                      <a:r>
+                        <a:rPr lang="en-GB" sz="800" dirty="0" err="1"/>
+                        <a:t>amcd</a:t>
+                      </a:r>
+                      <a:r>
+                        <a:rPr lang="en-GB" sz="800" dirty="0"/>
+                        <a:t> is in the zone he’s moving to. If there is an </a:t>
+                      </a:r>
+                      <a:r>
+                        <a:rPr lang="en-GB" sz="800" dirty="0" err="1"/>
+                        <a:t>amcd</a:t>
+                      </a:r>
+                      <a:r>
+                        <a:rPr lang="en-GB" sz="800" dirty="0"/>
+                        <a:t> like K9 in the same zone Bulker is moving to, then the zone Bulker is moving to, will change its object to display the zone with both Bulker and K9. If Bulker moves to a zone, then the previous zone he was in, will return to normal, or if K9 was in the same zone, it will only display the K9 zone after Bulker leaves it. If Bulker moves to a zone that K9 is not in, the zone he moves to displays K9 only.</a:t>
+                      </a:r>
+                    </a:p>
+                    <a:p>
+                      <a:endParaRPr lang="en-GB" sz="800" dirty="0"/>
+                    </a:p>
+                  </a:txBody>
+                  <a:tcPr/>
+                </a:tc>
+                <a:tc>
+                  <a:txBody>
+                    <a:bodyPr/>
+                    <a:lstStyle/>
+                    <a:p>
+                      <a:endParaRPr lang="en-GB" sz="800" dirty="0"/>
+                    </a:p>
+                  </a:txBody>
+                  <a:tcPr/>
+                </a:tc>
+                <a:extLst>
+                  <a:ext uri="{0D108BD9-81ED-4DB2-BD59-A6C34878D82A}">
+                    <a16:rowId xmlns:a16="http://schemas.microsoft.com/office/drawing/2014/main" val="4133394058"/>
+                  </a:ext>
+                </a:extLst>
+              </a:tr>
+              <a:tr h="648831">
+                <a:tc>
+                  <a:txBody>
+                    <a:bodyPr/>
+                    <a:lstStyle/>
+                    <a:p>
+                      <a:r>
+                        <a:rPr lang="en-GB" sz="800" dirty="0"/>
+                        <a:t>40.</a:t>
                       </a:r>
                     </a:p>
                   </a:txBody>
@@ -26069,51 +26793,11 @@
                       </a:pPr>
                       <a:r>
                         <a:rPr lang="en-GB" sz="800" dirty="0"/>
-                        <a:t>Obj_amcd_bulker_lvl5</a:t>
+                        <a:t>Bulker zone change level 5</a:t>
                       </a:r>
                     </a:p>
                     <a:p>
                       <a:endParaRPr lang="en-GB" sz="800" dirty="0"/>
-                    </a:p>
-                  </a:txBody>
-                  <a:tcPr/>
-                </a:tc>
-                <a:tc>
-                  <a:txBody>
-                    <a:bodyPr/>
-                    <a:lstStyle/>
-                    <a:p>
-                      <a:endParaRPr lang="en-GB" sz="800" dirty="0"/>
-                    </a:p>
-                  </a:txBody>
-                  <a:tcPr/>
-                </a:tc>
-                <a:tc>
-                  <a:txBody>
-                    <a:bodyPr/>
-                    <a:lstStyle/>
-                    <a:p>
-                      <a:endParaRPr lang="en-GB" sz="800" dirty="0"/>
-                    </a:p>
-                  </a:txBody>
-                  <a:tcPr/>
-                </a:tc>
-                <a:extLst>
-                  <a:ext uri="{0D108BD9-81ED-4DB2-BD59-A6C34878D82A}">
-                    <a16:rowId xmlns:a16="http://schemas.microsoft.com/office/drawing/2014/main" val="3113226149"/>
-                  </a:ext>
-                </a:extLst>
-              </a:tr>
-              <a:tr h="685312">
-                <a:tc>
-                  <a:txBody>
-                    <a:bodyPr/>
-                    <a:lstStyle/>
-                    <a:p>
-                      <a:r>
-                        <a:rPr lang="en-GB" sz="800" dirty="0"/>
-                        <a:t>41.</a:t>
-                      </a:r>
                     </a:p>
                   </a:txBody>
                   <a:tcPr/>
@@ -26142,11 +26826,8 @@
                       </a:pPr>
                       <a:r>
                         <a:rPr lang="en-GB" sz="800" dirty="0"/>
-                        <a:t>Prototype zone change level 4</a:t>
-                      </a:r>
-                    </a:p>
-                    <a:p>
-                      <a:endParaRPr lang="en-GB" sz="800" dirty="0"/>
+                        <a:t>Rm_level5</a:t>
+                      </a:r>
                     </a:p>
                   </a:txBody>
                   <a:tcPr/>
@@ -26175,8 +26856,11 @@
                       </a:pPr>
                       <a:r>
                         <a:rPr lang="en-GB" sz="800" dirty="0"/>
-                        <a:t>Rm_level4</a:t>
-                      </a:r>
+                        <a:t>Obj_amcd_bulker_lvl5</a:t>
+                      </a:r>
+                    </a:p>
+                    <a:p>
+                      <a:endParaRPr lang="en-GB" sz="800" dirty="0"/>
                     </a:p>
                   </a:txBody>
                   <a:tcPr/>
@@ -26205,16 +26889,25 @@
                       </a:pPr>
                       <a:r>
                         <a:rPr lang="en-GB" sz="800" dirty="0"/>
-                        <a:t>Obj_amcd_prototype_lvl4</a:t>
-                      </a:r>
-                    </a:p>
-                  </a:txBody>
-                  <a:tcPr/>
-                </a:tc>
-                <a:tc>
-                  <a:txBody>
-                    <a:bodyPr/>
-                    <a:lstStyle/>
+                        <a:t>When Bulker moves between zones, he checks to see if any other </a:t>
+                      </a:r>
+                      <a:r>
+                        <a:rPr lang="en-GB" sz="800" dirty="0" err="1"/>
+                        <a:t>amcd</a:t>
+                      </a:r>
+                      <a:r>
+                        <a:rPr lang="en-GB" sz="800" dirty="0"/>
+                        <a:t> is in the zone he’s moving to. If there is an </a:t>
+                      </a:r>
+                      <a:r>
+                        <a:rPr lang="en-GB" sz="800" dirty="0" err="1"/>
+                        <a:t>amcd</a:t>
+                      </a:r>
+                      <a:r>
+                        <a:rPr lang="en-GB" sz="800" dirty="0"/>
+                        <a:t> like K9 in the same zone Bulker is moving to, then the zone Bulker is moving to, will change its object to display the zone with both Bulker and K9. If Bulker moves to a zone, then the previous zone he was in, will return to normal, or if K9 was in the same zone, it will only display the K9 zone after Bulker leaves it. If Bulker moves to a zone that K9 is not in, the zone he moves to displays K9 only.</a:t>
+                      </a:r>
+                    </a:p>
                     <a:p>
                       <a:endParaRPr lang="en-GB" sz="800" dirty="0"/>
                     </a:p>
@@ -26233,19 +26926,19 @@
                 </a:tc>
                 <a:extLst>
                   <a:ext uri="{0D108BD9-81ED-4DB2-BD59-A6C34878D82A}">
-                    <a16:rowId xmlns:a16="http://schemas.microsoft.com/office/drawing/2014/main" val="156842521"/>
+                    <a16:rowId xmlns:a16="http://schemas.microsoft.com/office/drawing/2014/main" val="3113226149"/>
                   </a:ext>
                 </a:extLst>
               </a:tr>
-              <a:tr h="734786">
-                <a:tc>
-                  <a:txBody>
-                    <a:bodyPr/>
-                    <a:lstStyle/>
-                    <a:p>
-                      <a:r>
-                        <a:rPr lang="en-GB" sz="800" dirty="0"/>
-                        <a:t>42.</a:t>
+              <a:tr h="685312">
+                <a:tc>
+                  <a:txBody>
+                    <a:bodyPr/>
+                    <a:lstStyle/>
+                    <a:p>
+                      <a:r>
+                        <a:rPr lang="en-GB" sz="800" dirty="0"/>
+                        <a:t>41.</a:t>
                       </a:r>
                     </a:p>
                   </a:txBody>
@@ -26275,7 +26968,7 @@
                       </a:pPr>
                       <a:r>
                         <a:rPr lang="en-GB" sz="800" dirty="0"/>
-                        <a:t>Prototype zone change level 5</a:t>
+                        <a:t>Prototype zone change level 4</a:t>
                       </a:r>
                     </a:p>
                     <a:p>
@@ -26308,11 +27001,8 @@
                       </a:pPr>
                       <a:r>
                         <a:rPr lang="en-GB" sz="800" dirty="0"/>
-                        <a:t>Rm_level5</a:t>
-                      </a:r>
-                    </a:p>
-                    <a:p>
-                      <a:endParaRPr lang="en-GB" sz="800" dirty="0"/>
+                        <a:t>Rm_level4</a:t>
+                      </a:r>
                     </a:p>
                   </a:txBody>
                   <a:tcPr/>
@@ -26341,61 +27031,8 @@
                       </a:pPr>
                       <a:r>
                         <a:rPr lang="en-GB" sz="800" dirty="0"/>
-                        <a:t>Obj_amcd_prototype_lvl5</a:t>
-                      </a:r>
-                    </a:p>
-                    <a:p>
-                      <a:endParaRPr lang="en-GB" sz="800" dirty="0"/>
-                    </a:p>
-                  </a:txBody>
-                  <a:tcPr/>
-                </a:tc>
-                <a:tc>
-                  <a:txBody>
-                    <a:bodyPr/>
-                    <a:lstStyle/>
-                    <a:p>
-                      <a:endParaRPr lang="en-GB" sz="800" dirty="0"/>
-                    </a:p>
-                  </a:txBody>
-                  <a:tcPr/>
-                </a:tc>
-                <a:tc>
-                  <a:txBody>
-                    <a:bodyPr/>
-                    <a:lstStyle/>
-                    <a:p>
-                      <a:endParaRPr lang="en-GB" sz="800" dirty="0"/>
-                    </a:p>
-                  </a:txBody>
-                  <a:tcPr/>
-                </a:tc>
-                <a:extLst>
-                  <a:ext uri="{0D108BD9-81ED-4DB2-BD59-A6C34878D82A}">
-                    <a16:rowId xmlns:a16="http://schemas.microsoft.com/office/drawing/2014/main" val="3341429027"/>
-                  </a:ext>
-                </a:extLst>
-              </a:tr>
-              <a:tr h="648831">
-                <a:tc>
-                  <a:txBody>
-                    <a:bodyPr/>
-                    <a:lstStyle/>
-                    <a:p>
-                      <a:r>
-                        <a:rPr lang="en-GB" sz="800" dirty="0"/>
-                        <a:t>43.</a:t>
-                      </a:r>
-                    </a:p>
-                  </a:txBody>
-                  <a:tcPr/>
-                </a:tc>
-                <a:tc>
-                  <a:txBody>
-                    <a:bodyPr/>
-                    <a:lstStyle/>
-                    <a:p>
-                      <a:endParaRPr lang="en-GB" sz="800" dirty="0"/>
+                        <a:t>Obj_amcd_prototype_lvl4</a:t>
+                      </a:r>
                     </a:p>
                   </a:txBody>
                   <a:tcPr/>
@@ -26424,11 +27061,57 @@
                       </a:pPr>
                       <a:r>
                         <a:rPr lang="en-GB" sz="800" dirty="0"/>
-                        <a:t>Rm_level2</a:t>
+                        <a:t>When Prototype moves between zones, he checks to see if any other </a:t>
+                      </a:r>
+                      <a:r>
+                        <a:rPr lang="en-GB" sz="800" dirty="0" err="1"/>
+                        <a:t>amcd</a:t>
+                      </a:r>
+                      <a:r>
+                        <a:rPr lang="en-GB" sz="800" dirty="0"/>
+                        <a:t> is in the zone he’s moving to. If there is an </a:t>
+                      </a:r>
+                      <a:r>
+                        <a:rPr lang="en-GB" sz="800" dirty="0" err="1"/>
+                        <a:t>amcd</a:t>
+                      </a:r>
+                      <a:r>
+                        <a:rPr lang="en-GB" sz="800" dirty="0"/>
+                        <a:t> like K9 in the same zone Prototype is moving to, then the zone Prototype is moving to, will change its object to display the zone with both Prototype and K9. If Prototype moves to a zone, then the previous zone he was in, will return to normal, or if K9 was in the same zone, it will only display the K9 zone after Prototype leaves it. If Prototype moves to a zone that K9 is not in, the zone he moves to displays K9 only.</a:t>
                       </a:r>
                     </a:p>
                     <a:p>
                       <a:endParaRPr lang="en-GB" sz="800" dirty="0"/>
+                    </a:p>
+                  </a:txBody>
+                  <a:tcPr/>
+                </a:tc>
+                <a:tc>
+                  <a:txBody>
+                    <a:bodyPr/>
+                    <a:lstStyle/>
+                    <a:p>
+                      <a:endParaRPr lang="en-GB" sz="800" dirty="0"/>
+                    </a:p>
+                  </a:txBody>
+                  <a:tcPr/>
+                </a:tc>
+                <a:extLst>
+                  <a:ext uri="{0D108BD9-81ED-4DB2-BD59-A6C34878D82A}">
+                    <a16:rowId xmlns:a16="http://schemas.microsoft.com/office/drawing/2014/main" val="156842521"/>
+                  </a:ext>
+                </a:extLst>
+              </a:tr>
+              <a:tr h="734786">
+                <a:tc>
+                  <a:txBody>
+                    <a:bodyPr/>
+                    <a:lstStyle/>
+                    <a:p>
+                      <a:r>
+                        <a:rPr lang="en-GB" sz="800" dirty="0"/>
+                        <a:t>42.</a:t>
+                      </a:r>
                     </a:p>
                   </a:txBody>
                   <a:tcPr/>
@@ -26457,56 +27140,9 @@
                       </a:pPr>
                       <a:r>
                         <a:rPr lang="en-GB" sz="800" dirty="0"/>
-                        <a:t>Obj_amcd_gwiber_lvl2</a:t>
-                      </a:r>
-                    </a:p>
-                  </a:txBody>
-                  <a:tcPr/>
-                </a:tc>
-                <a:tc>
-                  <a:txBody>
-                    <a:bodyPr/>
-                    <a:lstStyle/>
-                    <a:p>
-                      <a:endParaRPr lang="en-GB" sz="800" dirty="0"/>
-                    </a:p>
-                  </a:txBody>
-                  <a:tcPr/>
-                </a:tc>
-                <a:tc>
-                  <a:txBody>
-                    <a:bodyPr/>
-                    <a:lstStyle/>
-                    <a:p>
-                      <a:endParaRPr lang="en-GB" sz="800" dirty="0"/>
-                    </a:p>
-                  </a:txBody>
-                  <a:tcPr/>
-                </a:tc>
-                <a:extLst>
-                  <a:ext uri="{0D108BD9-81ED-4DB2-BD59-A6C34878D82A}">
-                    <a16:rowId xmlns:a16="http://schemas.microsoft.com/office/drawing/2014/main" val="2830951609"/>
-                  </a:ext>
-                </a:extLst>
-              </a:tr>
-              <a:tr h="648831">
-                <a:tc>
-                  <a:txBody>
-                    <a:bodyPr/>
-                    <a:lstStyle/>
-                    <a:p>
-                      <a:r>
-                        <a:rPr lang="en-GB" sz="800" dirty="0"/>
-                        <a:t>44.</a:t>
-                      </a:r>
-                    </a:p>
-                  </a:txBody>
-                  <a:tcPr/>
-                </a:tc>
-                <a:tc>
-                  <a:txBody>
-                    <a:bodyPr/>
-                    <a:lstStyle/>
+                        <a:t>Prototype zone change level 5</a:t>
+                      </a:r>
+                    </a:p>
                     <a:p>
                       <a:endParaRPr lang="en-GB" sz="800" dirty="0"/>
                     </a:p>
@@ -26537,7 +27173,7 @@
                       </a:pPr>
                       <a:r>
                         <a:rPr lang="en-GB" sz="800" dirty="0"/>
-                        <a:t>Rm_level3</a:t>
+                        <a:t>Rm_level5</a:t>
                       </a:r>
                     </a:p>
                     <a:p>
@@ -26570,59 +27206,9 @@
                       </a:pPr>
                       <a:r>
                         <a:rPr lang="en-GB" sz="800" dirty="0"/>
-                        <a:t>Obj_amcd_gwiber_lvl3</a:t>
-                      </a:r>
-                    </a:p>
-                    <a:p>
-                      <a:endParaRPr lang="en-GB" sz="800" dirty="0"/>
-                    </a:p>
-                  </a:txBody>
-                  <a:tcPr/>
-                </a:tc>
-                <a:tc>
-                  <a:txBody>
-                    <a:bodyPr/>
-                    <a:lstStyle/>
-                    <a:p>
-                      <a:endParaRPr lang="en-GB" sz="800" dirty="0"/>
-                    </a:p>
-                  </a:txBody>
-                  <a:tcPr/>
-                </a:tc>
-                <a:tc>
-                  <a:txBody>
-                    <a:bodyPr/>
-                    <a:lstStyle/>
-                    <a:p>
-                      <a:endParaRPr lang="en-GB" sz="800" dirty="0"/>
-                    </a:p>
-                  </a:txBody>
-                  <a:tcPr/>
-                </a:tc>
-                <a:extLst>
-                  <a:ext uri="{0D108BD9-81ED-4DB2-BD59-A6C34878D82A}">
-                    <a16:rowId xmlns:a16="http://schemas.microsoft.com/office/drawing/2014/main" val="2951929266"/>
-                  </a:ext>
-                </a:extLst>
-              </a:tr>
-              <a:tr h="648831">
-                <a:tc>
-                  <a:txBody>
-                    <a:bodyPr/>
-                    <a:lstStyle/>
-                    <a:p>
-                      <a:r>
-                        <a:rPr lang="en-GB" sz="800" dirty="0"/>
-                        <a:t>45.</a:t>
-                      </a:r>
-                    </a:p>
-                  </a:txBody>
-                  <a:tcPr/>
-                </a:tc>
-                <a:tc>
-                  <a:txBody>
-                    <a:bodyPr/>
-                    <a:lstStyle/>
+                        <a:t>Obj_amcd_prototype_lvl5</a:t>
+                      </a:r>
+                    </a:p>
                     <a:p>
                       <a:endParaRPr lang="en-GB" sz="800" dirty="0"/>
                     </a:p>
@@ -26653,52 +27239,25 @@
                       </a:pPr>
                       <a:r>
                         <a:rPr lang="en-GB" sz="800" dirty="0"/>
-                        <a:t>Rm_level5</a:t>
-                      </a:r>
-                    </a:p>
-                    <a:p>
-                      <a:endParaRPr lang="en-GB" sz="800" dirty="0"/>
-                    </a:p>
-                  </a:txBody>
-                  <a:tcPr/>
-                </a:tc>
-                <a:tc>
-                  <a:txBody>
-                    <a:bodyPr/>
-                    <a:lstStyle/>
-                    <a:p>
-                      <a:pPr marL="0" marR="0" lvl="0" indent="0" algn="l" defTabSz="914400" rtl="0" eaLnBrk="1" fontAlgn="auto" latinLnBrk="0" hangingPunct="1">
-                        <a:lnSpc>
-                          <a:spcPct val="100000"/>
-                        </a:lnSpc>
-                        <a:spcBef>
-                          <a:spcPts val="0"/>
-                        </a:spcBef>
-                        <a:spcAft>
-                          <a:spcPts val="0"/>
-                        </a:spcAft>
-                        <a:buClrTx/>
-                        <a:buSzTx/>
-                        <a:buFontTx/>
-                        <a:buNone/>
-                        <a:tabLst/>
-                        <a:defRPr/>
-                      </a:pPr>
-                      <a:r>
-                        <a:rPr lang="en-GB" sz="800" dirty="0"/>
-                        <a:t>Obj_amcd_gwiber_lvl5</a:t>
-                      </a:r>
-                    </a:p>
-                    <a:p>
-                      <a:endParaRPr lang="en-GB" sz="800" dirty="0"/>
-                    </a:p>
-                  </a:txBody>
-                  <a:tcPr/>
-                </a:tc>
-                <a:tc>
-                  <a:txBody>
-                    <a:bodyPr/>
-                    <a:lstStyle/>
+                        <a:t>When Prototype moves between zones, he checks to see if any other </a:t>
+                      </a:r>
+                      <a:r>
+                        <a:rPr lang="en-GB" sz="800" dirty="0" err="1"/>
+                        <a:t>amcd</a:t>
+                      </a:r>
+                      <a:r>
+                        <a:rPr lang="en-GB" sz="800" dirty="0"/>
+                        <a:t> is in the zone he’s moving to. If there is an </a:t>
+                      </a:r>
+                      <a:r>
+                        <a:rPr lang="en-GB" sz="800" dirty="0" err="1"/>
+                        <a:t>amcd</a:t>
+                      </a:r>
+                      <a:r>
+                        <a:rPr lang="en-GB" sz="800" dirty="0"/>
+                        <a:t> like K9 in the same zone Prototype is moving to, then the zone Prototype is moving to, will change its object to display the zone with both Prototype and K9. If Prototype moves to a zone, then the previous zone he was in, will return to normal, or if K9 was in the same zone, it will only display the K9 zone after Prototype leaves it. If Prototype moves to a zone that K9 is not in, the zone he moves to displays K9 only.</a:t>
+                      </a:r>
+                    </a:p>
                     <a:p>
                       <a:endParaRPr lang="en-GB" sz="800" dirty="0"/>
                     </a:p>
@@ -26717,7 +27276,7 @@
                 </a:tc>
                 <a:extLst>
                   <a:ext uri="{0D108BD9-81ED-4DB2-BD59-A6C34878D82A}">
-                    <a16:rowId xmlns:a16="http://schemas.microsoft.com/office/drawing/2014/main" val="222639438"/>
+                    <a16:rowId xmlns:a16="http://schemas.microsoft.com/office/drawing/2014/main" val="3341429027"/>
                   </a:ext>
                 </a:extLst>
               </a:tr>
@@ -26764,6 +27323,586 @@
     <p:extLst>
       <p:ext uri="{BB962C8B-B14F-4D97-AF65-F5344CB8AC3E}">
         <p14:creationId xmlns:p14="http://schemas.microsoft.com/office/powerpoint/2010/main" val="2951916856"/>
+      </p:ext>
+    </p:extLst>
+  </p:cSld>
+  <p:clrMapOvr>
+    <a:masterClrMapping/>
+  </p:clrMapOvr>
+</p:sld>
+</file>
+
+<file path=ppt/slides/slide49.xml><?xml version="1.0" encoding="utf-8"?>
+<p:sld xmlns:a="http://schemas.openxmlformats.org/drawingml/2006/main" xmlns:r="http://schemas.openxmlformats.org/officeDocument/2006/relationships" xmlns:p="http://schemas.openxmlformats.org/presentationml/2006/main">
+  <p:cSld>
+    <p:spTree>
+      <p:nvGrpSpPr>
+        <p:cNvPr id="1" name="">
+          <a:extLst>
+            <a:ext uri="{FF2B5EF4-FFF2-40B4-BE49-F238E27FC236}">
+              <a16:creationId xmlns:a16="http://schemas.microsoft.com/office/drawing/2014/main" id="{773AFED8-8070-9576-7EC6-AE635117491B}"/>
+            </a:ext>
+          </a:extLst>
+        </p:cNvPr>
+        <p:cNvGrpSpPr/>
+        <p:nvPr/>
+      </p:nvGrpSpPr>
+      <p:grpSpPr>
+        <a:xfrm>
+          <a:off x="0" y="0"/>
+          <a:ext cx="0" cy="0"/>
+          <a:chOff x="0" y="0"/>
+          <a:chExt cx="0" cy="0"/>
+        </a:xfrm>
+      </p:grpSpPr>
+      <p:graphicFrame>
+        <p:nvGraphicFramePr>
+          <p:cNvPr id="4" name="Table 3">
+            <a:extLst>
+              <a:ext uri="{FF2B5EF4-FFF2-40B4-BE49-F238E27FC236}">
+                <a16:creationId xmlns:a16="http://schemas.microsoft.com/office/drawing/2014/main" id="{85D6642C-B464-D525-3EB5-3AAB8B4ACC80}"/>
+              </a:ext>
+            </a:extLst>
+          </p:cNvPr>
+          <p:cNvGraphicFramePr>
+            <a:graphicFrameLocks noGrp="1"/>
+          </p:cNvGraphicFramePr>
+          <p:nvPr>
+            <p:extLst>
+              <p:ext uri="{D42A27DB-BD31-4B8C-83A1-F6EECF244321}">
+                <p14:modId xmlns:p14="http://schemas.microsoft.com/office/powerpoint/2010/main" val="3968526221"/>
+              </p:ext>
+            </p:extLst>
+          </p:nvPr>
+        </p:nvGraphicFramePr>
+        <p:xfrm>
+          <a:off x="0" y="391886"/>
+          <a:ext cx="12034157" cy="4067263"/>
+        </p:xfrm>
+        <a:graphic>
+          <a:graphicData uri="http://schemas.openxmlformats.org/drawingml/2006/table">
+            <a:tbl>
+              <a:tblPr firstRow="1" bandRow="1">
+                <a:tableStyleId>{5C22544A-7EE6-4342-B048-85BDC9FD1C3A}</a:tableStyleId>
+              </a:tblPr>
+              <a:tblGrid>
+                <a:gridCol w="702129">
+                  <a:extLst>
+                    <a:ext uri="{9D8B030D-6E8A-4147-A177-3AD203B41FA5}">
+                      <a16:colId xmlns:a16="http://schemas.microsoft.com/office/drawing/2014/main" val="2041145262"/>
+                    </a:ext>
+                  </a:extLst>
+                </a:gridCol>
+                <a:gridCol w="2465614">
+                  <a:extLst>
+                    <a:ext uri="{9D8B030D-6E8A-4147-A177-3AD203B41FA5}">
+                      <a16:colId xmlns:a16="http://schemas.microsoft.com/office/drawing/2014/main" val="3102287305"/>
+                    </a:ext>
+                  </a:extLst>
+                </a:gridCol>
+                <a:gridCol w="917472">
+                  <a:extLst>
+                    <a:ext uri="{9D8B030D-6E8A-4147-A177-3AD203B41FA5}">
+                      <a16:colId xmlns:a16="http://schemas.microsoft.com/office/drawing/2014/main" val="4080696647"/>
+                    </a:ext>
+                  </a:extLst>
+                </a:gridCol>
+                <a:gridCol w="1517600">
+                  <a:extLst>
+                    <a:ext uri="{9D8B030D-6E8A-4147-A177-3AD203B41FA5}">
+                      <a16:colId xmlns:a16="http://schemas.microsoft.com/office/drawing/2014/main" val="132880537"/>
+                    </a:ext>
+                  </a:extLst>
+                </a:gridCol>
+                <a:gridCol w="5337328">
+                  <a:extLst>
+                    <a:ext uri="{9D8B030D-6E8A-4147-A177-3AD203B41FA5}">
+                      <a16:colId xmlns:a16="http://schemas.microsoft.com/office/drawing/2014/main" val="786884226"/>
+                    </a:ext>
+                  </a:extLst>
+                </a:gridCol>
+                <a:gridCol w="1094014">
+                  <a:extLst>
+                    <a:ext uri="{9D8B030D-6E8A-4147-A177-3AD203B41FA5}">
+                      <a16:colId xmlns:a16="http://schemas.microsoft.com/office/drawing/2014/main" val="259252547"/>
+                    </a:ext>
+                  </a:extLst>
+                </a:gridCol>
+              </a:tblGrid>
+              <a:tr h="470623">
+                <a:tc>
+                  <a:txBody>
+                    <a:bodyPr/>
+                    <a:lstStyle/>
+                    <a:p>
+                      <a:r>
+                        <a:rPr lang="en-GB" sz="800" dirty="0"/>
+                        <a:t>Test Number</a:t>
+                      </a:r>
+                    </a:p>
+                  </a:txBody>
+                  <a:tcPr/>
+                </a:tc>
+                <a:tc>
+                  <a:txBody>
+                    <a:bodyPr/>
+                    <a:lstStyle/>
+                    <a:p>
+                      <a:r>
+                        <a:rPr lang="en-GB" sz="800" dirty="0"/>
+                        <a:t>Test Type</a:t>
+                      </a:r>
+                    </a:p>
+                  </a:txBody>
+                  <a:tcPr/>
+                </a:tc>
+                <a:tc>
+                  <a:txBody>
+                    <a:bodyPr/>
+                    <a:lstStyle/>
+                    <a:p>
+                      <a:r>
+                        <a:rPr lang="en-GB" sz="800" dirty="0"/>
+                        <a:t>Room</a:t>
+                      </a:r>
+                    </a:p>
+                  </a:txBody>
+                  <a:tcPr/>
+                </a:tc>
+                <a:tc>
+                  <a:txBody>
+                    <a:bodyPr/>
+                    <a:lstStyle/>
+                    <a:p>
+                      <a:r>
+                        <a:rPr lang="en-GB" sz="800" dirty="0"/>
+                        <a:t>Objects Involved</a:t>
+                      </a:r>
+                    </a:p>
+                  </a:txBody>
+                  <a:tcPr/>
+                </a:tc>
+                <a:tc>
+                  <a:txBody>
+                    <a:bodyPr/>
+                    <a:lstStyle/>
+                    <a:p>
+                      <a:r>
+                        <a:rPr lang="en-GB" sz="800" dirty="0"/>
+                        <a:t>Expected Outcome</a:t>
+                      </a:r>
+                    </a:p>
+                  </a:txBody>
+                  <a:tcPr/>
+                </a:tc>
+                <a:tc>
+                  <a:txBody>
+                    <a:bodyPr/>
+                    <a:lstStyle/>
+                    <a:p>
+                      <a:r>
+                        <a:rPr lang="en-GB" sz="800" dirty="0"/>
+                        <a:t>Actual Outcome</a:t>
+                      </a:r>
+                    </a:p>
+                  </a:txBody>
+                  <a:tcPr/>
+                </a:tc>
+                <a:extLst>
+                  <a:ext uri="{0D108BD9-81ED-4DB2-BD59-A6C34878D82A}">
+                    <a16:rowId xmlns:a16="http://schemas.microsoft.com/office/drawing/2014/main" val="1296324342"/>
+                  </a:ext>
+                </a:extLst>
+              </a:tr>
+              <a:tr h="470623">
+                <a:tc>
+                  <a:txBody>
+                    <a:bodyPr/>
+                    <a:lstStyle/>
+                    <a:p>
+                      <a:r>
+                        <a:rPr lang="en-GB" sz="800" dirty="0"/>
+                        <a:t>43.</a:t>
+                      </a:r>
+                    </a:p>
+                  </a:txBody>
+                  <a:tcPr/>
+                </a:tc>
+                <a:tc>
+                  <a:txBody>
+                    <a:bodyPr/>
+                    <a:lstStyle/>
+                    <a:p>
+                      <a:r>
+                        <a:rPr lang="en-GB" sz="800" dirty="0"/>
+                        <a:t>Oxygen Door/vent controller</a:t>
+                      </a:r>
+                    </a:p>
+                  </a:txBody>
+                  <a:tcPr/>
+                </a:tc>
+                <a:tc>
+                  <a:txBody>
+                    <a:bodyPr/>
+                    <a:lstStyle/>
+                    <a:p>
+                      <a:r>
+                        <a:rPr lang="en-GB" sz="800" dirty="0"/>
+                        <a:t>Rm_level1 - 5</a:t>
+                      </a:r>
+                    </a:p>
+                  </a:txBody>
+                  <a:tcPr/>
+                </a:tc>
+                <a:tc>
+                  <a:txBody>
+                    <a:bodyPr/>
+                    <a:lstStyle/>
+                    <a:p>
+                      <a:r>
+                        <a:rPr lang="en-GB" sz="800" dirty="0" err="1"/>
+                        <a:t>obj_oxygen_door_controller</a:t>
+                      </a:r>
+                      <a:endParaRPr lang="en-GB" sz="800" dirty="0"/>
+                    </a:p>
+                  </a:txBody>
+                  <a:tcPr/>
+                </a:tc>
+                <a:tc>
+                  <a:txBody>
+                    <a:bodyPr/>
+                    <a:lstStyle/>
+                    <a:p>
+                      <a:r>
+                        <a:rPr lang="en-GB" sz="800" dirty="0"/>
+                        <a:t>The Oxygen controller is very unique so discussing its function may take a bit, so I will break down its function into its key functions. </a:t>
+                      </a:r>
+                    </a:p>
+                    <a:p>
+                      <a:endParaRPr lang="en-GB" sz="800" dirty="0"/>
+                    </a:p>
+                    <a:p>
+                      <a:r>
+                        <a:rPr lang="en-GB" sz="800" dirty="0"/>
+                        <a:t>The oxygen controller has 5 primary functions</a:t>
+                      </a:r>
+                    </a:p>
+                    <a:p>
+                      <a:endParaRPr lang="en-GB" sz="800" dirty="0"/>
+                    </a:p>
+                    <a:p>
+                      <a:pPr marL="228600" indent="-228600">
+                        <a:buAutoNum type="arabicPeriod"/>
+                      </a:pPr>
+                      <a:r>
+                        <a:rPr lang="en-GB" sz="800" dirty="0"/>
+                        <a:t>Sync Doors and Vents together</a:t>
+                      </a:r>
+                    </a:p>
+                    <a:p>
+                      <a:pPr marL="228600" indent="-228600">
+                        <a:buAutoNum type="arabicPeriod"/>
+                      </a:pPr>
+                      <a:endParaRPr lang="en-GB" sz="800" dirty="0"/>
+                    </a:p>
+                    <a:p>
+                      <a:pPr marL="228600" indent="-228600">
+                        <a:buAutoNum type="arabicPeriod"/>
+                      </a:pPr>
+                      <a:r>
+                        <a:rPr lang="en-GB" sz="800" dirty="0"/>
+                        <a:t>Decrease Oxygen faster when more vents/doors are closed and increase it when less or none are closed (the oxygens speed is determined by the number of doors open and closed</a:t>
+                      </a:r>
+                    </a:p>
+                    <a:p>
+                      <a:pPr marL="228600" indent="-228600">
+                        <a:buAutoNum type="arabicPeriod"/>
+                      </a:pPr>
+                      <a:endParaRPr lang="en-GB" sz="800" dirty="0"/>
+                    </a:p>
+                    <a:p>
+                      <a:pPr marL="228600" indent="-228600">
+                        <a:buAutoNum type="arabicPeriod"/>
+                      </a:pPr>
+                      <a:r>
+                        <a:rPr lang="en-GB" sz="800" dirty="0"/>
+                        <a:t>Acknowledge when oxygen = 0, and decrease HP</a:t>
+                      </a:r>
+                    </a:p>
+                    <a:p>
+                      <a:pPr marL="228600" indent="-228600">
+                        <a:buAutoNum type="arabicPeriod"/>
+                      </a:pPr>
+                      <a:endParaRPr lang="en-GB" sz="800" dirty="0"/>
+                    </a:p>
+                    <a:p>
+                      <a:pPr marL="228600" indent="-228600">
+                        <a:buAutoNum type="arabicPeriod"/>
+                      </a:pPr>
+                      <a:r>
+                        <a:rPr lang="en-GB" sz="800" dirty="0"/>
+                        <a:t>If HP = 0, </a:t>
+                      </a:r>
+                      <a:r>
+                        <a:rPr lang="en-GB" sz="800" dirty="0" err="1"/>
+                        <a:t>global.dead</a:t>
+                      </a:r>
+                      <a:r>
+                        <a:rPr lang="en-GB" sz="800" dirty="0"/>
+                        <a:t> = true</a:t>
+                      </a:r>
+                    </a:p>
+                    <a:p>
+                      <a:pPr marL="228600" indent="-228600">
+                        <a:buAutoNum type="arabicPeriod"/>
+                      </a:pPr>
+                      <a:endParaRPr lang="en-GB" sz="800" dirty="0"/>
+                    </a:p>
+                    <a:p>
+                      <a:pPr marL="228600" indent="-228600">
+                        <a:buAutoNum type="arabicPeriod"/>
+                      </a:pPr>
+                      <a:r>
+                        <a:rPr lang="en-GB" sz="800" dirty="0"/>
+                        <a:t>Change the doors/vents sprites based on whether the doors/vents are in an open or closed state.</a:t>
+                      </a:r>
+                    </a:p>
+                  </a:txBody>
+                  <a:tcPr/>
+                </a:tc>
+                <a:tc>
+                  <a:txBody>
+                    <a:bodyPr/>
+                    <a:lstStyle/>
+                    <a:p>
+                      <a:endParaRPr lang="en-GB" sz="800" dirty="0"/>
+                    </a:p>
+                  </a:txBody>
+                  <a:tcPr/>
+                </a:tc>
+                <a:extLst>
+                  <a:ext uri="{0D108BD9-81ED-4DB2-BD59-A6C34878D82A}">
+                    <a16:rowId xmlns:a16="http://schemas.microsoft.com/office/drawing/2014/main" val="289599235"/>
+                  </a:ext>
+                </a:extLst>
+              </a:tr>
+              <a:tr h="470623">
+                <a:tc>
+                  <a:txBody>
+                    <a:bodyPr/>
+                    <a:lstStyle/>
+                    <a:p>
+                      <a:r>
+                        <a:rPr lang="en-GB" sz="800" dirty="0"/>
+                        <a:t>44.</a:t>
+                      </a:r>
+                    </a:p>
+                  </a:txBody>
+                  <a:tcPr/>
+                </a:tc>
+                <a:tc>
+                  <a:txBody>
+                    <a:bodyPr/>
+                    <a:lstStyle/>
+                    <a:p>
+                      <a:r>
+                        <a:rPr lang="en-GB" sz="800" dirty="0"/>
+                        <a:t>Camera movement</a:t>
+                      </a:r>
+                    </a:p>
+                  </a:txBody>
+                  <a:tcPr/>
+                </a:tc>
+                <a:tc>
+                  <a:txBody>
+                    <a:bodyPr/>
+                    <a:lstStyle/>
+                    <a:p>
+                      <a:r>
+                        <a:rPr lang="en-GB" sz="800" dirty="0"/>
+                        <a:t>Rm_level1</a:t>
+                      </a:r>
+                    </a:p>
+                  </a:txBody>
+                  <a:tcPr/>
+                </a:tc>
+                <a:tc>
+                  <a:txBody>
+                    <a:bodyPr/>
+                    <a:lstStyle/>
+                    <a:p>
+                      <a:r>
+                        <a:rPr lang="en-GB" sz="800" dirty="0"/>
+                        <a:t>obj_camera_controller_lvl1</a:t>
+                      </a:r>
+                    </a:p>
+                  </a:txBody>
+                  <a:tcPr/>
+                </a:tc>
+                <a:tc>
+                  <a:txBody>
+                    <a:bodyPr/>
+                    <a:lstStyle/>
+                    <a:p>
+                      <a:pPr marL="0" indent="0">
+                        <a:buNone/>
+                      </a:pPr>
+                      <a:r>
+                        <a:rPr lang="en-GB" sz="800" dirty="0"/>
+                        <a:t>The camera controller is to change the player view to what ever button the player presses, utilizing a script to identify what zone to look at. In addition, the controller itself in its create code contains all the co-ordinates of every zone in level 1 which is then globally labelled using </a:t>
+                      </a:r>
+                      <a:r>
+                        <a:rPr lang="en-GB" sz="800" dirty="0" err="1"/>
+                        <a:t>global.current_zone</a:t>
+                      </a:r>
+                      <a:r>
+                        <a:rPr lang="en-GB" sz="800" dirty="0"/>
+                        <a:t> as an identifier, and the number zone is named using scripts to make it easier to know what zone is what.</a:t>
+                      </a:r>
+                    </a:p>
+                    <a:p>
+                      <a:pPr marL="0" indent="0">
+                        <a:buNone/>
+                      </a:pPr>
+                      <a:endParaRPr lang="en-GB" sz="800" dirty="0"/>
+                    </a:p>
+                    <a:p>
+                      <a:pPr marL="0" indent="0">
+                        <a:buNone/>
+                      </a:pPr>
+                      <a:r>
+                        <a:rPr lang="en-GB" sz="800" dirty="0"/>
+                        <a:t>If the player clicks a camera button, it triggers the </a:t>
+                      </a:r>
+                      <a:r>
+                        <a:rPr lang="en-GB" sz="800" dirty="0" err="1"/>
+                        <a:t>scr_camera_change</a:t>
+                      </a:r>
+                      <a:r>
+                        <a:rPr lang="en-GB" sz="800" dirty="0"/>
+                        <a:t> and moves the game's view port to whatever zone is triggered by the button.</a:t>
+                      </a:r>
+                    </a:p>
+                    <a:p>
+                      <a:pPr marL="0" indent="0">
+                        <a:buNone/>
+                      </a:pPr>
+                      <a:endParaRPr lang="en-GB" sz="800" dirty="0"/>
+                    </a:p>
+                    <a:p>
+                      <a:pPr marL="0" indent="0">
+                        <a:buNone/>
+                      </a:pPr>
+                      <a:r>
+                        <a:rPr lang="en-GB" sz="800" dirty="0"/>
+                        <a:t>The controller also enables the camera-based button objects to use the </a:t>
+                      </a:r>
+                      <a:r>
+                        <a:rPr lang="en-GB" sz="800" dirty="0" err="1"/>
+                        <a:t>scr_camera_change</a:t>
+                      </a:r>
+                      <a:r>
+                        <a:rPr lang="en-GB" sz="800" dirty="0"/>
+                        <a:t> script.</a:t>
+                      </a:r>
+                    </a:p>
+                    <a:p>
+                      <a:pPr marL="0" indent="0">
+                        <a:buNone/>
+                      </a:pPr>
+                      <a:endParaRPr lang="en-GB" sz="800" dirty="0"/>
+                    </a:p>
+                    <a:p>
+                      <a:pPr marL="0" indent="0">
+                        <a:buNone/>
+                      </a:pPr>
+                      <a:r>
+                        <a:rPr lang="en-GB" sz="800" dirty="0"/>
+                        <a:t>Lastly, at game start the controller sets the camera’s size and position to the office zone (</a:t>
+                      </a:r>
+                      <a:r>
+                        <a:rPr lang="en-GB" sz="800" dirty="0" err="1"/>
+                        <a:t>global.current_zone</a:t>
+                      </a:r>
+                      <a:r>
+                        <a:rPr lang="en-GB" sz="800" dirty="0"/>
+                        <a:t> = 0)</a:t>
+                      </a:r>
+                    </a:p>
+                    <a:p>
+                      <a:pPr marL="0" indent="0">
+                        <a:buNone/>
+                      </a:pPr>
+                      <a:endParaRPr lang="en-GB" sz="800" dirty="0"/>
+                    </a:p>
+                    <a:p>
+                      <a:pPr marL="0" indent="0">
+                        <a:buNone/>
+                      </a:pPr>
+                      <a:endParaRPr lang="en-GB" sz="800" dirty="0"/>
+                    </a:p>
+                  </a:txBody>
+                  <a:tcPr/>
+                </a:tc>
+                <a:tc>
+                  <a:txBody>
+                    <a:bodyPr/>
+                    <a:lstStyle/>
+                    <a:p>
+                      <a:endParaRPr lang="en-GB" sz="800" dirty="0"/>
+                    </a:p>
+                  </a:txBody>
+                  <a:tcPr/>
+                </a:tc>
+                <a:extLst>
+                  <a:ext uri="{0D108BD9-81ED-4DB2-BD59-A6C34878D82A}">
+                    <a16:rowId xmlns:a16="http://schemas.microsoft.com/office/drawing/2014/main" val="4163288784"/>
+                  </a:ext>
+                </a:extLst>
+              </a:tr>
+            </a:tbl>
+          </a:graphicData>
+        </a:graphic>
+      </p:graphicFrame>
+      <p:sp>
+        <p:nvSpPr>
+          <p:cNvPr id="2" name="TextBox 1">
+            <a:extLst>
+              <a:ext uri="{FF2B5EF4-FFF2-40B4-BE49-F238E27FC236}">
+                <a16:creationId xmlns:a16="http://schemas.microsoft.com/office/drawing/2014/main" id="{D6904CAE-3462-802B-2A36-A942CF4E9F87}"/>
+              </a:ext>
+            </a:extLst>
+          </p:cNvPr>
+          <p:cNvSpPr txBox="1"/>
+          <p:nvPr/>
+        </p:nvSpPr>
+        <p:spPr>
+          <a:xfrm>
+            <a:off x="0" y="22553"/>
+            <a:ext cx="1301382" cy="369332"/>
+          </a:xfrm>
+          <a:prstGeom prst="rect">
+            <a:avLst/>
+          </a:prstGeom>
+          <a:noFill/>
+        </p:spPr>
+        <p:txBody>
+          <a:bodyPr wrap="none" rtlCol="0">
+            <a:spAutoFit/>
+          </a:bodyPr>
+          <a:lstStyle/>
+          <a:p>
+            <a:r>
+              <a:rPr lang="en-GB" dirty="0"/>
+              <a:t>Controllers</a:t>
+            </a:r>
+          </a:p>
+        </p:txBody>
+      </p:sp>
+    </p:spTree>
+    <p:extLst>
+      <p:ext uri="{BB962C8B-B14F-4D97-AF65-F5344CB8AC3E}">
+        <p14:creationId xmlns:p14="http://schemas.microsoft.com/office/powerpoint/2010/main" val="2595600854"/>
       </p:ext>
     </p:extLst>
   </p:cSld>

--- a/Logs/Development Log and Alpha Testing.pptx
+++ b/Logs/Development Log and Alpha Testing.pptx
@@ -54,6 +54,8 @@
     <p:sldId id="304" r:id="rId48"/>
     <p:sldId id="305" r:id="rId49"/>
     <p:sldId id="306" r:id="rId50"/>
+    <p:sldId id="307" r:id="rId51"/>
+    <p:sldId id="308" r:id="rId52"/>
   </p:sldIdLst>
   <p:sldSz cx="12192000" cy="6858000"/>
   <p:notesSz cx="6858000" cy="9144000"/>
@@ -327,7 +329,7 @@
           <a:p>
             <a:fld id="{846CE7D5-CF57-46EF-B807-FDD0502418D4}" type="datetimeFigureOut">
               <a:rPr lang="en-GB" smtClean="0"/>
-              <a:t>24/02/2026</a:t>
+              <a:t>25/02/2026</a:t>
             </a:fld>
             <a:endParaRPr lang="en-GB"/>
           </a:p>
@@ -497,7 +499,7 @@
           <a:p>
             <a:fld id="{846CE7D5-CF57-46EF-B807-FDD0502418D4}" type="datetimeFigureOut">
               <a:rPr lang="en-GB" smtClean="0"/>
-              <a:t>24/02/2026</a:t>
+              <a:t>25/02/2026</a:t>
             </a:fld>
             <a:endParaRPr lang="en-GB"/>
           </a:p>
@@ -677,7 +679,7 @@
           <a:p>
             <a:fld id="{846CE7D5-CF57-46EF-B807-FDD0502418D4}" type="datetimeFigureOut">
               <a:rPr lang="en-GB" smtClean="0"/>
-              <a:t>24/02/2026</a:t>
+              <a:t>25/02/2026</a:t>
             </a:fld>
             <a:endParaRPr lang="en-GB"/>
           </a:p>
@@ -847,7 +849,7 @@
           <a:p>
             <a:fld id="{846CE7D5-CF57-46EF-B807-FDD0502418D4}" type="datetimeFigureOut">
               <a:rPr lang="en-GB" smtClean="0"/>
-              <a:t>24/02/2026</a:t>
+              <a:t>25/02/2026</a:t>
             </a:fld>
             <a:endParaRPr lang="en-GB"/>
           </a:p>
@@ -1093,7 +1095,7 @@
           <a:p>
             <a:fld id="{846CE7D5-CF57-46EF-B807-FDD0502418D4}" type="datetimeFigureOut">
               <a:rPr lang="en-GB" smtClean="0"/>
-              <a:t>24/02/2026</a:t>
+              <a:t>25/02/2026</a:t>
             </a:fld>
             <a:endParaRPr lang="en-GB"/>
           </a:p>
@@ -1325,7 +1327,7 @@
           <a:p>
             <a:fld id="{846CE7D5-CF57-46EF-B807-FDD0502418D4}" type="datetimeFigureOut">
               <a:rPr lang="en-GB" smtClean="0"/>
-              <a:t>24/02/2026</a:t>
+              <a:t>25/02/2026</a:t>
             </a:fld>
             <a:endParaRPr lang="en-GB"/>
           </a:p>
@@ -1692,7 +1694,7 @@
           <a:p>
             <a:fld id="{846CE7D5-CF57-46EF-B807-FDD0502418D4}" type="datetimeFigureOut">
               <a:rPr lang="en-GB" smtClean="0"/>
-              <a:t>24/02/2026</a:t>
+              <a:t>25/02/2026</a:t>
             </a:fld>
             <a:endParaRPr lang="en-GB"/>
           </a:p>
@@ -1810,7 +1812,7 @@
           <a:p>
             <a:fld id="{846CE7D5-CF57-46EF-B807-FDD0502418D4}" type="datetimeFigureOut">
               <a:rPr lang="en-GB" smtClean="0"/>
-              <a:t>24/02/2026</a:t>
+              <a:t>25/02/2026</a:t>
             </a:fld>
             <a:endParaRPr lang="en-GB"/>
           </a:p>
@@ -1905,7 +1907,7 @@
           <a:p>
             <a:fld id="{846CE7D5-CF57-46EF-B807-FDD0502418D4}" type="datetimeFigureOut">
               <a:rPr lang="en-GB" smtClean="0"/>
-              <a:t>24/02/2026</a:t>
+              <a:t>25/02/2026</a:t>
             </a:fld>
             <a:endParaRPr lang="en-GB"/>
           </a:p>
@@ -2182,7 +2184,7 @@
           <a:p>
             <a:fld id="{846CE7D5-CF57-46EF-B807-FDD0502418D4}" type="datetimeFigureOut">
               <a:rPr lang="en-GB" smtClean="0"/>
-              <a:t>24/02/2026</a:t>
+              <a:t>25/02/2026</a:t>
             </a:fld>
             <a:endParaRPr lang="en-GB"/>
           </a:p>
@@ -2439,7 +2441,7 @@
           <a:p>
             <a:fld id="{846CE7D5-CF57-46EF-B807-FDD0502418D4}" type="datetimeFigureOut">
               <a:rPr lang="en-GB" smtClean="0"/>
-              <a:t>24/02/2026</a:t>
+              <a:t>25/02/2026</a:t>
             </a:fld>
             <a:endParaRPr lang="en-GB"/>
           </a:p>
@@ -2652,7 +2654,7 @@
           <a:p>
             <a:fld id="{846CE7D5-CF57-46EF-B807-FDD0502418D4}" type="datetimeFigureOut">
               <a:rPr lang="en-GB" smtClean="0"/>
-              <a:t>24/02/2026</a:t>
+              <a:t>25/02/2026</a:t>
             </a:fld>
             <a:endParaRPr lang="en-GB"/>
           </a:p>
@@ -26335,14 +26337,14 @@
           <p:nvPr>
             <p:extLst>
               <p:ext uri="{D42A27DB-BD31-4B8C-83A1-F6EECF244321}">
-                <p14:modId xmlns:p14="http://schemas.microsoft.com/office/powerpoint/2010/main" val="3433890630"/>
+                <p14:modId xmlns:p14="http://schemas.microsoft.com/office/powerpoint/2010/main" val="48013024"/>
               </p:ext>
             </p:extLst>
           </p:nvPr>
         </p:nvGraphicFramePr>
         <p:xfrm>
           <a:off x="0" y="391886"/>
-          <a:ext cx="12034157" cy="4585423"/>
+          <a:ext cx="10940142" cy="6048463"/>
         </p:xfrm>
         <a:graphic>
           <a:graphicData uri="http://schemas.openxmlformats.org/drawingml/2006/table">
@@ -26351,45 +26353,45 @@
                 <a:tableStyleId>{5C22544A-7EE6-4342-B048-85BDC9FD1C3A}</a:tableStyleId>
               </a:tblPr>
               <a:tblGrid>
-                <a:gridCol w="702129">
+                <a:gridCol w="471903">
                   <a:extLst>
                     <a:ext uri="{9D8B030D-6E8A-4147-A177-3AD203B41FA5}">
                       <a16:colId xmlns:a16="http://schemas.microsoft.com/office/drawing/2014/main" val="2041145262"/>
                     </a:ext>
                   </a:extLst>
                 </a:gridCol>
-                <a:gridCol w="2465614">
+                <a:gridCol w="1657147">
                   <a:extLst>
                     <a:ext uri="{9D8B030D-6E8A-4147-A177-3AD203B41FA5}">
                       <a16:colId xmlns:a16="http://schemas.microsoft.com/office/drawing/2014/main" val="3102287305"/>
                     </a:ext>
                   </a:extLst>
                 </a:gridCol>
-                <a:gridCol w="917472">
+                <a:gridCol w="616636">
                   <a:extLst>
                     <a:ext uri="{9D8B030D-6E8A-4147-A177-3AD203B41FA5}">
                       <a16:colId xmlns:a16="http://schemas.microsoft.com/office/drawing/2014/main" val="4080696647"/>
                     </a:ext>
                   </a:extLst>
                 </a:gridCol>
-                <a:gridCol w="1517600">
+                <a:gridCol w="1019984">
                   <a:extLst>
                     <a:ext uri="{9D8B030D-6E8A-4147-A177-3AD203B41FA5}">
                       <a16:colId xmlns:a16="http://schemas.microsoft.com/office/drawing/2014/main" val="132880537"/>
                     </a:ext>
                   </a:extLst>
                 </a:gridCol>
-                <a:gridCol w="5337328">
+                <a:gridCol w="3587236">
                   <a:extLst>
                     <a:ext uri="{9D8B030D-6E8A-4147-A177-3AD203B41FA5}">
                       <a16:colId xmlns:a16="http://schemas.microsoft.com/office/drawing/2014/main" val="786884226"/>
                     </a:ext>
                   </a:extLst>
                 </a:gridCol>
-                <a:gridCol w="1094014">
+                <a:gridCol w="3587236">
                   <a:extLst>
                     <a:ext uri="{9D8B030D-6E8A-4147-A177-3AD203B41FA5}">
-                      <a16:colId xmlns:a16="http://schemas.microsoft.com/office/drawing/2014/main" val="259252547"/>
+                      <a16:colId xmlns:a16="http://schemas.microsoft.com/office/drawing/2014/main" val="3813578648"/>
                     </a:ext>
                   </a:extLst>
                 </a:gridCol>
@@ -27370,14 +27372,14 @@
           <p:nvPr>
             <p:extLst>
               <p:ext uri="{D42A27DB-BD31-4B8C-83A1-F6EECF244321}">
-                <p14:modId xmlns:p14="http://schemas.microsoft.com/office/powerpoint/2010/main" val="3968526221"/>
+                <p14:modId xmlns:p14="http://schemas.microsoft.com/office/powerpoint/2010/main" val="701358460"/>
               </p:ext>
             </p:extLst>
           </p:nvPr>
         </p:nvGraphicFramePr>
         <p:xfrm>
-          <a:off x="0" y="391886"/>
-          <a:ext cx="12034157" cy="4067263"/>
+          <a:off x="114300" y="391885"/>
+          <a:ext cx="11487150" cy="5865583"/>
         </p:xfrm>
         <a:graphic>
           <a:graphicData uri="http://schemas.openxmlformats.org/drawingml/2006/table">
@@ -27386,45 +27388,45 @@
                 <a:tableStyleId>{5C22544A-7EE6-4342-B048-85BDC9FD1C3A}</a:tableStyleId>
               </a:tblPr>
               <a:tblGrid>
-                <a:gridCol w="702129">
+                <a:gridCol w="495498">
                   <a:extLst>
                     <a:ext uri="{9D8B030D-6E8A-4147-A177-3AD203B41FA5}">
                       <a16:colId xmlns:a16="http://schemas.microsoft.com/office/drawing/2014/main" val="2041145262"/>
                     </a:ext>
                   </a:extLst>
                 </a:gridCol>
-                <a:gridCol w="2465614">
+                <a:gridCol w="1740005">
                   <a:extLst>
                     <a:ext uri="{9D8B030D-6E8A-4147-A177-3AD203B41FA5}">
                       <a16:colId xmlns:a16="http://schemas.microsoft.com/office/drawing/2014/main" val="3102287305"/>
                     </a:ext>
                   </a:extLst>
                 </a:gridCol>
-                <a:gridCol w="917472">
+                <a:gridCol w="647468">
                   <a:extLst>
                     <a:ext uri="{9D8B030D-6E8A-4147-A177-3AD203B41FA5}">
                       <a16:colId xmlns:a16="http://schemas.microsoft.com/office/drawing/2014/main" val="4080696647"/>
                     </a:ext>
                   </a:extLst>
                 </a:gridCol>
-                <a:gridCol w="1517600">
+                <a:gridCol w="1070983">
                   <a:extLst>
                     <a:ext uri="{9D8B030D-6E8A-4147-A177-3AD203B41FA5}">
                       <a16:colId xmlns:a16="http://schemas.microsoft.com/office/drawing/2014/main" val="132880537"/>
                     </a:ext>
                   </a:extLst>
                 </a:gridCol>
-                <a:gridCol w="5337328">
+                <a:gridCol w="5002267">
                   <a:extLst>
                     <a:ext uri="{9D8B030D-6E8A-4147-A177-3AD203B41FA5}">
                       <a16:colId xmlns:a16="http://schemas.microsoft.com/office/drawing/2014/main" val="786884226"/>
                     </a:ext>
                   </a:extLst>
                 </a:gridCol>
-                <a:gridCol w="1094014">
+                <a:gridCol w="2530929">
                   <a:extLst>
                     <a:ext uri="{9D8B030D-6E8A-4147-A177-3AD203B41FA5}">
-                      <a16:colId xmlns:a16="http://schemas.microsoft.com/office/drawing/2014/main" val="259252547"/>
+                      <a16:colId xmlns:a16="http://schemas.microsoft.com/office/drawing/2014/main" val="642979864"/>
                     </a:ext>
                   </a:extLst>
                 </a:gridCol>
@@ -27675,6 +27677,9 @@
                     <a:bodyPr/>
                     <a:lstStyle/>
                     <a:p>
+                      <a:pPr marL="228600" indent="-228600">
+                        <a:buAutoNum type="arabicPeriod"/>
+                      </a:pPr>
                       <a:endParaRPr lang="en-GB" sz="800" dirty="0"/>
                     </a:p>
                   </a:txBody>
@@ -27707,7 +27712,7 @@
                     <a:p>
                       <a:r>
                         <a:rPr lang="en-GB" sz="800" dirty="0"/>
-                        <a:t>Camera movement</a:t>
+                        <a:t>Camera controller level 1</a:t>
                       </a:r>
                     </a:p>
                   </a:txBody>
@@ -27849,6 +27854,9 @@
                     <a:bodyPr/>
                     <a:lstStyle/>
                     <a:p>
+                      <a:pPr marL="0" indent="0">
+                        <a:buNone/>
+                      </a:pPr>
                       <a:endParaRPr lang="en-GB" sz="800" dirty="0"/>
                     </a:p>
                   </a:txBody>
@@ -27857,6 +27865,197 @@
                 <a:extLst>
                   <a:ext uri="{0D108BD9-81ED-4DB2-BD59-A6C34878D82A}">
                     <a16:rowId xmlns:a16="http://schemas.microsoft.com/office/drawing/2014/main" val="4163288784"/>
+                  </a:ext>
+                </a:extLst>
+              </a:tr>
+              <a:tr h="470623">
+                <a:tc>
+                  <a:txBody>
+                    <a:bodyPr/>
+                    <a:lstStyle/>
+                    <a:p>
+                      <a:r>
+                        <a:rPr lang="en-GB" sz="800" dirty="0"/>
+                        <a:t>45.</a:t>
+                      </a:r>
+                    </a:p>
+                  </a:txBody>
+                  <a:tcPr/>
+                </a:tc>
+                <a:tc>
+                  <a:txBody>
+                    <a:bodyPr/>
+                    <a:lstStyle/>
+                    <a:p>
+                      <a:pPr marL="0" marR="0" lvl="0" indent="0" algn="l" defTabSz="914400" rtl="0" eaLnBrk="1" fontAlgn="auto" latinLnBrk="0" hangingPunct="1">
+                        <a:lnSpc>
+                          <a:spcPct val="100000"/>
+                        </a:lnSpc>
+                        <a:spcBef>
+                          <a:spcPts val="0"/>
+                        </a:spcBef>
+                        <a:spcAft>
+                          <a:spcPts val="0"/>
+                        </a:spcAft>
+                        <a:buClrTx/>
+                        <a:buSzTx/>
+                        <a:buFontTx/>
+                        <a:buNone/>
+                        <a:tabLst/>
+                        <a:defRPr/>
+                      </a:pPr>
+                      <a:r>
+                        <a:rPr lang="en-GB" sz="800" dirty="0"/>
+                        <a:t>Camera controller level 2</a:t>
+                      </a:r>
+                    </a:p>
+                    <a:p>
+                      <a:endParaRPr lang="en-GB" sz="800" dirty="0"/>
+                    </a:p>
+                  </a:txBody>
+                  <a:tcPr/>
+                </a:tc>
+                <a:tc>
+                  <a:txBody>
+                    <a:bodyPr/>
+                    <a:lstStyle/>
+                    <a:p>
+                      <a:r>
+                        <a:rPr lang="en-GB" sz="800" dirty="0"/>
+                        <a:t>Rm_level2</a:t>
+                      </a:r>
+                    </a:p>
+                  </a:txBody>
+                  <a:tcPr/>
+                </a:tc>
+                <a:tc>
+                  <a:txBody>
+                    <a:bodyPr/>
+                    <a:lstStyle/>
+                    <a:p>
+                      <a:r>
+                        <a:rPr lang="en-GB" sz="800" dirty="0"/>
+                        <a:t>Obj_camera_controller_lvl2</a:t>
+                      </a:r>
+                    </a:p>
+                  </a:txBody>
+                  <a:tcPr/>
+                </a:tc>
+                <a:tc>
+                  <a:txBody>
+                    <a:bodyPr/>
+                    <a:lstStyle/>
+                    <a:p>
+                      <a:pPr marL="0" indent="0">
+                        <a:buNone/>
+                      </a:pPr>
+                      <a:r>
+                        <a:rPr lang="en-GB" sz="800" dirty="0"/>
+                        <a:t>The camera controller is to change the player view to a specific zone within the room. Utilizing a script to identify what zone to look at. In addition, the controller itself in its create code contains all the co-ordinates of every zone in level 2 which is then globally labelled using </a:t>
+                      </a:r>
+                      <a:r>
+                        <a:rPr lang="en-GB" sz="800" dirty="0" err="1"/>
+                        <a:t>global.current_zone</a:t>
+                      </a:r>
+                      <a:r>
+                        <a:rPr lang="en-GB" sz="800" dirty="0"/>
+                        <a:t> as an identifier, and the number zone is named using scripts to make it easier to know what zone is what.</a:t>
+                      </a:r>
+                    </a:p>
+                    <a:p>
+                      <a:pPr marL="0" indent="0">
+                        <a:buNone/>
+                      </a:pPr>
+                      <a:endParaRPr lang="en-GB" sz="800" dirty="0"/>
+                    </a:p>
+                    <a:p>
+                      <a:pPr marL="0" indent="0">
+                        <a:buNone/>
+                      </a:pPr>
+                      <a:r>
+                        <a:rPr lang="en-GB" sz="800" dirty="0"/>
+                        <a:t>If the player clicks a camera button, it triggers the </a:t>
+                      </a:r>
+                      <a:r>
+                        <a:rPr lang="en-GB" sz="800" dirty="0" err="1"/>
+                        <a:t>scr_camera_change</a:t>
+                      </a:r>
+                      <a:r>
+                        <a:rPr lang="en-GB" sz="800" dirty="0"/>
+                        <a:t> and moves the game's view port to whatever zone is triggered by the button.</a:t>
+                      </a:r>
+                    </a:p>
+                    <a:p>
+                      <a:pPr marL="0" indent="0">
+                        <a:buNone/>
+                      </a:pPr>
+                      <a:endParaRPr lang="en-GB" sz="800" dirty="0"/>
+                    </a:p>
+                    <a:p>
+                      <a:pPr marL="0" indent="0">
+                        <a:buNone/>
+                      </a:pPr>
+                      <a:r>
+                        <a:rPr lang="en-GB" sz="800" dirty="0"/>
+                        <a:t>The controller also enables the camera-based button objects to use the </a:t>
+                      </a:r>
+                      <a:r>
+                        <a:rPr lang="en-GB" sz="800" dirty="0" err="1"/>
+                        <a:t>scr_camera_change</a:t>
+                      </a:r>
+                      <a:r>
+                        <a:rPr lang="en-GB" sz="800" dirty="0"/>
+                        <a:t> script.</a:t>
+                      </a:r>
+                    </a:p>
+                    <a:p>
+                      <a:pPr marL="0" indent="0">
+                        <a:buNone/>
+                      </a:pPr>
+                      <a:endParaRPr lang="en-GB" sz="800" dirty="0"/>
+                    </a:p>
+                    <a:p>
+                      <a:pPr marL="0" indent="0">
+                        <a:buNone/>
+                      </a:pPr>
+                      <a:r>
+                        <a:rPr lang="en-GB" sz="800" dirty="0"/>
+                        <a:t>Lastly, at game start the controller sets the camera’s size and position to the office zone (</a:t>
+                      </a:r>
+                      <a:r>
+                        <a:rPr lang="en-GB" sz="800" dirty="0" err="1"/>
+                        <a:t>global.current_zone</a:t>
+                      </a:r>
+                      <a:r>
+                        <a:rPr lang="en-GB" sz="800" dirty="0"/>
+                        <a:t> = 0)</a:t>
+                      </a:r>
+                    </a:p>
+                    <a:p>
+                      <a:pPr marL="0" indent="0">
+                        <a:buNone/>
+                      </a:pPr>
+                      <a:endParaRPr lang="en-GB" sz="800" dirty="0"/>
+                    </a:p>
+                  </a:txBody>
+                  <a:tcPr/>
+                </a:tc>
+                <a:tc>
+                  <a:txBody>
+                    <a:bodyPr/>
+                    <a:lstStyle/>
+                    <a:p>
+                      <a:pPr marL="0" indent="0">
+                        <a:buNone/>
+                      </a:pPr>
+                      <a:endParaRPr lang="en-GB" sz="800" dirty="0"/>
+                    </a:p>
+                  </a:txBody>
+                  <a:tcPr/>
+                </a:tc>
+                <a:extLst>
+                  <a:ext uri="{0D108BD9-81ED-4DB2-BD59-A6C34878D82A}">
+                    <a16:rowId xmlns:a16="http://schemas.microsoft.com/office/drawing/2014/main" val="2370588301"/>
                   </a:ext>
                 </a:extLst>
               </a:tr>
@@ -28443,6 +28642,1629 @@
     <p:extLst>
       <p:ext uri="{BB962C8B-B14F-4D97-AF65-F5344CB8AC3E}">
         <p14:creationId xmlns:p14="http://schemas.microsoft.com/office/powerpoint/2010/main" val="3722388149"/>
+      </p:ext>
+    </p:extLst>
+  </p:cSld>
+  <p:clrMapOvr>
+    <a:masterClrMapping/>
+  </p:clrMapOvr>
+</p:sld>
+</file>
+
+<file path=ppt/slides/slide50.xml><?xml version="1.0" encoding="utf-8"?>
+<p:sld xmlns:a="http://schemas.openxmlformats.org/drawingml/2006/main" xmlns:r="http://schemas.openxmlformats.org/officeDocument/2006/relationships" xmlns:p="http://schemas.openxmlformats.org/presentationml/2006/main">
+  <p:cSld>
+    <p:spTree>
+      <p:nvGrpSpPr>
+        <p:cNvPr id="1" name="">
+          <a:extLst>
+            <a:ext uri="{FF2B5EF4-FFF2-40B4-BE49-F238E27FC236}">
+              <a16:creationId xmlns:a16="http://schemas.microsoft.com/office/drawing/2014/main" id="{C496EFD9-5657-72F8-5C69-FD38EBC53D46}"/>
+            </a:ext>
+          </a:extLst>
+        </p:cNvPr>
+        <p:cNvGrpSpPr/>
+        <p:nvPr/>
+      </p:nvGrpSpPr>
+      <p:grpSpPr>
+        <a:xfrm>
+          <a:off x="0" y="0"/>
+          <a:ext cx="0" cy="0"/>
+          <a:chOff x="0" y="0"/>
+          <a:chExt cx="0" cy="0"/>
+        </a:xfrm>
+      </p:grpSpPr>
+      <p:graphicFrame>
+        <p:nvGraphicFramePr>
+          <p:cNvPr id="4" name="Table 3">
+            <a:extLst>
+              <a:ext uri="{FF2B5EF4-FFF2-40B4-BE49-F238E27FC236}">
+                <a16:creationId xmlns:a16="http://schemas.microsoft.com/office/drawing/2014/main" id="{C769D7B3-5A5E-19FE-FCF9-91E8CFBD8B16}"/>
+              </a:ext>
+            </a:extLst>
+          </p:cNvPr>
+          <p:cNvGraphicFramePr>
+            <a:graphicFrameLocks noGrp="1"/>
+          </p:cNvGraphicFramePr>
+          <p:nvPr>
+            <p:extLst>
+              <p:ext uri="{D42A27DB-BD31-4B8C-83A1-F6EECF244321}">
+                <p14:modId xmlns:p14="http://schemas.microsoft.com/office/powerpoint/2010/main" val="1614178007"/>
+              </p:ext>
+            </p:extLst>
+          </p:nvPr>
+        </p:nvGraphicFramePr>
+        <p:xfrm>
+          <a:off x="114301" y="391885"/>
+          <a:ext cx="10874827" cy="6353263"/>
+        </p:xfrm>
+        <a:graphic>
+          <a:graphicData uri="http://schemas.openxmlformats.org/drawingml/2006/table">
+            <a:tbl>
+              <a:tblPr firstRow="1" bandRow="1">
+                <a:tableStyleId>{5C22544A-7EE6-4342-B048-85BDC9FD1C3A}</a:tableStyleId>
+              </a:tblPr>
+              <a:tblGrid>
+                <a:gridCol w="469086">
+                  <a:extLst>
+                    <a:ext uri="{9D8B030D-6E8A-4147-A177-3AD203B41FA5}">
+                      <a16:colId xmlns:a16="http://schemas.microsoft.com/office/drawing/2014/main" val="2041145262"/>
+                    </a:ext>
+                  </a:extLst>
+                </a:gridCol>
+                <a:gridCol w="1647254">
+                  <a:extLst>
+                    <a:ext uri="{9D8B030D-6E8A-4147-A177-3AD203B41FA5}">
+                      <a16:colId xmlns:a16="http://schemas.microsoft.com/office/drawing/2014/main" val="3102287305"/>
+                    </a:ext>
+                  </a:extLst>
+                </a:gridCol>
+                <a:gridCol w="612955">
+                  <a:extLst>
+                    <a:ext uri="{9D8B030D-6E8A-4147-A177-3AD203B41FA5}">
+                      <a16:colId xmlns:a16="http://schemas.microsoft.com/office/drawing/2014/main" val="4080696647"/>
+                    </a:ext>
+                  </a:extLst>
+                </a:gridCol>
+                <a:gridCol w="1499804">
+                  <a:extLst>
+                    <a:ext uri="{9D8B030D-6E8A-4147-A177-3AD203B41FA5}">
+                      <a16:colId xmlns:a16="http://schemas.microsoft.com/office/drawing/2014/main" val="132880537"/>
+                    </a:ext>
+                  </a:extLst>
+                </a:gridCol>
+                <a:gridCol w="3918857">
+                  <a:extLst>
+                    <a:ext uri="{9D8B030D-6E8A-4147-A177-3AD203B41FA5}">
+                      <a16:colId xmlns:a16="http://schemas.microsoft.com/office/drawing/2014/main" val="786884226"/>
+                    </a:ext>
+                  </a:extLst>
+                </a:gridCol>
+                <a:gridCol w="2726871">
+                  <a:extLst>
+                    <a:ext uri="{9D8B030D-6E8A-4147-A177-3AD203B41FA5}">
+                      <a16:colId xmlns:a16="http://schemas.microsoft.com/office/drawing/2014/main" val="3328467923"/>
+                    </a:ext>
+                  </a:extLst>
+                </a:gridCol>
+              </a:tblGrid>
+              <a:tr h="470623">
+                <a:tc>
+                  <a:txBody>
+                    <a:bodyPr/>
+                    <a:lstStyle/>
+                    <a:p>
+                      <a:r>
+                        <a:rPr lang="en-GB" sz="800" dirty="0"/>
+                        <a:t>Test Number</a:t>
+                      </a:r>
+                    </a:p>
+                  </a:txBody>
+                  <a:tcPr/>
+                </a:tc>
+                <a:tc>
+                  <a:txBody>
+                    <a:bodyPr/>
+                    <a:lstStyle/>
+                    <a:p>
+                      <a:r>
+                        <a:rPr lang="en-GB" sz="800" dirty="0"/>
+                        <a:t>Test Type</a:t>
+                      </a:r>
+                    </a:p>
+                  </a:txBody>
+                  <a:tcPr/>
+                </a:tc>
+                <a:tc>
+                  <a:txBody>
+                    <a:bodyPr/>
+                    <a:lstStyle/>
+                    <a:p>
+                      <a:r>
+                        <a:rPr lang="en-GB" sz="800" dirty="0"/>
+                        <a:t>Room</a:t>
+                      </a:r>
+                    </a:p>
+                  </a:txBody>
+                  <a:tcPr/>
+                </a:tc>
+                <a:tc>
+                  <a:txBody>
+                    <a:bodyPr/>
+                    <a:lstStyle/>
+                    <a:p>
+                      <a:r>
+                        <a:rPr lang="en-GB" sz="800" dirty="0"/>
+                        <a:t>Objects Involved</a:t>
+                      </a:r>
+                    </a:p>
+                  </a:txBody>
+                  <a:tcPr/>
+                </a:tc>
+                <a:tc>
+                  <a:txBody>
+                    <a:bodyPr/>
+                    <a:lstStyle/>
+                    <a:p>
+                      <a:r>
+                        <a:rPr lang="en-GB" sz="800" dirty="0"/>
+                        <a:t>Expected Outcome</a:t>
+                      </a:r>
+                    </a:p>
+                  </a:txBody>
+                  <a:tcPr/>
+                </a:tc>
+                <a:tc>
+                  <a:txBody>
+                    <a:bodyPr/>
+                    <a:lstStyle/>
+                    <a:p>
+                      <a:r>
+                        <a:rPr lang="en-GB" sz="800" dirty="0"/>
+                        <a:t>Actual Outcome</a:t>
+                      </a:r>
+                    </a:p>
+                  </a:txBody>
+                  <a:tcPr/>
+                </a:tc>
+                <a:extLst>
+                  <a:ext uri="{0D108BD9-81ED-4DB2-BD59-A6C34878D82A}">
+                    <a16:rowId xmlns:a16="http://schemas.microsoft.com/office/drawing/2014/main" val="1296324342"/>
+                  </a:ext>
+                </a:extLst>
+              </a:tr>
+              <a:tr h="470623">
+                <a:tc>
+                  <a:txBody>
+                    <a:bodyPr/>
+                    <a:lstStyle/>
+                    <a:p>
+                      <a:r>
+                        <a:rPr lang="en-GB" sz="800" dirty="0"/>
+                        <a:t>46.</a:t>
+                      </a:r>
+                    </a:p>
+                  </a:txBody>
+                  <a:tcPr/>
+                </a:tc>
+                <a:tc>
+                  <a:txBody>
+                    <a:bodyPr/>
+                    <a:lstStyle/>
+                    <a:p>
+                      <a:pPr marL="0" marR="0" lvl="0" indent="0" algn="l" defTabSz="914400" rtl="0" eaLnBrk="1" fontAlgn="auto" latinLnBrk="0" hangingPunct="1">
+                        <a:lnSpc>
+                          <a:spcPct val="100000"/>
+                        </a:lnSpc>
+                        <a:spcBef>
+                          <a:spcPts val="0"/>
+                        </a:spcBef>
+                        <a:spcAft>
+                          <a:spcPts val="0"/>
+                        </a:spcAft>
+                        <a:buClrTx/>
+                        <a:buSzTx/>
+                        <a:buFontTx/>
+                        <a:buNone/>
+                        <a:tabLst/>
+                        <a:defRPr/>
+                      </a:pPr>
+                      <a:r>
+                        <a:rPr lang="en-GB" sz="800" dirty="0"/>
+                        <a:t>Camera controller level 3</a:t>
+                      </a:r>
+                    </a:p>
+                    <a:p>
+                      <a:endParaRPr lang="en-GB" sz="800" dirty="0"/>
+                    </a:p>
+                  </a:txBody>
+                  <a:tcPr/>
+                </a:tc>
+                <a:tc>
+                  <a:txBody>
+                    <a:bodyPr/>
+                    <a:lstStyle/>
+                    <a:p>
+                      <a:r>
+                        <a:rPr lang="en-GB" sz="800" dirty="0"/>
+                        <a:t>Rm_level3</a:t>
+                      </a:r>
+                    </a:p>
+                  </a:txBody>
+                  <a:tcPr/>
+                </a:tc>
+                <a:tc>
+                  <a:txBody>
+                    <a:bodyPr/>
+                    <a:lstStyle/>
+                    <a:p>
+                      <a:pPr marL="0" marR="0" lvl="0" indent="0" algn="l" defTabSz="914400" rtl="0" eaLnBrk="1" fontAlgn="auto" latinLnBrk="0" hangingPunct="1">
+                        <a:lnSpc>
+                          <a:spcPct val="100000"/>
+                        </a:lnSpc>
+                        <a:spcBef>
+                          <a:spcPts val="0"/>
+                        </a:spcBef>
+                        <a:spcAft>
+                          <a:spcPts val="0"/>
+                        </a:spcAft>
+                        <a:buClrTx/>
+                        <a:buSzTx/>
+                        <a:buFontTx/>
+                        <a:buNone/>
+                        <a:tabLst/>
+                        <a:defRPr/>
+                      </a:pPr>
+                      <a:r>
+                        <a:rPr lang="en-GB" sz="800" dirty="0"/>
+                        <a:t>obj_camera_controller_lvl3</a:t>
+                      </a:r>
+                    </a:p>
+                    <a:p>
+                      <a:endParaRPr lang="en-GB" sz="800" dirty="0"/>
+                    </a:p>
+                  </a:txBody>
+                  <a:tcPr/>
+                </a:tc>
+                <a:tc>
+                  <a:txBody>
+                    <a:bodyPr/>
+                    <a:lstStyle/>
+                    <a:p>
+                      <a:pPr marL="0" indent="0">
+                        <a:buNone/>
+                      </a:pPr>
+                      <a:r>
+                        <a:rPr lang="en-GB" sz="800" dirty="0"/>
+                        <a:t>The camera controller is to change the player view to what ever button the player presses, utilizing a script to identify what zone to look at. In addition, the controller itself in its create code contains all the co-ordinates of every zone in level 3 which is then globally labelled using </a:t>
+                      </a:r>
+                      <a:r>
+                        <a:rPr lang="en-GB" sz="800" dirty="0" err="1"/>
+                        <a:t>global.current_zone</a:t>
+                      </a:r>
+                      <a:r>
+                        <a:rPr lang="en-GB" sz="800" dirty="0"/>
+                        <a:t> as an identifier, and the number zone is named using scripts to make it easier to know what zone is what.</a:t>
+                      </a:r>
+                    </a:p>
+                    <a:p>
+                      <a:pPr marL="0" indent="0">
+                        <a:buNone/>
+                      </a:pPr>
+                      <a:endParaRPr lang="en-GB" sz="800" dirty="0"/>
+                    </a:p>
+                    <a:p>
+                      <a:pPr marL="0" indent="0">
+                        <a:buNone/>
+                      </a:pPr>
+                      <a:r>
+                        <a:rPr lang="en-GB" sz="800" dirty="0"/>
+                        <a:t>If the player clicks a camera button, it triggers the </a:t>
+                      </a:r>
+                      <a:r>
+                        <a:rPr lang="en-GB" sz="800" dirty="0" err="1"/>
+                        <a:t>scr_camera_change</a:t>
+                      </a:r>
+                      <a:r>
+                        <a:rPr lang="en-GB" sz="800" dirty="0"/>
+                        <a:t> and moves the game's view port to whatever zone is triggered by the button.</a:t>
+                      </a:r>
+                    </a:p>
+                    <a:p>
+                      <a:pPr marL="0" indent="0">
+                        <a:buNone/>
+                      </a:pPr>
+                      <a:endParaRPr lang="en-GB" sz="800" dirty="0"/>
+                    </a:p>
+                    <a:p>
+                      <a:pPr marL="0" indent="0">
+                        <a:buNone/>
+                      </a:pPr>
+                      <a:r>
+                        <a:rPr lang="en-GB" sz="800" dirty="0"/>
+                        <a:t>The controller also enables the camera-based button objects to use the </a:t>
+                      </a:r>
+                      <a:r>
+                        <a:rPr lang="en-GB" sz="800" dirty="0" err="1"/>
+                        <a:t>scr_camera_change</a:t>
+                      </a:r>
+                      <a:r>
+                        <a:rPr lang="en-GB" sz="800" dirty="0"/>
+                        <a:t> script.</a:t>
+                      </a:r>
+                    </a:p>
+                    <a:p>
+                      <a:pPr marL="0" indent="0">
+                        <a:buNone/>
+                      </a:pPr>
+                      <a:endParaRPr lang="en-GB" sz="800" dirty="0"/>
+                    </a:p>
+                    <a:p>
+                      <a:pPr marL="0" indent="0">
+                        <a:buNone/>
+                      </a:pPr>
+                      <a:r>
+                        <a:rPr lang="en-GB" sz="800" dirty="0"/>
+                        <a:t>Lastly, at game start the controller sets the camera’s size and position to the office zone (</a:t>
+                      </a:r>
+                      <a:r>
+                        <a:rPr lang="en-GB" sz="800" dirty="0" err="1"/>
+                        <a:t>global.current_zone</a:t>
+                      </a:r>
+                      <a:r>
+                        <a:rPr lang="en-GB" sz="800" dirty="0"/>
+                        <a:t> = 0)</a:t>
+                      </a:r>
+                    </a:p>
+                    <a:p>
+                      <a:endParaRPr lang="en-GB" sz="800" dirty="0"/>
+                    </a:p>
+                  </a:txBody>
+                  <a:tcPr/>
+                </a:tc>
+                <a:tc>
+                  <a:txBody>
+                    <a:bodyPr/>
+                    <a:lstStyle/>
+                    <a:p>
+                      <a:endParaRPr lang="en-GB" sz="800" dirty="0"/>
+                    </a:p>
+                  </a:txBody>
+                  <a:tcPr/>
+                </a:tc>
+                <a:extLst>
+                  <a:ext uri="{0D108BD9-81ED-4DB2-BD59-A6C34878D82A}">
+                    <a16:rowId xmlns:a16="http://schemas.microsoft.com/office/drawing/2014/main" val="289599235"/>
+                  </a:ext>
+                </a:extLst>
+              </a:tr>
+              <a:tr h="470623">
+                <a:tc>
+                  <a:txBody>
+                    <a:bodyPr/>
+                    <a:lstStyle/>
+                    <a:p>
+                      <a:r>
+                        <a:rPr lang="en-GB" sz="800" dirty="0"/>
+                        <a:t>47.</a:t>
+                      </a:r>
+                    </a:p>
+                  </a:txBody>
+                  <a:tcPr/>
+                </a:tc>
+                <a:tc>
+                  <a:txBody>
+                    <a:bodyPr/>
+                    <a:lstStyle/>
+                    <a:p>
+                      <a:r>
+                        <a:rPr lang="en-GB" sz="800" dirty="0"/>
+                        <a:t>Camera controller level 4</a:t>
+                      </a:r>
+                    </a:p>
+                  </a:txBody>
+                  <a:tcPr/>
+                </a:tc>
+                <a:tc>
+                  <a:txBody>
+                    <a:bodyPr/>
+                    <a:lstStyle/>
+                    <a:p>
+                      <a:r>
+                        <a:rPr lang="en-GB" sz="800" dirty="0"/>
+                        <a:t>Rm_level4</a:t>
+                      </a:r>
+                    </a:p>
+                  </a:txBody>
+                  <a:tcPr/>
+                </a:tc>
+                <a:tc>
+                  <a:txBody>
+                    <a:bodyPr/>
+                    <a:lstStyle/>
+                    <a:p>
+                      <a:r>
+                        <a:rPr lang="en-GB" sz="800" dirty="0"/>
+                        <a:t>obj_camera_controller_lvl4</a:t>
+                      </a:r>
+                    </a:p>
+                  </a:txBody>
+                  <a:tcPr/>
+                </a:tc>
+                <a:tc>
+                  <a:txBody>
+                    <a:bodyPr/>
+                    <a:lstStyle/>
+                    <a:p>
+                      <a:pPr marL="0" indent="0">
+                        <a:buNone/>
+                      </a:pPr>
+                      <a:r>
+                        <a:rPr lang="en-GB" sz="800" dirty="0"/>
+                        <a:t>The camera controller is to change the player view to what ever button the player presses, utilizing a script to identify what zone to look at. In addition, the controller itself in its create code contains all the co-ordinates of every zone in level 4 which is then globally labelled using </a:t>
+                      </a:r>
+                      <a:r>
+                        <a:rPr lang="en-GB" sz="800" dirty="0" err="1"/>
+                        <a:t>global.current_zone</a:t>
+                      </a:r>
+                      <a:r>
+                        <a:rPr lang="en-GB" sz="800" dirty="0"/>
+                        <a:t> as an identifier, and the number zone is named using scripts to make it easier to know what zone is what.</a:t>
+                      </a:r>
+                    </a:p>
+                    <a:p>
+                      <a:pPr marL="0" indent="0">
+                        <a:buNone/>
+                      </a:pPr>
+                      <a:endParaRPr lang="en-GB" sz="800" dirty="0"/>
+                    </a:p>
+                    <a:p>
+                      <a:pPr marL="0" indent="0">
+                        <a:buNone/>
+                      </a:pPr>
+                      <a:r>
+                        <a:rPr lang="en-GB" sz="800" dirty="0"/>
+                        <a:t>If the player clicks a camera button, it triggers the </a:t>
+                      </a:r>
+                      <a:r>
+                        <a:rPr lang="en-GB" sz="800" dirty="0" err="1"/>
+                        <a:t>scr_camera_change</a:t>
+                      </a:r>
+                      <a:r>
+                        <a:rPr lang="en-GB" sz="800" dirty="0"/>
+                        <a:t> and moves the game's view port to whatever zone is triggered by the button.</a:t>
+                      </a:r>
+                    </a:p>
+                    <a:p>
+                      <a:pPr marL="0" indent="0">
+                        <a:buNone/>
+                      </a:pPr>
+                      <a:endParaRPr lang="en-GB" sz="800" dirty="0"/>
+                    </a:p>
+                    <a:p>
+                      <a:pPr marL="0" indent="0">
+                        <a:buNone/>
+                      </a:pPr>
+                      <a:r>
+                        <a:rPr lang="en-GB" sz="800" dirty="0"/>
+                        <a:t>The controller also enables the camera-based button objects to use the </a:t>
+                      </a:r>
+                      <a:r>
+                        <a:rPr lang="en-GB" sz="800" dirty="0" err="1"/>
+                        <a:t>scr_camera_change</a:t>
+                      </a:r>
+                      <a:r>
+                        <a:rPr lang="en-GB" sz="800" dirty="0"/>
+                        <a:t> script.</a:t>
+                      </a:r>
+                    </a:p>
+                    <a:p>
+                      <a:pPr marL="0" indent="0">
+                        <a:buNone/>
+                      </a:pPr>
+                      <a:endParaRPr lang="en-GB" sz="800" dirty="0"/>
+                    </a:p>
+                    <a:p>
+                      <a:pPr marL="0" indent="0">
+                        <a:buNone/>
+                      </a:pPr>
+                      <a:r>
+                        <a:rPr lang="en-GB" sz="800" dirty="0"/>
+                        <a:t>Lastly, at game start the controller sets the camera’s size and position to the office zone (</a:t>
+                      </a:r>
+                      <a:r>
+                        <a:rPr lang="en-GB" sz="800" dirty="0" err="1"/>
+                        <a:t>global.current_zone</a:t>
+                      </a:r>
+                      <a:r>
+                        <a:rPr lang="en-GB" sz="800" dirty="0"/>
+                        <a:t> = 0)</a:t>
+                      </a:r>
+                    </a:p>
+                    <a:p>
+                      <a:pPr marL="0" indent="0">
+                        <a:buNone/>
+                      </a:pPr>
+                      <a:endParaRPr lang="en-GB" sz="800" dirty="0"/>
+                    </a:p>
+                    <a:p>
+                      <a:pPr marL="0" indent="0">
+                        <a:buNone/>
+                      </a:pPr>
+                      <a:endParaRPr lang="en-GB" sz="800" dirty="0"/>
+                    </a:p>
+                  </a:txBody>
+                  <a:tcPr/>
+                </a:tc>
+                <a:tc>
+                  <a:txBody>
+                    <a:bodyPr/>
+                    <a:lstStyle/>
+                    <a:p>
+                      <a:pPr marL="0" indent="0">
+                        <a:buNone/>
+                      </a:pPr>
+                      <a:endParaRPr lang="en-GB" sz="800" dirty="0"/>
+                    </a:p>
+                  </a:txBody>
+                  <a:tcPr/>
+                </a:tc>
+                <a:extLst>
+                  <a:ext uri="{0D108BD9-81ED-4DB2-BD59-A6C34878D82A}">
+                    <a16:rowId xmlns:a16="http://schemas.microsoft.com/office/drawing/2014/main" val="4163288784"/>
+                  </a:ext>
+                </a:extLst>
+              </a:tr>
+              <a:tr h="470623">
+                <a:tc>
+                  <a:txBody>
+                    <a:bodyPr/>
+                    <a:lstStyle/>
+                    <a:p>
+                      <a:r>
+                        <a:rPr lang="en-GB" sz="800" dirty="0"/>
+                        <a:t>48.</a:t>
+                      </a:r>
+                    </a:p>
+                  </a:txBody>
+                  <a:tcPr/>
+                </a:tc>
+                <a:tc>
+                  <a:txBody>
+                    <a:bodyPr/>
+                    <a:lstStyle/>
+                    <a:p>
+                      <a:pPr marL="0" marR="0" lvl="0" indent="0" algn="l" defTabSz="914400" rtl="0" eaLnBrk="1" fontAlgn="auto" latinLnBrk="0" hangingPunct="1">
+                        <a:lnSpc>
+                          <a:spcPct val="100000"/>
+                        </a:lnSpc>
+                        <a:spcBef>
+                          <a:spcPts val="0"/>
+                        </a:spcBef>
+                        <a:spcAft>
+                          <a:spcPts val="0"/>
+                        </a:spcAft>
+                        <a:buClrTx/>
+                        <a:buSzTx/>
+                        <a:buFontTx/>
+                        <a:buNone/>
+                        <a:tabLst/>
+                        <a:defRPr/>
+                      </a:pPr>
+                      <a:r>
+                        <a:rPr lang="en-GB" sz="800" dirty="0"/>
+                        <a:t>Camera controller level 5</a:t>
+                      </a:r>
+                    </a:p>
+                    <a:p>
+                      <a:endParaRPr lang="en-GB" sz="800" dirty="0"/>
+                    </a:p>
+                  </a:txBody>
+                  <a:tcPr/>
+                </a:tc>
+                <a:tc>
+                  <a:txBody>
+                    <a:bodyPr/>
+                    <a:lstStyle/>
+                    <a:p>
+                      <a:r>
+                        <a:rPr lang="en-GB" sz="800" dirty="0"/>
+                        <a:t>Rm_level5</a:t>
+                      </a:r>
+                    </a:p>
+                  </a:txBody>
+                  <a:tcPr/>
+                </a:tc>
+                <a:tc>
+                  <a:txBody>
+                    <a:bodyPr/>
+                    <a:lstStyle/>
+                    <a:p>
+                      <a:r>
+                        <a:rPr lang="en-GB" sz="800" dirty="0"/>
+                        <a:t>Obj_camera_controller_lvl5</a:t>
+                      </a:r>
+                    </a:p>
+                  </a:txBody>
+                  <a:tcPr/>
+                </a:tc>
+                <a:tc>
+                  <a:txBody>
+                    <a:bodyPr/>
+                    <a:lstStyle/>
+                    <a:p>
+                      <a:pPr marL="0" indent="0">
+                        <a:buNone/>
+                      </a:pPr>
+                      <a:r>
+                        <a:rPr lang="en-GB" sz="800" dirty="0"/>
+                        <a:t>The camera controller is to change the player view to a specific zone within the room. Utilizing a script to identify what zone to look at. In addition, the controller itself in its create code contains all the co-ordinates of every zone in level 5 which is then globally labelled using </a:t>
+                      </a:r>
+                      <a:r>
+                        <a:rPr lang="en-GB" sz="800" dirty="0" err="1"/>
+                        <a:t>global.current_zone</a:t>
+                      </a:r>
+                      <a:r>
+                        <a:rPr lang="en-GB" sz="800" dirty="0"/>
+                        <a:t> as an identifier, and the number zone is named using scripts to make it easier to know what zone is what.</a:t>
+                      </a:r>
+                    </a:p>
+                    <a:p>
+                      <a:pPr marL="0" indent="0">
+                        <a:buNone/>
+                      </a:pPr>
+                      <a:endParaRPr lang="en-GB" sz="800" dirty="0"/>
+                    </a:p>
+                    <a:p>
+                      <a:pPr marL="0" indent="0">
+                        <a:buNone/>
+                      </a:pPr>
+                      <a:r>
+                        <a:rPr lang="en-GB" sz="800" dirty="0"/>
+                        <a:t>If the player clicks a camera button, it triggers the </a:t>
+                      </a:r>
+                      <a:r>
+                        <a:rPr lang="en-GB" sz="800" dirty="0" err="1"/>
+                        <a:t>scr_camera_change</a:t>
+                      </a:r>
+                      <a:r>
+                        <a:rPr lang="en-GB" sz="800" dirty="0"/>
+                        <a:t> and moves the game's view port to whatever zone is triggered by the button.</a:t>
+                      </a:r>
+                    </a:p>
+                    <a:p>
+                      <a:pPr marL="0" indent="0">
+                        <a:buNone/>
+                      </a:pPr>
+                      <a:endParaRPr lang="en-GB" sz="800" dirty="0"/>
+                    </a:p>
+                    <a:p>
+                      <a:pPr marL="0" indent="0">
+                        <a:buNone/>
+                      </a:pPr>
+                      <a:r>
+                        <a:rPr lang="en-GB" sz="800" dirty="0"/>
+                        <a:t>The controller also enables the camera-based button objects to use the </a:t>
+                      </a:r>
+                      <a:r>
+                        <a:rPr lang="en-GB" sz="800" dirty="0" err="1"/>
+                        <a:t>scr_camera_change</a:t>
+                      </a:r>
+                      <a:r>
+                        <a:rPr lang="en-GB" sz="800" dirty="0"/>
+                        <a:t> script.</a:t>
+                      </a:r>
+                    </a:p>
+                    <a:p>
+                      <a:pPr marL="0" indent="0">
+                        <a:buNone/>
+                      </a:pPr>
+                      <a:endParaRPr lang="en-GB" sz="800" dirty="0"/>
+                    </a:p>
+                    <a:p>
+                      <a:pPr marL="0" indent="0">
+                        <a:buNone/>
+                      </a:pPr>
+                      <a:r>
+                        <a:rPr lang="en-GB" sz="800" dirty="0"/>
+                        <a:t>Lastly, at game start the controller sets the camera’s size and position to the office zone (</a:t>
+                      </a:r>
+                      <a:r>
+                        <a:rPr lang="en-GB" sz="800" dirty="0" err="1"/>
+                        <a:t>global.current_zone</a:t>
+                      </a:r>
+                      <a:r>
+                        <a:rPr lang="en-GB" sz="800" dirty="0"/>
+                        <a:t> = 0)</a:t>
+                      </a:r>
+                    </a:p>
+                    <a:p>
+                      <a:pPr marL="0" indent="0">
+                        <a:buNone/>
+                      </a:pPr>
+                      <a:endParaRPr lang="en-GB" sz="800" dirty="0"/>
+                    </a:p>
+                  </a:txBody>
+                  <a:tcPr/>
+                </a:tc>
+                <a:tc>
+                  <a:txBody>
+                    <a:bodyPr/>
+                    <a:lstStyle/>
+                    <a:p>
+                      <a:pPr marL="0" indent="0">
+                        <a:buNone/>
+                      </a:pPr>
+                      <a:endParaRPr lang="en-GB" sz="800" dirty="0"/>
+                    </a:p>
+                  </a:txBody>
+                  <a:tcPr/>
+                </a:tc>
+                <a:extLst>
+                  <a:ext uri="{0D108BD9-81ED-4DB2-BD59-A6C34878D82A}">
+                    <a16:rowId xmlns:a16="http://schemas.microsoft.com/office/drawing/2014/main" val="2370588301"/>
+                  </a:ext>
+                </a:extLst>
+              </a:tr>
+            </a:tbl>
+          </a:graphicData>
+        </a:graphic>
+      </p:graphicFrame>
+      <p:sp>
+        <p:nvSpPr>
+          <p:cNvPr id="2" name="TextBox 1">
+            <a:extLst>
+              <a:ext uri="{FF2B5EF4-FFF2-40B4-BE49-F238E27FC236}">
+                <a16:creationId xmlns:a16="http://schemas.microsoft.com/office/drawing/2014/main" id="{75F9E048-6337-9132-4E48-07400039BC98}"/>
+              </a:ext>
+            </a:extLst>
+          </p:cNvPr>
+          <p:cNvSpPr txBox="1"/>
+          <p:nvPr/>
+        </p:nvSpPr>
+        <p:spPr>
+          <a:xfrm>
+            <a:off x="0" y="22553"/>
+            <a:ext cx="1301382" cy="369332"/>
+          </a:xfrm>
+          <a:prstGeom prst="rect">
+            <a:avLst/>
+          </a:prstGeom>
+          <a:noFill/>
+        </p:spPr>
+        <p:txBody>
+          <a:bodyPr wrap="none" rtlCol="0">
+            <a:spAutoFit/>
+          </a:bodyPr>
+          <a:lstStyle/>
+          <a:p>
+            <a:r>
+              <a:rPr lang="en-GB" dirty="0"/>
+              <a:t>Controllers</a:t>
+            </a:r>
+          </a:p>
+        </p:txBody>
+      </p:sp>
+    </p:spTree>
+    <p:extLst>
+      <p:ext uri="{BB962C8B-B14F-4D97-AF65-F5344CB8AC3E}">
+        <p14:creationId xmlns:p14="http://schemas.microsoft.com/office/powerpoint/2010/main" val="2304606661"/>
+      </p:ext>
+    </p:extLst>
+  </p:cSld>
+  <p:clrMapOvr>
+    <a:masterClrMapping/>
+  </p:clrMapOvr>
+</p:sld>
+</file>
+
+<file path=ppt/slides/slide51.xml><?xml version="1.0" encoding="utf-8"?>
+<p:sld xmlns:a="http://schemas.openxmlformats.org/drawingml/2006/main" xmlns:r="http://schemas.openxmlformats.org/officeDocument/2006/relationships" xmlns:p="http://schemas.openxmlformats.org/presentationml/2006/main">
+  <p:cSld>
+    <p:spTree>
+      <p:nvGrpSpPr>
+        <p:cNvPr id="1" name="">
+          <a:extLst>
+            <a:ext uri="{FF2B5EF4-FFF2-40B4-BE49-F238E27FC236}">
+              <a16:creationId xmlns:a16="http://schemas.microsoft.com/office/drawing/2014/main" id="{C4D623B9-484F-0887-686E-D8BB72489BF3}"/>
+            </a:ext>
+          </a:extLst>
+        </p:cNvPr>
+        <p:cNvGrpSpPr/>
+        <p:nvPr/>
+      </p:nvGrpSpPr>
+      <p:grpSpPr>
+        <a:xfrm>
+          <a:off x="0" y="0"/>
+          <a:ext cx="0" cy="0"/>
+          <a:chOff x="0" y="0"/>
+          <a:chExt cx="0" cy="0"/>
+        </a:xfrm>
+      </p:grpSpPr>
+      <p:graphicFrame>
+        <p:nvGraphicFramePr>
+          <p:cNvPr id="4" name="Table 3">
+            <a:extLst>
+              <a:ext uri="{FF2B5EF4-FFF2-40B4-BE49-F238E27FC236}">
+                <a16:creationId xmlns:a16="http://schemas.microsoft.com/office/drawing/2014/main" id="{14ADAA5F-494B-0AB9-AA89-C443F5417DB4}"/>
+              </a:ext>
+            </a:extLst>
+          </p:cNvPr>
+          <p:cNvGraphicFramePr>
+            <a:graphicFrameLocks noGrp="1"/>
+          </p:cNvGraphicFramePr>
+          <p:nvPr>
+            <p:extLst>
+              <p:ext uri="{D42A27DB-BD31-4B8C-83A1-F6EECF244321}">
+                <p14:modId xmlns:p14="http://schemas.microsoft.com/office/powerpoint/2010/main" val="878420764"/>
+              </p:ext>
+            </p:extLst>
+          </p:nvPr>
+        </p:nvGraphicFramePr>
+        <p:xfrm>
+          <a:off x="114301" y="391885"/>
+          <a:ext cx="10874827" cy="2823738"/>
+        </p:xfrm>
+        <a:graphic>
+          <a:graphicData uri="http://schemas.openxmlformats.org/drawingml/2006/table">
+            <a:tbl>
+              <a:tblPr firstRow="1" bandRow="1">
+                <a:tableStyleId>{5C22544A-7EE6-4342-B048-85BDC9FD1C3A}</a:tableStyleId>
+              </a:tblPr>
+              <a:tblGrid>
+                <a:gridCol w="469086">
+                  <a:extLst>
+                    <a:ext uri="{9D8B030D-6E8A-4147-A177-3AD203B41FA5}">
+                      <a16:colId xmlns:a16="http://schemas.microsoft.com/office/drawing/2014/main" val="2041145262"/>
+                    </a:ext>
+                  </a:extLst>
+                </a:gridCol>
+                <a:gridCol w="1647254">
+                  <a:extLst>
+                    <a:ext uri="{9D8B030D-6E8A-4147-A177-3AD203B41FA5}">
+                      <a16:colId xmlns:a16="http://schemas.microsoft.com/office/drawing/2014/main" val="3102287305"/>
+                    </a:ext>
+                  </a:extLst>
+                </a:gridCol>
+                <a:gridCol w="612955">
+                  <a:extLst>
+                    <a:ext uri="{9D8B030D-6E8A-4147-A177-3AD203B41FA5}">
+                      <a16:colId xmlns:a16="http://schemas.microsoft.com/office/drawing/2014/main" val="4080696647"/>
+                    </a:ext>
+                  </a:extLst>
+                </a:gridCol>
+                <a:gridCol w="1499804">
+                  <a:extLst>
+                    <a:ext uri="{9D8B030D-6E8A-4147-A177-3AD203B41FA5}">
+                      <a16:colId xmlns:a16="http://schemas.microsoft.com/office/drawing/2014/main" val="132880537"/>
+                    </a:ext>
+                  </a:extLst>
+                </a:gridCol>
+                <a:gridCol w="3918857">
+                  <a:extLst>
+                    <a:ext uri="{9D8B030D-6E8A-4147-A177-3AD203B41FA5}">
+                      <a16:colId xmlns:a16="http://schemas.microsoft.com/office/drawing/2014/main" val="786884226"/>
+                    </a:ext>
+                  </a:extLst>
+                </a:gridCol>
+                <a:gridCol w="2726871">
+                  <a:extLst>
+                    <a:ext uri="{9D8B030D-6E8A-4147-A177-3AD203B41FA5}">
+                      <a16:colId xmlns:a16="http://schemas.microsoft.com/office/drawing/2014/main" val="3328467923"/>
+                    </a:ext>
+                  </a:extLst>
+                </a:gridCol>
+              </a:tblGrid>
+              <a:tr h="470623">
+                <a:tc>
+                  <a:txBody>
+                    <a:bodyPr/>
+                    <a:lstStyle/>
+                    <a:p>
+                      <a:r>
+                        <a:rPr lang="en-GB" sz="800" dirty="0"/>
+                        <a:t>Test Number</a:t>
+                      </a:r>
+                    </a:p>
+                  </a:txBody>
+                  <a:tcPr/>
+                </a:tc>
+                <a:tc>
+                  <a:txBody>
+                    <a:bodyPr/>
+                    <a:lstStyle/>
+                    <a:p>
+                      <a:r>
+                        <a:rPr lang="en-GB" sz="800" dirty="0"/>
+                        <a:t>Test Type</a:t>
+                      </a:r>
+                    </a:p>
+                  </a:txBody>
+                  <a:tcPr/>
+                </a:tc>
+                <a:tc>
+                  <a:txBody>
+                    <a:bodyPr/>
+                    <a:lstStyle/>
+                    <a:p>
+                      <a:r>
+                        <a:rPr lang="en-GB" sz="800" dirty="0"/>
+                        <a:t>Room</a:t>
+                      </a:r>
+                    </a:p>
+                  </a:txBody>
+                  <a:tcPr/>
+                </a:tc>
+                <a:tc>
+                  <a:txBody>
+                    <a:bodyPr/>
+                    <a:lstStyle/>
+                    <a:p>
+                      <a:r>
+                        <a:rPr lang="en-GB" sz="800" dirty="0"/>
+                        <a:t>Objects Involved</a:t>
+                      </a:r>
+                    </a:p>
+                  </a:txBody>
+                  <a:tcPr/>
+                </a:tc>
+                <a:tc>
+                  <a:txBody>
+                    <a:bodyPr/>
+                    <a:lstStyle/>
+                    <a:p>
+                      <a:r>
+                        <a:rPr lang="en-GB" sz="800" dirty="0"/>
+                        <a:t>Expected Outcome</a:t>
+                      </a:r>
+                    </a:p>
+                  </a:txBody>
+                  <a:tcPr/>
+                </a:tc>
+                <a:tc>
+                  <a:txBody>
+                    <a:bodyPr/>
+                    <a:lstStyle/>
+                    <a:p>
+                      <a:r>
+                        <a:rPr lang="en-GB" sz="800" dirty="0"/>
+                        <a:t>Actual Outcome</a:t>
+                      </a:r>
+                    </a:p>
+                  </a:txBody>
+                  <a:tcPr/>
+                </a:tc>
+                <a:extLst>
+                  <a:ext uri="{0D108BD9-81ED-4DB2-BD59-A6C34878D82A}">
+                    <a16:rowId xmlns:a16="http://schemas.microsoft.com/office/drawing/2014/main" val="1296324342"/>
+                  </a:ext>
+                </a:extLst>
+              </a:tr>
+              <a:tr h="470623">
+                <a:tc>
+                  <a:txBody>
+                    <a:bodyPr/>
+                    <a:lstStyle/>
+                    <a:p>
+                      <a:r>
+                        <a:rPr lang="en-GB" sz="800" dirty="0"/>
+                        <a:t>49.</a:t>
+                      </a:r>
+                    </a:p>
+                  </a:txBody>
+                  <a:tcPr/>
+                </a:tc>
+                <a:tc>
+                  <a:txBody>
+                    <a:bodyPr/>
+                    <a:lstStyle/>
+                    <a:p>
+                      <a:pPr marL="0" marR="0" lvl="0" indent="0" algn="l" defTabSz="914400" rtl="0" eaLnBrk="1" fontAlgn="auto" latinLnBrk="0" hangingPunct="1">
+                        <a:lnSpc>
+                          <a:spcPct val="100000"/>
+                        </a:lnSpc>
+                        <a:spcBef>
+                          <a:spcPts val="0"/>
+                        </a:spcBef>
+                        <a:spcAft>
+                          <a:spcPts val="0"/>
+                        </a:spcAft>
+                        <a:buClrTx/>
+                        <a:buSzTx/>
+                        <a:buFontTx/>
+                        <a:buNone/>
+                        <a:tabLst/>
+                        <a:defRPr/>
+                      </a:pPr>
+                      <a:r>
+                        <a:rPr lang="en-GB" sz="800" dirty="0"/>
+                        <a:t>Sound controller level 1</a:t>
+                      </a:r>
+                    </a:p>
+                  </a:txBody>
+                  <a:tcPr/>
+                </a:tc>
+                <a:tc>
+                  <a:txBody>
+                    <a:bodyPr/>
+                    <a:lstStyle/>
+                    <a:p>
+                      <a:r>
+                        <a:rPr lang="en-GB" sz="800" dirty="0"/>
+                        <a:t>Rm_level1</a:t>
+                      </a:r>
+                    </a:p>
+                  </a:txBody>
+                  <a:tcPr/>
+                </a:tc>
+                <a:tc>
+                  <a:txBody>
+                    <a:bodyPr/>
+                    <a:lstStyle/>
+                    <a:p>
+                      <a:pPr marL="0" marR="0" lvl="0" indent="0" algn="l" defTabSz="914400" rtl="0" eaLnBrk="1" fontAlgn="auto" latinLnBrk="0" hangingPunct="1">
+                        <a:lnSpc>
+                          <a:spcPct val="100000"/>
+                        </a:lnSpc>
+                        <a:spcBef>
+                          <a:spcPts val="0"/>
+                        </a:spcBef>
+                        <a:spcAft>
+                          <a:spcPts val="0"/>
+                        </a:spcAft>
+                        <a:buClrTx/>
+                        <a:buSzTx/>
+                        <a:buFontTx/>
+                        <a:buNone/>
+                        <a:tabLst/>
+                        <a:defRPr/>
+                      </a:pPr>
+                      <a:r>
+                        <a:rPr lang="en-GB" sz="800" dirty="0"/>
+                        <a:t>obj_sound_controller_lvl1</a:t>
+                      </a:r>
+                    </a:p>
+                    <a:p>
+                      <a:endParaRPr lang="en-GB" sz="800" dirty="0"/>
+                    </a:p>
+                  </a:txBody>
+                  <a:tcPr/>
+                </a:tc>
+                <a:tc>
+                  <a:txBody>
+                    <a:bodyPr/>
+                    <a:lstStyle/>
+                    <a:p>
+                      <a:endParaRPr lang="en-GB" sz="800" dirty="0"/>
+                    </a:p>
+                  </a:txBody>
+                  <a:tcPr/>
+                </a:tc>
+                <a:tc>
+                  <a:txBody>
+                    <a:bodyPr/>
+                    <a:lstStyle/>
+                    <a:p>
+                      <a:endParaRPr lang="en-GB" sz="800" dirty="0"/>
+                    </a:p>
+                  </a:txBody>
+                  <a:tcPr/>
+                </a:tc>
+                <a:extLst>
+                  <a:ext uri="{0D108BD9-81ED-4DB2-BD59-A6C34878D82A}">
+                    <a16:rowId xmlns:a16="http://schemas.microsoft.com/office/drawing/2014/main" val="289599235"/>
+                  </a:ext>
+                </a:extLst>
+              </a:tr>
+              <a:tr h="470623">
+                <a:tc>
+                  <a:txBody>
+                    <a:bodyPr/>
+                    <a:lstStyle/>
+                    <a:p>
+                      <a:r>
+                        <a:rPr lang="en-GB" sz="800" dirty="0"/>
+                        <a:t>50.</a:t>
+                      </a:r>
+                    </a:p>
+                  </a:txBody>
+                  <a:tcPr/>
+                </a:tc>
+                <a:tc>
+                  <a:txBody>
+                    <a:bodyPr/>
+                    <a:lstStyle/>
+                    <a:p>
+                      <a:r>
+                        <a:rPr lang="en-GB" sz="800" dirty="0"/>
+                        <a:t>Sound controller level 2</a:t>
+                      </a:r>
+                    </a:p>
+                  </a:txBody>
+                  <a:tcPr/>
+                </a:tc>
+                <a:tc>
+                  <a:txBody>
+                    <a:bodyPr/>
+                    <a:lstStyle/>
+                    <a:p>
+                      <a:r>
+                        <a:rPr lang="en-GB" sz="800" dirty="0"/>
+                        <a:t>Rm_level2</a:t>
+                      </a:r>
+                    </a:p>
+                  </a:txBody>
+                  <a:tcPr/>
+                </a:tc>
+                <a:tc>
+                  <a:txBody>
+                    <a:bodyPr/>
+                    <a:lstStyle/>
+                    <a:p>
+                      <a:pPr marL="0" marR="0" lvl="0" indent="0" algn="l" defTabSz="914400" rtl="0" eaLnBrk="1" fontAlgn="auto" latinLnBrk="0" hangingPunct="1">
+                        <a:lnSpc>
+                          <a:spcPct val="100000"/>
+                        </a:lnSpc>
+                        <a:spcBef>
+                          <a:spcPts val="0"/>
+                        </a:spcBef>
+                        <a:spcAft>
+                          <a:spcPts val="0"/>
+                        </a:spcAft>
+                        <a:buClrTx/>
+                        <a:buSzTx/>
+                        <a:buFontTx/>
+                        <a:buNone/>
+                        <a:tabLst/>
+                        <a:defRPr/>
+                      </a:pPr>
+                      <a:r>
+                        <a:rPr lang="en-GB" sz="800" dirty="0"/>
+                        <a:t>obj_sound_controller_lvl2</a:t>
+                      </a:r>
+                    </a:p>
+                    <a:p>
+                      <a:endParaRPr lang="en-GB" sz="800" dirty="0"/>
+                    </a:p>
+                  </a:txBody>
+                  <a:tcPr/>
+                </a:tc>
+                <a:tc>
+                  <a:txBody>
+                    <a:bodyPr/>
+                    <a:lstStyle/>
+                    <a:p>
+                      <a:pPr marL="0" indent="0">
+                        <a:buNone/>
+                      </a:pPr>
+                      <a:endParaRPr lang="en-GB" sz="800" dirty="0"/>
+                    </a:p>
+                    <a:p>
+                      <a:pPr marL="0" indent="0">
+                        <a:buNone/>
+                      </a:pPr>
+                      <a:endParaRPr lang="en-GB" sz="800" dirty="0"/>
+                    </a:p>
+                  </a:txBody>
+                  <a:tcPr/>
+                </a:tc>
+                <a:tc>
+                  <a:txBody>
+                    <a:bodyPr/>
+                    <a:lstStyle/>
+                    <a:p>
+                      <a:pPr marL="0" indent="0">
+                        <a:buNone/>
+                      </a:pPr>
+                      <a:endParaRPr lang="en-GB" sz="800" dirty="0"/>
+                    </a:p>
+                  </a:txBody>
+                  <a:tcPr/>
+                </a:tc>
+                <a:extLst>
+                  <a:ext uri="{0D108BD9-81ED-4DB2-BD59-A6C34878D82A}">
+                    <a16:rowId xmlns:a16="http://schemas.microsoft.com/office/drawing/2014/main" val="4163288784"/>
+                  </a:ext>
+                </a:extLst>
+              </a:tr>
+              <a:tr h="470623">
+                <a:tc>
+                  <a:txBody>
+                    <a:bodyPr/>
+                    <a:lstStyle/>
+                    <a:p>
+                      <a:r>
+                        <a:rPr lang="en-GB" sz="800" dirty="0"/>
+                        <a:t>51.</a:t>
+                      </a:r>
+                    </a:p>
+                  </a:txBody>
+                  <a:tcPr/>
+                </a:tc>
+                <a:tc>
+                  <a:txBody>
+                    <a:bodyPr/>
+                    <a:lstStyle/>
+                    <a:p>
+                      <a:pPr marL="0" marR="0" lvl="0" indent="0" algn="l" defTabSz="914400" rtl="0" eaLnBrk="1" fontAlgn="auto" latinLnBrk="0" hangingPunct="1">
+                        <a:lnSpc>
+                          <a:spcPct val="100000"/>
+                        </a:lnSpc>
+                        <a:spcBef>
+                          <a:spcPts val="0"/>
+                        </a:spcBef>
+                        <a:spcAft>
+                          <a:spcPts val="0"/>
+                        </a:spcAft>
+                        <a:buClrTx/>
+                        <a:buSzTx/>
+                        <a:buFontTx/>
+                        <a:buNone/>
+                        <a:tabLst/>
+                        <a:defRPr/>
+                      </a:pPr>
+                      <a:r>
+                        <a:rPr lang="en-GB" sz="800" dirty="0"/>
+                        <a:t>Sound controller level 3</a:t>
+                      </a:r>
+                    </a:p>
+                    <a:p>
+                      <a:endParaRPr lang="en-GB" sz="800" dirty="0"/>
+                    </a:p>
+                  </a:txBody>
+                  <a:tcPr/>
+                </a:tc>
+                <a:tc>
+                  <a:txBody>
+                    <a:bodyPr/>
+                    <a:lstStyle/>
+                    <a:p>
+                      <a:r>
+                        <a:rPr lang="en-GB" sz="800" dirty="0"/>
+                        <a:t>Rm_level3</a:t>
+                      </a:r>
+                    </a:p>
+                  </a:txBody>
+                  <a:tcPr/>
+                </a:tc>
+                <a:tc>
+                  <a:txBody>
+                    <a:bodyPr/>
+                    <a:lstStyle/>
+                    <a:p>
+                      <a:pPr marL="0" marR="0" lvl="0" indent="0" algn="l" defTabSz="914400" rtl="0" eaLnBrk="1" fontAlgn="auto" latinLnBrk="0" hangingPunct="1">
+                        <a:lnSpc>
+                          <a:spcPct val="100000"/>
+                        </a:lnSpc>
+                        <a:spcBef>
+                          <a:spcPts val="0"/>
+                        </a:spcBef>
+                        <a:spcAft>
+                          <a:spcPts val="0"/>
+                        </a:spcAft>
+                        <a:buClrTx/>
+                        <a:buSzTx/>
+                        <a:buFontTx/>
+                        <a:buNone/>
+                        <a:tabLst/>
+                        <a:defRPr/>
+                      </a:pPr>
+                      <a:r>
+                        <a:rPr lang="en-GB" sz="800" dirty="0"/>
+                        <a:t>obj_sound_controller_lvl3</a:t>
+                      </a:r>
+                    </a:p>
+                    <a:p>
+                      <a:endParaRPr lang="en-GB" sz="800" dirty="0"/>
+                    </a:p>
+                  </a:txBody>
+                  <a:tcPr/>
+                </a:tc>
+                <a:tc>
+                  <a:txBody>
+                    <a:bodyPr/>
+                    <a:lstStyle/>
+                    <a:p>
+                      <a:pPr marL="0" indent="0">
+                        <a:buNone/>
+                      </a:pPr>
+                      <a:endParaRPr lang="en-GB" sz="800" dirty="0"/>
+                    </a:p>
+                  </a:txBody>
+                  <a:tcPr/>
+                </a:tc>
+                <a:tc>
+                  <a:txBody>
+                    <a:bodyPr/>
+                    <a:lstStyle/>
+                    <a:p>
+                      <a:pPr marL="0" indent="0">
+                        <a:buNone/>
+                      </a:pPr>
+                      <a:endParaRPr lang="en-GB" sz="800" dirty="0"/>
+                    </a:p>
+                  </a:txBody>
+                  <a:tcPr/>
+                </a:tc>
+                <a:extLst>
+                  <a:ext uri="{0D108BD9-81ED-4DB2-BD59-A6C34878D82A}">
+                    <a16:rowId xmlns:a16="http://schemas.microsoft.com/office/drawing/2014/main" val="2370588301"/>
+                  </a:ext>
+                </a:extLst>
+              </a:tr>
+              <a:tr h="470623">
+                <a:tc>
+                  <a:txBody>
+                    <a:bodyPr/>
+                    <a:lstStyle/>
+                    <a:p>
+                      <a:r>
+                        <a:rPr lang="en-GB" sz="800" dirty="0"/>
+                        <a:t>52.</a:t>
+                      </a:r>
+                    </a:p>
+                  </a:txBody>
+                  <a:tcPr/>
+                </a:tc>
+                <a:tc>
+                  <a:txBody>
+                    <a:bodyPr/>
+                    <a:lstStyle/>
+                    <a:p>
+                      <a:r>
+                        <a:rPr lang="en-GB" sz="800" dirty="0"/>
+                        <a:t>Sound controller level 4</a:t>
+                      </a:r>
+                    </a:p>
+                  </a:txBody>
+                  <a:tcPr/>
+                </a:tc>
+                <a:tc>
+                  <a:txBody>
+                    <a:bodyPr/>
+                    <a:lstStyle/>
+                    <a:p>
+                      <a:r>
+                        <a:rPr lang="en-GB" sz="800" dirty="0"/>
+                        <a:t>Rm_level4</a:t>
+                      </a:r>
+                    </a:p>
+                  </a:txBody>
+                  <a:tcPr/>
+                </a:tc>
+                <a:tc>
+                  <a:txBody>
+                    <a:bodyPr/>
+                    <a:lstStyle/>
+                    <a:p>
+                      <a:pPr marL="0" marR="0" lvl="0" indent="0" algn="l" defTabSz="914400" rtl="0" eaLnBrk="1" fontAlgn="auto" latinLnBrk="0" hangingPunct="1">
+                        <a:lnSpc>
+                          <a:spcPct val="100000"/>
+                        </a:lnSpc>
+                        <a:spcBef>
+                          <a:spcPts val="0"/>
+                        </a:spcBef>
+                        <a:spcAft>
+                          <a:spcPts val="0"/>
+                        </a:spcAft>
+                        <a:buClrTx/>
+                        <a:buSzTx/>
+                        <a:buFontTx/>
+                        <a:buNone/>
+                        <a:tabLst/>
+                        <a:defRPr/>
+                      </a:pPr>
+                      <a:r>
+                        <a:rPr lang="en-GB" sz="800" dirty="0"/>
+                        <a:t>obj_sound_controller_lvl4</a:t>
+                      </a:r>
+                    </a:p>
+                    <a:p>
+                      <a:endParaRPr lang="en-GB" sz="800" dirty="0"/>
+                    </a:p>
+                  </a:txBody>
+                  <a:tcPr/>
+                </a:tc>
+                <a:tc>
+                  <a:txBody>
+                    <a:bodyPr/>
+                    <a:lstStyle/>
+                    <a:p>
+                      <a:pPr marL="0" indent="0">
+                        <a:buNone/>
+                      </a:pPr>
+                      <a:endParaRPr lang="en-GB" sz="800" dirty="0"/>
+                    </a:p>
+                  </a:txBody>
+                  <a:tcPr/>
+                </a:tc>
+                <a:tc>
+                  <a:txBody>
+                    <a:bodyPr/>
+                    <a:lstStyle/>
+                    <a:p>
+                      <a:pPr marL="0" indent="0">
+                        <a:buNone/>
+                      </a:pPr>
+                      <a:endParaRPr lang="en-GB" sz="800" dirty="0"/>
+                    </a:p>
+                  </a:txBody>
+                  <a:tcPr/>
+                </a:tc>
+                <a:extLst>
+                  <a:ext uri="{0D108BD9-81ED-4DB2-BD59-A6C34878D82A}">
+                    <a16:rowId xmlns:a16="http://schemas.microsoft.com/office/drawing/2014/main" val="1562323603"/>
+                  </a:ext>
+                </a:extLst>
+              </a:tr>
+              <a:tr h="470623">
+                <a:tc>
+                  <a:txBody>
+                    <a:bodyPr/>
+                    <a:lstStyle/>
+                    <a:p>
+                      <a:r>
+                        <a:rPr lang="en-GB" sz="800" dirty="0"/>
+                        <a:t>53.</a:t>
+                      </a:r>
+                    </a:p>
+                  </a:txBody>
+                  <a:tcPr/>
+                </a:tc>
+                <a:tc>
+                  <a:txBody>
+                    <a:bodyPr/>
+                    <a:lstStyle/>
+                    <a:p>
+                      <a:pPr marL="0" marR="0" lvl="0" indent="0" algn="l" defTabSz="914400" rtl="0" eaLnBrk="1" fontAlgn="auto" latinLnBrk="0" hangingPunct="1">
+                        <a:lnSpc>
+                          <a:spcPct val="100000"/>
+                        </a:lnSpc>
+                        <a:spcBef>
+                          <a:spcPts val="0"/>
+                        </a:spcBef>
+                        <a:spcAft>
+                          <a:spcPts val="0"/>
+                        </a:spcAft>
+                        <a:buClrTx/>
+                        <a:buSzTx/>
+                        <a:buFontTx/>
+                        <a:buNone/>
+                        <a:tabLst/>
+                        <a:defRPr/>
+                      </a:pPr>
+                      <a:r>
+                        <a:rPr lang="en-GB" sz="800" dirty="0"/>
+                        <a:t>Sound controller level 5</a:t>
+                      </a:r>
+                    </a:p>
+                    <a:p>
+                      <a:endParaRPr lang="en-GB" sz="800" dirty="0"/>
+                    </a:p>
+                  </a:txBody>
+                  <a:tcPr/>
+                </a:tc>
+                <a:tc>
+                  <a:txBody>
+                    <a:bodyPr/>
+                    <a:lstStyle/>
+                    <a:p>
+                      <a:r>
+                        <a:rPr lang="en-GB" sz="800" dirty="0"/>
+                        <a:t>Rm_level5</a:t>
+                      </a:r>
+                    </a:p>
+                  </a:txBody>
+                  <a:tcPr/>
+                </a:tc>
+                <a:tc>
+                  <a:txBody>
+                    <a:bodyPr/>
+                    <a:lstStyle/>
+                    <a:p>
+                      <a:pPr marL="0" marR="0" lvl="0" indent="0" algn="l" defTabSz="914400" rtl="0" eaLnBrk="1" fontAlgn="auto" latinLnBrk="0" hangingPunct="1">
+                        <a:lnSpc>
+                          <a:spcPct val="100000"/>
+                        </a:lnSpc>
+                        <a:spcBef>
+                          <a:spcPts val="0"/>
+                        </a:spcBef>
+                        <a:spcAft>
+                          <a:spcPts val="0"/>
+                        </a:spcAft>
+                        <a:buClrTx/>
+                        <a:buSzTx/>
+                        <a:buFontTx/>
+                        <a:buNone/>
+                        <a:tabLst/>
+                        <a:defRPr/>
+                      </a:pPr>
+                      <a:r>
+                        <a:rPr lang="en-GB" sz="800" dirty="0"/>
+                        <a:t>obj_sound_controller_lvl5</a:t>
+                      </a:r>
+                    </a:p>
+                    <a:p>
+                      <a:endParaRPr lang="en-GB" sz="800" dirty="0"/>
+                    </a:p>
+                  </a:txBody>
+                  <a:tcPr/>
+                </a:tc>
+                <a:tc>
+                  <a:txBody>
+                    <a:bodyPr/>
+                    <a:lstStyle/>
+                    <a:p>
+                      <a:pPr marL="0" indent="0">
+                        <a:buNone/>
+                      </a:pPr>
+                      <a:endParaRPr lang="en-GB" sz="800" dirty="0"/>
+                    </a:p>
+                  </a:txBody>
+                  <a:tcPr/>
+                </a:tc>
+                <a:tc>
+                  <a:txBody>
+                    <a:bodyPr/>
+                    <a:lstStyle/>
+                    <a:p>
+                      <a:pPr marL="0" indent="0">
+                        <a:buNone/>
+                      </a:pPr>
+                      <a:endParaRPr lang="en-GB" sz="800" dirty="0"/>
+                    </a:p>
+                  </a:txBody>
+                  <a:tcPr/>
+                </a:tc>
+                <a:extLst>
+                  <a:ext uri="{0D108BD9-81ED-4DB2-BD59-A6C34878D82A}">
+                    <a16:rowId xmlns:a16="http://schemas.microsoft.com/office/drawing/2014/main" val="3532488199"/>
+                  </a:ext>
+                </a:extLst>
+              </a:tr>
+            </a:tbl>
+          </a:graphicData>
+        </a:graphic>
+      </p:graphicFrame>
+      <p:sp>
+        <p:nvSpPr>
+          <p:cNvPr id="2" name="TextBox 1">
+            <a:extLst>
+              <a:ext uri="{FF2B5EF4-FFF2-40B4-BE49-F238E27FC236}">
+                <a16:creationId xmlns:a16="http://schemas.microsoft.com/office/drawing/2014/main" id="{AA77FAAA-C496-9910-E97D-F48489976CBF}"/>
+              </a:ext>
+            </a:extLst>
+          </p:cNvPr>
+          <p:cNvSpPr txBox="1"/>
+          <p:nvPr/>
+        </p:nvSpPr>
+        <p:spPr>
+          <a:xfrm>
+            <a:off x="0" y="22553"/>
+            <a:ext cx="1301382" cy="369332"/>
+          </a:xfrm>
+          <a:prstGeom prst="rect">
+            <a:avLst/>
+          </a:prstGeom>
+          <a:noFill/>
+        </p:spPr>
+        <p:txBody>
+          <a:bodyPr wrap="none" rtlCol="0">
+            <a:spAutoFit/>
+          </a:bodyPr>
+          <a:lstStyle/>
+          <a:p>
+            <a:r>
+              <a:rPr lang="en-GB" dirty="0"/>
+              <a:t>Controllers</a:t>
+            </a:r>
+          </a:p>
+        </p:txBody>
+      </p:sp>
+    </p:spTree>
+    <p:extLst>
+      <p:ext uri="{BB962C8B-B14F-4D97-AF65-F5344CB8AC3E}">
+        <p14:creationId xmlns:p14="http://schemas.microsoft.com/office/powerpoint/2010/main" val="1894987274"/>
       </p:ext>
     </p:extLst>
   </p:cSld>

--- a/Logs/Development Log and Alpha Testing.pptx
+++ b/Logs/Development Log and Alpha Testing.pptx
@@ -175,27 +175,6 @@
     <p1510:client id="{B3A2F057-D9CB-BEFB-7B99-58B46FACF419}" v="9" dt="2025-10-10T09:01:16.390"/>
   </p1510:revLst>
 </p1510:revInfo>
-</file>
-
-<file path=ppt/comments/modernComment_100_68C49C6.xml><?xml version="1.0" encoding="utf-8"?>
-<p188:cmLst xmlns:a="http://schemas.openxmlformats.org/drawingml/2006/main" xmlns:r="http://schemas.openxmlformats.org/officeDocument/2006/relationships" xmlns:p188="http://schemas.microsoft.com/office/powerpoint/2018/8/main">
-  <p188:cm id="{6DB92719-FE1B-4F64-AAC0-8BCEB8A4943A}" authorId="{566DD6F6-1B0B-2351-1B34-242F146A8762}" created="2025-10-10T09:06:24.583">
-    <pc:sldMkLst xmlns:pc="http://schemas.microsoft.com/office/powerpoint/2013/main/command">
-      <pc:docMk/>
-      <pc:sldMk cId="109857222" sldId="256"/>
-    </pc:sldMkLst>
-    <p188:txBody>
-      <a:bodyPr/>
-      <a:lstStyle/>
-      <a:p>
-        <a:r>
-          <a:rPr lang="en-GB"/>
-          <a:t>Template Slide</a:t>
-        </a:r>
-      </a:p>
-    </p188:txBody>
-  </p188:cm>
-</p188:cmLst>
 </file>
 
 <file path=ppt/slideLayouts/slideLayout1.xml><?xml version="1.0" encoding="utf-8"?>
@@ -3364,7 +3343,7 @@
           <p:nvPr/>
         </p:nvPicPr>
         <p:blipFill>
-          <a:blip r:embed="rId3"/>
+          <a:blip r:embed="rId2"/>
           <a:srcRect t="23826"/>
           <a:stretch>
             <a:fillRect/>
@@ -3395,7 +3374,7 @@
           <p:nvPr/>
         </p:nvPicPr>
         <p:blipFill>
-          <a:blip r:embed="rId4"/>
+          <a:blip r:embed="rId3"/>
           <a:stretch>
             <a:fillRect/>
           </a:stretch>
@@ -3425,7 +3404,7 @@
           <p:nvPr/>
         </p:nvPicPr>
         <p:blipFill>
-          <a:blip r:embed="rId5"/>
+          <a:blip r:embed="rId4"/>
           <a:stretch>
             <a:fillRect/>
           </a:stretch>
@@ -3455,7 +3434,7 @@
           <p:nvPr/>
         </p:nvPicPr>
         <p:blipFill>
-          <a:blip r:embed="rId6"/>
+          <a:blip r:embed="rId5"/>
           <a:srcRect l="10547" r="31860"/>
           <a:stretch>
             <a:fillRect/>
@@ -3486,7 +3465,7 @@
           <p:nvPr/>
         </p:nvPicPr>
         <p:blipFill>
-          <a:blip r:embed="rId7"/>
+          <a:blip r:embed="rId6"/>
           <a:srcRect r="17625" b="10853"/>
           <a:stretch>
             <a:fillRect/>
@@ -3517,7 +3496,7 @@
           <p:nvPr/>
         </p:nvPicPr>
         <p:blipFill>
-          <a:blip r:embed="rId8" cstate="print">
+          <a:blip r:embed="rId7" cstate="print">
             <a:extLst>
               <a:ext uri="{28A0092B-C50C-407E-A947-70E740481C1C}">
                 <a14:useLocalDpi xmlns:a14="http://schemas.microsoft.com/office/drawing/2010/main" val="0"/>
@@ -3548,11 +3527,6 @@
   <p:clrMapOvr>
     <a:masterClrMapping/>
   </p:clrMapOvr>
-  <p:extLst>
-    <p:ext uri="{6950BFC3-D8DA-4A85-94F7-54DA5524770B}">
-      <p188:commentRel xmlns:p188="http://schemas.microsoft.com/office/powerpoint/2018/8/main" r:id="rId2"/>
-    </p:ext>
-  </p:extLst>
 </p:sld>
 </file>
 
@@ -19058,7 +19032,14 @@
             </a:br>
             <a:r>
               <a:rPr lang="en-GB" dirty="0"/>
-              <a:t>The each test will have a video to it at the end</a:t>
+              <a:t>Each test will be mentioned in each levels video. </a:t>
+            </a:r>
+            <a:br>
+              <a:rPr lang="en-GB" dirty="0"/>
+            </a:br>
+            <a:r>
+              <a:rPr lang="en-GB" dirty="0"/>
+              <a:t>The videos will be added at the end of the table slides.</a:t>
             </a:r>
             <a:br>
               <a:rPr lang="en-GB" dirty="0"/>
@@ -19120,7 +19101,7 @@
               <a:rPr lang="en-GB" b="1" dirty="0">
                 <a:latin typeface="Arial Narrow" panose="020B0606020202030204" pitchFamily="34" charset="0"/>
               </a:rPr>
-              <a:t> matching the level they are in not ones from other levels.</a:t>
+              <a:t> matching the level they are not from other levels.</a:t>
             </a:r>
             <a:endParaRPr lang="en-GB" sz="1800" b="1" dirty="0">
               <a:latin typeface="Arial Narrow" panose="020B0606020202030204" pitchFamily="34" charset="0"/>

--- a/Logs/Development Log and Alpha Testing.pptx
+++ b/Logs/Development Log and Alpha Testing.pptx
@@ -39,14 +39,15 @@
     <p:sldId id="295" r:id="rId33"/>
     <p:sldId id="296" r:id="rId34"/>
     <p:sldId id="297" r:id="rId35"/>
-    <p:sldId id="257" r:id="rId36"/>
-    <p:sldId id="267" r:id="rId37"/>
-    <p:sldId id="270" r:id="rId38"/>
-    <p:sldId id="272" r:id="rId39"/>
-    <p:sldId id="276" r:id="rId40"/>
-    <p:sldId id="278" r:id="rId41"/>
-    <p:sldId id="284" r:id="rId42"/>
-    <p:sldId id="309" r:id="rId43"/>
+    <p:sldId id="310" r:id="rId36"/>
+    <p:sldId id="257" r:id="rId37"/>
+    <p:sldId id="267" r:id="rId38"/>
+    <p:sldId id="270" r:id="rId39"/>
+    <p:sldId id="272" r:id="rId40"/>
+    <p:sldId id="276" r:id="rId41"/>
+    <p:sldId id="278" r:id="rId42"/>
+    <p:sldId id="284" r:id="rId43"/>
+    <p:sldId id="309" r:id="rId44"/>
   </p:sldIdLst>
   <p:sldSz cx="12192000" cy="6858000"/>
   <p:notesSz cx="6858000" cy="9144000"/>
@@ -299,7 +300,7 @@
           <a:p>
             <a:fld id="{846CE7D5-CF57-46EF-B807-FDD0502418D4}" type="datetimeFigureOut">
               <a:rPr lang="en-GB" smtClean="0"/>
-              <a:t>28/02/2026</a:t>
+              <a:t>10/03/2026</a:t>
             </a:fld>
             <a:endParaRPr lang="en-GB"/>
           </a:p>
@@ -469,7 +470,7 @@
           <a:p>
             <a:fld id="{846CE7D5-CF57-46EF-B807-FDD0502418D4}" type="datetimeFigureOut">
               <a:rPr lang="en-GB" smtClean="0"/>
-              <a:t>28/02/2026</a:t>
+              <a:t>10/03/2026</a:t>
             </a:fld>
             <a:endParaRPr lang="en-GB"/>
           </a:p>
@@ -649,7 +650,7 @@
           <a:p>
             <a:fld id="{846CE7D5-CF57-46EF-B807-FDD0502418D4}" type="datetimeFigureOut">
               <a:rPr lang="en-GB" smtClean="0"/>
-              <a:t>28/02/2026</a:t>
+              <a:t>10/03/2026</a:t>
             </a:fld>
             <a:endParaRPr lang="en-GB"/>
           </a:p>
@@ -819,7 +820,7 @@
           <a:p>
             <a:fld id="{846CE7D5-CF57-46EF-B807-FDD0502418D4}" type="datetimeFigureOut">
               <a:rPr lang="en-GB" smtClean="0"/>
-              <a:t>28/02/2026</a:t>
+              <a:t>10/03/2026</a:t>
             </a:fld>
             <a:endParaRPr lang="en-GB"/>
           </a:p>
@@ -1065,7 +1066,7 @@
           <a:p>
             <a:fld id="{846CE7D5-CF57-46EF-B807-FDD0502418D4}" type="datetimeFigureOut">
               <a:rPr lang="en-GB" smtClean="0"/>
-              <a:t>28/02/2026</a:t>
+              <a:t>10/03/2026</a:t>
             </a:fld>
             <a:endParaRPr lang="en-GB"/>
           </a:p>
@@ -1297,7 +1298,7 @@
           <a:p>
             <a:fld id="{846CE7D5-CF57-46EF-B807-FDD0502418D4}" type="datetimeFigureOut">
               <a:rPr lang="en-GB" smtClean="0"/>
-              <a:t>28/02/2026</a:t>
+              <a:t>10/03/2026</a:t>
             </a:fld>
             <a:endParaRPr lang="en-GB"/>
           </a:p>
@@ -1664,7 +1665,7 @@
           <a:p>
             <a:fld id="{846CE7D5-CF57-46EF-B807-FDD0502418D4}" type="datetimeFigureOut">
               <a:rPr lang="en-GB" smtClean="0"/>
-              <a:t>28/02/2026</a:t>
+              <a:t>10/03/2026</a:t>
             </a:fld>
             <a:endParaRPr lang="en-GB"/>
           </a:p>
@@ -1782,7 +1783,7 @@
           <a:p>
             <a:fld id="{846CE7D5-CF57-46EF-B807-FDD0502418D4}" type="datetimeFigureOut">
               <a:rPr lang="en-GB" smtClean="0"/>
-              <a:t>28/02/2026</a:t>
+              <a:t>10/03/2026</a:t>
             </a:fld>
             <a:endParaRPr lang="en-GB"/>
           </a:p>
@@ -1877,7 +1878,7 @@
           <a:p>
             <a:fld id="{846CE7D5-CF57-46EF-B807-FDD0502418D4}" type="datetimeFigureOut">
               <a:rPr lang="en-GB" smtClean="0"/>
-              <a:t>28/02/2026</a:t>
+              <a:t>10/03/2026</a:t>
             </a:fld>
             <a:endParaRPr lang="en-GB"/>
           </a:p>
@@ -2154,7 +2155,7 @@
           <a:p>
             <a:fld id="{846CE7D5-CF57-46EF-B807-FDD0502418D4}" type="datetimeFigureOut">
               <a:rPr lang="en-GB" smtClean="0"/>
-              <a:t>28/02/2026</a:t>
+              <a:t>10/03/2026</a:t>
             </a:fld>
             <a:endParaRPr lang="en-GB"/>
           </a:p>
@@ -2411,7 +2412,7 @@
           <a:p>
             <a:fld id="{846CE7D5-CF57-46EF-B807-FDD0502418D4}" type="datetimeFigureOut">
               <a:rPr lang="en-GB" smtClean="0"/>
-              <a:t>28/02/2026</a:t>
+              <a:t>10/03/2026</a:t>
             </a:fld>
             <a:endParaRPr lang="en-GB"/>
           </a:p>
@@ -2624,7 +2625,7 @@
           <a:p>
             <a:fld id="{846CE7D5-CF57-46EF-B807-FDD0502418D4}" type="datetimeFigureOut">
               <a:rPr lang="en-GB" smtClean="0"/>
-              <a:t>28/02/2026</a:t>
+              <a:t>10/03/2026</a:t>
             </a:fld>
             <a:endParaRPr lang="en-GB"/>
           </a:p>
@@ -14285,6 +14286,240 @@
   <p:cSld>
     <p:spTree>
       <p:nvGrpSpPr>
+        <p:cNvPr id="1" name="">
+          <a:extLst>
+            <a:ext uri="{FF2B5EF4-FFF2-40B4-BE49-F238E27FC236}">
+              <a16:creationId xmlns:a16="http://schemas.microsoft.com/office/drawing/2014/main" id="{F15303AE-490D-4587-3B18-636783E7F73B}"/>
+            </a:ext>
+          </a:extLst>
+        </p:cNvPr>
+        <p:cNvGrpSpPr/>
+        <p:nvPr/>
+      </p:nvGrpSpPr>
+      <p:grpSpPr>
+        <a:xfrm>
+          <a:off x="0" y="0"/>
+          <a:ext cx="0" cy="0"/>
+          <a:chOff x="0" y="0"/>
+          <a:chExt cx="0" cy="0"/>
+        </a:xfrm>
+      </p:grpSpPr>
+      <p:sp>
+        <p:nvSpPr>
+          <p:cNvPr id="4" name="TextBox 3">
+            <a:extLst>
+              <a:ext uri="{FF2B5EF4-FFF2-40B4-BE49-F238E27FC236}">
+                <a16:creationId xmlns:a16="http://schemas.microsoft.com/office/drawing/2014/main" id="{04357F5C-6337-B39B-B9D6-7458C76EC650}"/>
+              </a:ext>
+            </a:extLst>
+          </p:cNvPr>
+          <p:cNvSpPr txBox="1"/>
+          <p:nvPr/>
+        </p:nvSpPr>
+        <p:spPr>
+          <a:xfrm>
+            <a:off x="5015350" y="107525"/>
+            <a:ext cx="2269916" cy="338554"/>
+          </a:xfrm>
+          <a:prstGeom prst="rect">
+            <a:avLst/>
+          </a:prstGeom>
+          <a:noFill/>
+          <a:ln>
+            <a:solidFill>
+              <a:schemeClr val="tx1"/>
+            </a:solidFill>
+          </a:ln>
+        </p:spPr>
+        <p:txBody>
+          <a:bodyPr rot="0" spcFirstLastPara="0" vertOverflow="overflow" horzOverflow="overflow" vert="horz" wrap="square" lIns="91440" tIns="45720" rIns="91440" bIns="45720" numCol="1" spcCol="0" rtlCol="0" fromWordArt="0" anchor="t" anchorCtr="0" forceAA="0" compatLnSpc="1">
+            <a:prstTxWarp prst="textNoShape">
+              <a:avLst/>
+            </a:prstTxWarp>
+            <a:spAutoFit/>
+          </a:bodyPr>
+          <a:lstStyle/>
+          <a:p>
+            <a:r>
+              <a:rPr lang="en-GB" sz="1600" dirty="0"/>
+              <a:t>Date – 10/03/2026</a:t>
+            </a:r>
+          </a:p>
+        </p:txBody>
+      </p:sp>
+      <p:sp>
+        <p:nvSpPr>
+          <p:cNvPr id="2" name="TextBox 1">
+            <a:extLst>
+              <a:ext uri="{FF2B5EF4-FFF2-40B4-BE49-F238E27FC236}">
+                <a16:creationId xmlns:a16="http://schemas.microsoft.com/office/drawing/2014/main" id="{337598B7-240D-AF28-E53D-6ECD821889B5}"/>
+              </a:ext>
+            </a:extLst>
+          </p:cNvPr>
+          <p:cNvSpPr txBox="1"/>
+          <p:nvPr/>
+        </p:nvSpPr>
+        <p:spPr>
+          <a:xfrm>
+            <a:off x="5015350" y="542303"/>
+            <a:ext cx="2112147" cy="338554"/>
+          </a:xfrm>
+          <a:prstGeom prst="rect">
+            <a:avLst/>
+          </a:prstGeom>
+          <a:noFill/>
+          <a:ln>
+            <a:solidFill>
+              <a:schemeClr val="tx1"/>
+            </a:solidFill>
+          </a:ln>
+        </p:spPr>
+        <p:txBody>
+          <a:bodyPr rot="0" spcFirstLastPara="0" vertOverflow="overflow" horzOverflow="overflow" vert="horz" wrap="square" lIns="91440" tIns="45720" rIns="91440" bIns="45720" numCol="1" spcCol="0" rtlCol="0" fromWordArt="0" anchor="t" anchorCtr="0" forceAA="0" compatLnSpc="1">
+            <a:prstTxWarp prst="textNoShape">
+              <a:avLst/>
+            </a:prstTxWarp>
+            <a:spAutoFit/>
+          </a:bodyPr>
+          <a:lstStyle/>
+          <a:p>
+            <a:r>
+              <a:rPr lang="en-GB" sz="1600" dirty="0"/>
+              <a:t>Game Build V.1.0</a:t>
+            </a:r>
+          </a:p>
+        </p:txBody>
+      </p:sp>
+      <p:sp>
+        <p:nvSpPr>
+          <p:cNvPr id="3" name="TextBox 2">
+            <a:extLst>
+              <a:ext uri="{FF2B5EF4-FFF2-40B4-BE49-F238E27FC236}">
+                <a16:creationId xmlns:a16="http://schemas.microsoft.com/office/drawing/2014/main" id="{7EBA2385-3D11-F089-F8C0-A8D5C4019230}"/>
+              </a:ext>
+            </a:extLst>
+          </p:cNvPr>
+          <p:cNvSpPr txBox="1"/>
+          <p:nvPr/>
+        </p:nvSpPr>
+        <p:spPr>
+          <a:xfrm>
+            <a:off x="0" y="121250"/>
+            <a:ext cx="4906736" cy="5632311"/>
+          </a:xfrm>
+          <a:prstGeom prst="rect">
+            <a:avLst/>
+          </a:prstGeom>
+          <a:noFill/>
+          <a:ln>
+            <a:solidFill>
+              <a:schemeClr val="tx1"/>
+            </a:solidFill>
+          </a:ln>
+        </p:spPr>
+        <p:txBody>
+          <a:bodyPr rot="0" spcFirstLastPara="0" vertOverflow="overflow" horzOverflow="overflow" vert="horz" wrap="square" lIns="91440" tIns="45720" rIns="91440" bIns="45720" numCol="1" spcCol="0" rtlCol="0" fromWordArt="0" anchor="t" anchorCtr="0" forceAA="0" compatLnSpc="1">
+            <a:prstTxWarp prst="textNoShape">
+              <a:avLst/>
+            </a:prstTxWarp>
+            <a:spAutoFit/>
+          </a:bodyPr>
+          <a:lstStyle/>
+          <a:p>
+            <a:r>
+              <a:rPr lang="en-GB" sz="1200" dirty="0"/>
+              <a:t>In response to feedback and the addition of my original idea, I will be adding an animatic to my game narratively explaining the core functionality of my game while explaining why the player is in a facility.</a:t>
+            </a:r>
+          </a:p>
+          <a:p>
+            <a:endParaRPr lang="en-GB" sz="1200" dirty="0"/>
+          </a:p>
+          <a:p>
+            <a:r>
+              <a:rPr lang="en-GB" sz="1200" dirty="0"/>
+              <a:t>This was coded similarly to how the camera controller and buttons work. This camera controller though for this room will be less complex and will have very basic functions such as the camera buttons to get the player used to the gameplay.</a:t>
+            </a:r>
+          </a:p>
+          <a:p>
+            <a:endParaRPr lang="en-GB" sz="1200" dirty="0"/>
+          </a:p>
+          <a:p>
+            <a:r>
+              <a:rPr lang="en-GB" sz="1200" dirty="0"/>
+              <a:t>The camera view will change based off which animatic zone the player is looking at.</a:t>
+            </a:r>
+          </a:p>
+          <a:p>
+            <a:endParaRPr lang="en-GB" sz="1200" dirty="0"/>
+          </a:p>
+          <a:p>
+            <a:r>
+              <a:rPr lang="en-GB" sz="1200" dirty="0"/>
+              <a:t>Sound will also be added, but I will have to use timers to prevent the player from skipping too far ahead and allow the sounds to play properly in addition to the animatics themselves.</a:t>
+            </a:r>
+          </a:p>
+          <a:p>
+            <a:endParaRPr lang="en-GB" sz="1200" dirty="0"/>
+          </a:p>
+          <a:p>
+            <a:r>
+              <a:rPr lang="en-GB" sz="1200" dirty="0"/>
+              <a:t>There will be some assets being re-used such as the office and enemy sprites due to some parts of the narrative needing coverage of it.</a:t>
+            </a:r>
+          </a:p>
+          <a:p>
+            <a:endParaRPr lang="en-GB" sz="1200" dirty="0"/>
+          </a:p>
+          <a:p>
+            <a:r>
+              <a:rPr lang="en-GB" sz="1200" dirty="0"/>
+              <a:t>Essentially, I’m making a very slimed down version of level 1 with only a small amount of camera zones.</a:t>
+            </a:r>
+          </a:p>
+          <a:p>
+            <a:endParaRPr lang="en-GB" sz="1200" dirty="0"/>
+          </a:p>
+          <a:p>
+            <a:endParaRPr lang="en-GB" sz="1200" dirty="0"/>
+          </a:p>
+          <a:p>
+            <a:r>
+              <a:rPr lang="en-GB" sz="1200" dirty="0"/>
+              <a:t>I plan to do an animatic for only level 1 for now since that’s all I’ve written in the story script, but if I have more time, I will do it for the other levels such as the additions of new enemies.</a:t>
+            </a:r>
+          </a:p>
+          <a:p>
+            <a:endParaRPr lang="en-GB" sz="1200" dirty="0"/>
+          </a:p>
+          <a:p>
+            <a:r>
+              <a:rPr lang="en-GB" sz="1200" dirty="0"/>
+              <a:t>There will also be some zone change code, particularly for the scenes that are brand new and for showing how the enemies move.</a:t>
+            </a:r>
+          </a:p>
+          <a:p>
+            <a:endParaRPr lang="en-GB" sz="1200" dirty="0"/>
+          </a:p>
+        </p:txBody>
+      </p:sp>
+    </p:spTree>
+    <p:extLst>
+      <p:ext uri="{BB962C8B-B14F-4D97-AF65-F5344CB8AC3E}">
+        <p14:creationId xmlns:p14="http://schemas.microsoft.com/office/powerpoint/2010/main" val="4216481232"/>
+      </p:ext>
+    </p:extLst>
+  </p:cSld>
+  <p:clrMapOvr>
+    <a:masterClrMapping/>
+  </p:clrMapOvr>
+</p:sld>
+</file>
+
+<file path=ppt/slides/slide36.xml><?xml version="1.0" encoding="utf-8"?>
+<p:sld xmlns:a="http://schemas.openxmlformats.org/drawingml/2006/main" xmlns:r="http://schemas.openxmlformats.org/officeDocument/2006/relationships" xmlns:p="http://schemas.openxmlformats.org/presentationml/2006/main">
+  <p:cSld>
+    <p:spTree>
+      <p:nvGrpSpPr>
         <p:cNvPr id="1" name=""/>
         <p:cNvGrpSpPr/>
         <p:nvPr/>
@@ -15093,7 +15328,7 @@
 </p:sld>
 </file>
 
-<file path=ppt/slides/slide36.xml><?xml version="1.0" encoding="utf-8"?>
+<file path=ppt/slides/slide37.xml><?xml version="1.0" encoding="utf-8"?>
 <p:sld xmlns:a="http://schemas.openxmlformats.org/drawingml/2006/main" xmlns:r="http://schemas.openxmlformats.org/officeDocument/2006/relationships" xmlns:p="http://schemas.openxmlformats.org/presentationml/2006/main">
   <p:cSld>
     <p:spTree>
@@ -15684,7 +15919,7 @@
 </p:sld>
 </file>
 
-<file path=ppt/slides/slide37.xml><?xml version="1.0" encoding="utf-8"?>
+<file path=ppt/slides/slide38.xml><?xml version="1.0" encoding="utf-8"?>
 <p:sld xmlns:a="http://schemas.openxmlformats.org/drawingml/2006/main" xmlns:r="http://schemas.openxmlformats.org/officeDocument/2006/relationships" xmlns:p="http://schemas.openxmlformats.org/presentationml/2006/main">
   <p:cSld>
     <p:spTree>
@@ -16208,7 +16443,7 @@
 </p:sld>
 </file>
 
-<file path=ppt/slides/slide38.xml><?xml version="1.0" encoding="utf-8"?>
+<file path=ppt/slides/slide39.xml><?xml version="1.0" encoding="utf-8"?>
 <p:sld xmlns:a="http://schemas.openxmlformats.org/drawingml/2006/main" xmlns:r="http://schemas.openxmlformats.org/officeDocument/2006/relationships" xmlns:p="http://schemas.openxmlformats.org/presentationml/2006/main">
   <p:cSld>
     <p:spTree>
@@ -16722,7 +16957,391 @@
 </p:sld>
 </file>
 
-<file path=ppt/slides/slide39.xml><?xml version="1.0" encoding="utf-8"?>
+<file path=ppt/slides/slide4.xml><?xml version="1.0" encoding="utf-8"?>
+<p:sld xmlns:a="http://schemas.openxmlformats.org/drawingml/2006/main" xmlns:r="http://schemas.openxmlformats.org/officeDocument/2006/relationships" xmlns:p="http://schemas.openxmlformats.org/presentationml/2006/main">
+  <p:cSld>
+    <p:spTree>
+      <p:nvGrpSpPr>
+        <p:cNvPr id="1" name="">
+          <a:extLst>
+            <a:ext uri="{FF2B5EF4-FFF2-40B4-BE49-F238E27FC236}">
+              <a16:creationId xmlns:a16="http://schemas.microsoft.com/office/drawing/2014/main" id="{B71AF447-2503-6E06-EB64-6A29C299795D}"/>
+            </a:ext>
+          </a:extLst>
+        </p:cNvPr>
+        <p:cNvGrpSpPr/>
+        <p:nvPr/>
+      </p:nvGrpSpPr>
+      <p:grpSpPr>
+        <a:xfrm>
+          <a:off x="0" y="0"/>
+          <a:ext cx="0" cy="0"/>
+          <a:chOff x="0" y="0"/>
+          <a:chExt cx="0" cy="0"/>
+        </a:xfrm>
+      </p:grpSpPr>
+      <p:sp>
+        <p:nvSpPr>
+          <p:cNvPr id="4" name="TextBox 3">
+            <a:extLst>
+              <a:ext uri="{FF2B5EF4-FFF2-40B4-BE49-F238E27FC236}">
+                <a16:creationId xmlns:a16="http://schemas.microsoft.com/office/drawing/2014/main" id="{3ABD7D05-D183-64C6-1BA1-72453612143E}"/>
+              </a:ext>
+            </a:extLst>
+          </p:cNvPr>
+          <p:cNvSpPr txBox="1"/>
+          <p:nvPr/>
+        </p:nvSpPr>
+        <p:spPr>
+          <a:xfrm>
+            <a:off x="7763992" y="90121"/>
+            <a:ext cx="1809641" cy="338554"/>
+          </a:xfrm>
+          <a:prstGeom prst="rect">
+            <a:avLst/>
+          </a:prstGeom>
+          <a:noFill/>
+          <a:ln>
+            <a:solidFill>
+              <a:schemeClr val="tx1"/>
+            </a:solidFill>
+          </a:ln>
+        </p:spPr>
+        <p:txBody>
+          <a:bodyPr rot="0" spcFirstLastPara="0" vertOverflow="overflow" horzOverflow="overflow" vert="horz" wrap="square" lIns="91440" tIns="45720" rIns="91440" bIns="45720" numCol="1" spcCol="0" rtlCol="0" fromWordArt="0" anchor="t" anchorCtr="0" forceAA="0" compatLnSpc="1">
+            <a:prstTxWarp prst="textNoShape">
+              <a:avLst/>
+            </a:prstTxWarp>
+            <a:spAutoFit/>
+          </a:bodyPr>
+          <a:lstStyle/>
+          <a:p>
+            <a:r>
+              <a:rPr lang="en-GB" sz="1600" dirty="0"/>
+              <a:t>Date – 24/11/2025</a:t>
+            </a:r>
+          </a:p>
+        </p:txBody>
+      </p:sp>
+      <p:sp>
+        <p:nvSpPr>
+          <p:cNvPr id="2" name="TextBox 1">
+            <a:extLst>
+              <a:ext uri="{FF2B5EF4-FFF2-40B4-BE49-F238E27FC236}">
+                <a16:creationId xmlns:a16="http://schemas.microsoft.com/office/drawing/2014/main" id="{3E37F77A-82C0-2039-AD51-40366B52EBEB}"/>
+              </a:ext>
+            </a:extLst>
+          </p:cNvPr>
+          <p:cNvSpPr txBox="1"/>
+          <p:nvPr/>
+        </p:nvSpPr>
+        <p:spPr>
+          <a:xfrm>
+            <a:off x="5651845" y="90120"/>
+            <a:ext cx="1959856" cy="338554"/>
+          </a:xfrm>
+          <a:prstGeom prst="rect">
+            <a:avLst/>
+          </a:prstGeom>
+          <a:noFill/>
+          <a:ln>
+            <a:solidFill>
+              <a:schemeClr val="tx1"/>
+            </a:solidFill>
+          </a:ln>
+        </p:spPr>
+        <p:txBody>
+          <a:bodyPr rot="0" spcFirstLastPara="0" vertOverflow="overflow" horzOverflow="overflow" vert="horz" wrap="square" lIns="91440" tIns="45720" rIns="91440" bIns="45720" numCol="1" spcCol="0" rtlCol="0" fromWordArt="0" anchor="t" anchorCtr="0" forceAA="0" compatLnSpc="1">
+            <a:prstTxWarp prst="textNoShape">
+              <a:avLst/>
+            </a:prstTxWarp>
+            <a:spAutoFit/>
+          </a:bodyPr>
+          <a:lstStyle/>
+          <a:p>
+            <a:r>
+              <a:rPr lang="en-GB" sz="1600" dirty="0"/>
+              <a:t>Game Build V.0.2</a:t>
+            </a:r>
+          </a:p>
+        </p:txBody>
+      </p:sp>
+      <p:sp>
+        <p:nvSpPr>
+          <p:cNvPr id="3" name="TextBox 2">
+            <a:extLst>
+              <a:ext uri="{FF2B5EF4-FFF2-40B4-BE49-F238E27FC236}">
+                <a16:creationId xmlns:a16="http://schemas.microsoft.com/office/drawing/2014/main" id="{2886F3E7-61E5-445C-5038-15B1F86B5A87}"/>
+              </a:ext>
+            </a:extLst>
+          </p:cNvPr>
+          <p:cNvSpPr txBox="1"/>
+          <p:nvPr/>
+        </p:nvSpPr>
+        <p:spPr>
+          <a:xfrm>
+            <a:off x="5642854" y="578678"/>
+            <a:ext cx="3926490" cy="3354765"/>
+          </a:xfrm>
+          <a:prstGeom prst="rect">
+            <a:avLst/>
+          </a:prstGeom>
+          <a:noFill/>
+          <a:ln>
+            <a:solidFill>
+              <a:schemeClr val="tx1"/>
+            </a:solidFill>
+          </a:ln>
+        </p:spPr>
+        <p:txBody>
+          <a:bodyPr rot="0" spcFirstLastPara="0" vertOverflow="overflow" horzOverflow="overflow" vert="horz" wrap="square" lIns="91440" tIns="45720" rIns="91440" bIns="45720" numCol="1" spcCol="0" rtlCol="0" fromWordArt="0" anchor="t" anchorCtr="0" forceAA="0" compatLnSpc="1">
+            <a:prstTxWarp prst="textNoShape">
+              <a:avLst/>
+            </a:prstTxWarp>
+            <a:spAutoFit/>
+          </a:bodyPr>
+          <a:lstStyle/>
+          <a:p>
+            <a:r>
+              <a:rPr lang="en-GB" sz="1400" dirty="0"/>
+              <a:t>Summary Of Session</a:t>
+            </a:r>
+          </a:p>
+          <a:p>
+            <a:endParaRPr lang="en-GB" sz="1400" dirty="0"/>
+          </a:p>
+          <a:p>
+            <a:r>
+              <a:rPr lang="en-GB" sz="1400" dirty="0"/>
+              <a:t>Refined Sprite designs such as the doors. Created template buttons for the doors both from main view and close-up view.</a:t>
+            </a:r>
+          </a:p>
+          <a:p>
+            <a:endParaRPr lang="en-GB" sz="1400" dirty="0"/>
+          </a:p>
+          <a:p>
+            <a:r>
+              <a:rPr lang="en-GB" sz="1400" dirty="0"/>
+              <a:t>Named each zones area/location.</a:t>
+            </a:r>
+          </a:p>
+          <a:p>
+            <a:endParaRPr lang="en-GB" sz="1400" dirty="0"/>
+          </a:p>
+          <a:p>
+            <a:r>
+              <a:rPr lang="en-GB" sz="1400" dirty="0"/>
+              <a:t>Created variables for </a:t>
+            </a:r>
+            <a:r>
+              <a:rPr lang="en-GB" sz="1400" dirty="0" err="1"/>
+              <a:t>obj_camera</a:t>
+            </a:r>
+            <a:r>
+              <a:rPr lang="en-GB" sz="1400" dirty="0"/>
+              <a:t>.</a:t>
+            </a:r>
+          </a:p>
+          <a:p>
+            <a:endParaRPr lang="en-GB" sz="1400" dirty="0"/>
+          </a:p>
+          <a:p>
+            <a:r>
+              <a:rPr lang="en-GB" sz="1400" dirty="0"/>
+              <a:t>Added Up close door to the up close door zones for both left and right.</a:t>
+            </a:r>
+          </a:p>
+          <a:p>
+            <a:endParaRPr lang="en-GB" sz="1400" dirty="0"/>
+          </a:p>
+          <a:p>
+            <a:endParaRPr lang="en-GB" sz="1400" dirty="0"/>
+          </a:p>
+          <a:p>
+            <a:endParaRPr lang="en-GB" sz="1600" dirty="0"/>
+          </a:p>
+        </p:txBody>
+      </p:sp>
+      <p:sp>
+        <p:nvSpPr>
+          <p:cNvPr id="6" name="TextBox 5">
+            <a:extLst>
+              <a:ext uri="{FF2B5EF4-FFF2-40B4-BE49-F238E27FC236}">
+                <a16:creationId xmlns:a16="http://schemas.microsoft.com/office/drawing/2014/main" id="{6C671371-B8F1-97C1-D2C5-BD2850E814D7}"/>
+              </a:ext>
+            </a:extLst>
+          </p:cNvPr>
+          <p:cNvSpPr txBox="1"/>
+          <p:nvPr/>
+        </p:nvSpPr>
+        <p:spPr>
+          <a:xfrm>
+            <a:off x="9642445" y="54237"/>
+            <a:ext cx="2438400" cy="2308324"/>
+          </a:xfrm>
+          <a:prstGeom prst="rect">
+            <a:avLst/>
+          </a:prstGeom>
+          <a:noFill/>
+          <a:ln>
+            <a:solidFill>
+              <a:schemeClr val="tx1"/>
+            </a:solidFill>
+          </a:ln>
+        </p:spPr>
+        <p:txBody>
+          <a:bodyPr rot="0" spcFirstLastPara="0" vertOverflow="overflow" horzOverflow="overflow" vert="horz" wrap="square" lIns="91440" tIns="45720" rIns="91440" bIns="45720" numCol="1" spcCol="0" rtlCol="0" fromWordArt="0" anchor="t" anchorCtr="0" forceAA="0" compatLnSpc="1">
+            <a:prstTxWarp prst="textNoShape">
+              <a:avLst/>
+            </a:prstTxWarp>
+            <a:spAutoFit/>
+          </a:bodyPr>
+          <a:lstStyle/>
+          <a:p>
+            <a:r>
+              <a:rPr lang="en-GB" sz="1200" dirty="0"/>
+              <a:t>What to do for Next Session</a:t>
+            </a:r>
+          </a:p>
+          <a:p>
+            <a:endParaRPr lang="en-GB" sz="1200" dirty="0"/>
+          </a:p>
+          <a:p>
+            <a:r>
+              <a:rPr lang="en-GB" sz="1200" dirty="0"/>
+              <a:t>Work on sound designs for the game and the characters.</a:t>
+            </a:r>
+          </a:p>
+          <a:p>
+            <a:endParaRPr lang="en-GB" sz="1200" dirty="0"/>
+          </a:p>
+          <a:p>
+            <a:r>
+              <a:rPr lang="en-GB" sz="1200" dirty="0"/>
+              <a:t>Use audio and SFX from other horror games as reference or for the smaller sounds.</a:t>
+            </a:r>
+          </a:p>
+          <a:p>
+            <a:endParaRPr lang="en-GB" sz="1200" dirty="0"/>
+          </a:p>
+          <a:p>
+            <a:r>
+              <a:rPr lang="en-GB" sz="1200" b="1" dirty="0"/>
+              <a:t>Get Camera system operational</a:t>
+            </a:r>
+          </a:p>
+          <a:p>
+            <a:endParaRPr lang="en-GB" sz="1200" dirty="0"/>
+          </a:p>
+          <a:p>
+            <a:endParaRPr lang="en-GB" sz="1200" dirty="0"/>
+          </a:p>
+        </p:txBody>
+      </p:sp>
+      <p:pic>
+        <p:nvPicPr>
+          <p:cNvPr id="8" name="Picture 7">
+            <a:extLst>
+              <a:ext uri="{FF2B5EF4-FFF2-40B4-BE49-F238E27FC236}">
+                <a16:creationId xmlns:a16="http://schemas.microsoft.com/office/drawing/2014/main" id="{2B25F36B-7370-C022-0982-D33C4899384B}"/>
+              </a:ext>
+            </a:extLst>
+          </p:cNvPr>
+          <p:cNvPicPr>
+            <a:picLocks noChangeAspect="1"/>
+          </p:cNvPicPr>
+          <p:nvPr/>
+        </p:nvPicPr>
+        <p:blipFill>
+          <a:blip r:embed="rId2"/>
+          <a:stretch>
+            <a:fillRect/>
+          </a:stretch>
+        </p:blipFill>
+        <p:spPr>
+          <a:xfrm>
+            <a:off x="0" y="4302897"/>
+            <a:ext cx="4356284" cy="2362127"/>
+          </a:xfrm>
+          <a:prstGeom prst="rect">
+            <a:avLst/>
+          </a:prstGeom>
+        </p:spPr>
+      </p:pic>
+      <p:pic>
+        <p:nvPicPr>
+          <p:cNvPr id="10" name="Picture 9">
+            <a:extLst>
+              <a:ext uri="{FF2B5EF4-FFF2-40B4-BE49-F238E27FC236}">
+                <a16:creationId xmlns:a16="http://schemas.microsoft.com/office/drawing/2014/main" id="{330D62C2-AA53-B794-C0B6-312FEE7FF2DF}"/>
+              </a:ext>
+            </a:extLst>
+          </p:cNvPr>
+          <p:cNvPicPr>
+            <a:picLocks noChangeAspect="1"/>
+          </p:cNvPicPr>
+          <p:nvPr/>
+        </p:nvPicPr>
+        <p:blipFill>
+          <a:blip r:embed="rId3"/>
+          <a:stretch>
+            <a:fillRect/>
+          </a:stretch>
+        </p:blipFill>
+        <p:spPr>
+          <a:xfrm>
+            <a:off x="294127" y="428674"/>
+            <a:ext cx="1704008" cy="3354765"/>
+          </a:xfrm>
+          <a:prstGeom prst="rect">
+            <a:avLst/>
+          </a:prstGeom>
+        </p:spPr>
+      </p:pic>
+      <p:pic>
+        <p:nvPicPr>
+          <p:cNvPr id="13" name="Picture 12">
+            <a:extLst>
+              <a:ext uri="{FF2B5EF4-FFF2-40B4-BE49-F238E27FC236}">
+                <a16:creationId xmlns:a16="http://schemas.microsoft.com/office/drawing/2014/main" id="{350428BE-0AC0-96D2-D92A-71AD3D19FADD}"/>
+              </a:ext>
+            </a:extLst>
+          </p:cNvPr>
+          <p:cNvPicPr>
+            <a:picLocks noChangeAspect="1"/>
+          </p:cNvPicPr>
+          <p:nvPr/>
+        </p:nvPicPr>
+        <p:blipFill>
+          <a:blip r:embed="rId4"/>
+          <a:stretch>
+            <a:fillRect/>
+          </a:stretch>
+        </p:blipFill>
+        <p:spPr>
+          <a:xfrm>
+            <a:off x="2092643" y="885888"/>
+            <a:ext cx="3477110" cy="952633"/>
+          </a:xfrm>
+          <a:prstGeom prst="rect">
+            <a:avLst/>
+          </a:prstGeom>
+        </p:spPr>
+      </p:pic>
+    </p:spTree>
+    <p:extLst>
+      <p:ext uri="{BB962C8B-B14F-4D97-AF65-F5344CB8AC3E}">
+        <p14:creationId xmlns:p14="http://schemas.microsoft.com/office/powerpoint/2010/main" val="1285422550"/>
+      </p:ext>
+    </p:extLst>
+  </p:cSld>
+  <p:clrMapOvr>
+    <a:masterClrMapping/>
+  </p:clrMapOvr>
+</p:sld>
+</file>
+
+<file path=ppt/slides/slide40.xml><?xml version="1.0" encoding="utf-8"?>
 <p:sld xmlns:a="http://schemas.openxmlformats.org/drawingml/2006/main" xmlns:r="http://schemas.openxmlformats.org/officeDocument/2006/relationships" xmlns:p="http://schemas.openxmlformats.org/presentationml/2006/main">
   <p:cSld>
     <p:spTree>
@@ -17214,391 +17833,7 @@
 </p:sld>
 </file>
 
-<file path=ppt/slides/slide4.xml><?xml version="1.0" encoding="utf-8"?>
-<p:sld xmlns:a="http://schemas.openxmlformats.org/drawingml/2006/main" xmlns:r="http://schemas.openxmlformats.org/officeDocument/2006/relationships" xmlns:p="http://schemas.openxmlformats.org/presentationml/2006/main">
-  <p:cSld>
-    <p:spTree>
-      <p:nvGrpSpPr>
-        <p:cNvPr id="1" name="">
-          <a:extLst>
-            <a:ext uri="{FF2B5EF4-FFF2-40B4-BE49-F238E27FC236}">
-              <a16:creationId xmlns:a16="http://schemas.microsoft.com/office/drawing/2014/main" id="{B71AF447-2503-6E06-EB64-6A29C299795D}"/>
-            </a:ext>
-          </a:extLst>
-        </p:cNvPr>
-        <p:cNvGrpSpPr/>
-        <p:nvPr/>
-      </p:nvGrpSpPr>
-      <p:grpSpPr>
-        <a:xfrm>
-          <a:off x="0" y="0"/>
-          <a:ext cx="0" cy="0"/>
-          <a:chOff x="0" y="0"/>
-          <a:chExt cx="0" cy="0"/>
-        </a:xfrm>
-      </p:grpSpPr>
-      <p:sp>
-        <p:nvSpPr>
-          <p:cNvPr id="4" name="TextBox 3">
-            <a:extLst>
-              <a:ext uri="{FF2B5EF4-FFF2-40B4-BE49-F238E27FC236}">
-                <a16:creationId xmlns:a16="http://schemas.microsoft.com/office/drawing/2014/main" id="{3ABD7D05-D183-64C6-1BA1-72453612143E}"/>
-              </a:ext>
-            </a:extLst>
-          </p:cNvPr>
-          <p:cNvSpPr txBox="1"/>
-          <p:nvPr/>
-        </p:nvSpPr>
-        <p:spPr>
-          <a:xfrm>
-            <a:off x="7763992" y="90121"/>
-            <a:ext cx="1809641" cy="338554"/>
-          </a:xfrm>
-          <a:prstGeom prst="rect">
-            <a:avLst/>
-          </a:prstGeom>
-          <a:noFill/>
-          <a:ln>
-            <a:solidFill>
-              <a:schemeClr val="tx1"/>
-            </a:solidFill>
-          </a:ln>
-        </p:spPr>
-        <p:txBody>
-          <a:bodyPr rot="0" spcFirstLastPara="0" vertOverflow="overflow" horzOverflow="overflow" vert="horz" wrap="square" lIns="91440" tIns="45720" rIns="91440" bIns="45720" numCol="1" spcCol="0" rtlCol="0" fromWordArt="0" anchor="t" anchorCtr="0" forceAA="0" compatLnSpc="1">
-            <a:prstTxWarp prst="textNoShape">
-              <a:avLst/>
-            </a:prstTxWarp>
-            <a:spAutoFit/>
-          </a:bodyPr>
-          <a:lstStyle/>
-          <a:p>
-            <a:r>
-              <a:rPr lang="en-GB" sz="1600" dirty="0"/>
-              <a:t>Date – 24/11/2025</a:t>
-            </a:r>
-          </a:p>
-        </p:txBody>
-      </p:sp>
-      <p:sp>
-        <p:nvSpPr>
-          <p:cNvPr id="2" name="TextBox 1">
-            <a:extLst>
-              <a:ext uri="{FF2B5EF4-FFF2-40B4-BE49-F238E27FC236}">
-                <a16:creationId xmlns:a16="http://schemas.microsoft.com/office/drawing/2014/main" id="{3E37F77A-82C0-2039-AD51-40366B52EBEB}"/>
-              </a:ext>
-            </a:extLst>
-          </p:cNvPr>
-          <p:cNvSpPr txBox="1"/>
-          <p:nvPr/>
-        </p:nvSpPr>
-        <p:spPr>
-          <a:xfrm>
-            <a:off x="5651845" y="90120"/>
-            <a:ext cx="1959856" cy="338554"/>
-          </a:xfrm>
-          <a:prstGeom prst="rect">
-            <a:avLst/>
-          </a:prstGeom>
-          <a:noFill/>
-          <a:ln>
-            <a:solidFill>
-              <a:schemeClr val="tx1"/>
-            </a:solidFill>
-          </a:ln>
-        </p:spPr>
-        <p:txBody>
-          <a:bodyPr rot="0" spcFirstLastPara="0" vertOverflow="overflow" horzOverflow="overflow" vert="horz" wrap="square" lIns="91440" tIns="45720" rIns="91440" bIns="45720" numCol="1" spcCol="0" rtlCol="0" fromWordArt="0" anchor="t" anchorCtr="0" forceAA="0" compatLnSpc="1">
-            <a:prstTxWarp prst="textNoShape">
-              <a:avLst/>
-            </a:prstTxWarp>
-            <a:spAutoFit/>
-          </a:bodyPr>
-          <a:lstStyle/>
-          <a:p>
-            <a:r>
-              <a:rPr lang="en-GB" sz="1600" dirty="0"/>
-              <a:t>Game Build V.0.2</a:t>
-            </a:r>
-          </a:p>
-        </p:txBody>
-      </p:sp>
-      <p:sp>
-        <p:nvSpPr>
-          <p:cNvPr id="3" name="TextBox 2">
-            <a:extLst>
-              <a:ext uri="{FF2B5EF4-FFF2-40B4-BE49-F238E27FC236}">
-                <a16:creationId xmlns:a16="http://schemas.microsoft.com/office/drawing/2014/main" id="{2886F3E7-61E5-445C-5038-15B1F86B5A87}"/>
-              </a:ext>
-            </a:extLst>
-          </p:cNvPr>
-          <p:cNvSpPr txBox="1"/>
-          <p:nvPr/>
-        </p:nvSpPr>
-        <p:spPr>
-          <a:xfrm>
-            <a:off x="5642854" y="578678"/>
-            <a:ext cx="3926490" cy="3354765"/>
-          </a:xfrm>
-          <a:prstGeom prst="rect">
-            <a:avLst/>
-          </a:prstGeom>
-          <a:noFill/>
-          <a:ln>
-            <a:solidFill>
-              <a:schemeClr val="tx1"/>
-            </a:solidFill>
-          </a:ln>
-        </p:spPr>
-        <p:txBody>
-          <a:bodyPr rot="0" spcFirstLastPara="0" vertOverflow="overflow" horzOverflow="overflow" vert="horz" wrap="square" lIns="91440" tIns="45720" rIns="91440" bIns="45720" numCol="1" spcCol="0" rtlCol="0" fromWordArt="0" anchor="t" anchorCtr="0" forceAA="0" compatLnSpc="1">
-            <a:prstTxWarp prst="textNoShape">
-              <a:avLst/>
-            </a:prstTxWarp>
-            <a:spAutoFit/>
-          </a:bodyPr>
-          <a:lstStyle/>
-          <a:p>
-            <a:r>
-              <a:rPr lang="en-GB" sz="1400" dirty="0"/>
-              <a:t>Summary Of Session</a:t>
-            </a:r>
-          </a:p>
-          <a:p>
-            <a:endParaRPr lang="en-GB" sz="1400" dirty="0"/>
-          </a:p>
-          <a:p>
-            <a:r>
-              <a:rPr lang="en-GB" sz="1400" dirty="0"/>
-              <a:t>Refined Sprite designs such as the doors. Created template buttons for the doors both from main view and close-up view.</a:t>
-            </a:r>
-          </a:p>
-          <a:p>
-            <a:endParaRPr lang="en-GB" sz="1400" dirty="0"/>
-          </a:p>
-          <a:p>
-            <a:r>
-              <a:rPr lang="en-GB" sz="1400" dirty="0"/>
-              <a:t>Named each zones area/location.</a:t>
-            </a:r>
-          </a:p>
-          <a:p>
-            <a:endParaRPr lang="en-GB" sz="1400" dirty="0"/>
-          </a:p>
-          <a:p>
-            <a:r>
-              <a:rPr lang="en-GB" sz="1400" dirty="0"/>
-              <a:t>Created variables for </a:t>
-            </a:r>
-            <a:r>
-              <a:rPr lang="en-GB" sz="1400" dirty="0" err="1"/>
-              <a:t>obj_camera</a:t>
-            </a:r>
-            <a:r>
-              <a:rPr lang="en-GB" sz="1400" dirty="0"/>
-              <a:t>.</a:t>
-            </a:r>
-          </a:p>
-          <a:p>
-            <a:endParaRPr lang="en-GB" sz="1400" dirty="0"/>
-          </a:p>
-          <a:p>
-            <a:r>
-              <a:rPr lang="en-GB" sz="1400" dirty="0"/>
-              <a:t>Added Up close door to the up close door zones for both left and right.</a:t>
-            </a:r>
-          </a:p>
-          <a:p>
-            <a:endParaRPr lang="en-GB" sz="1400" dirty="0"/>
-          </a:p>
-          <a:p>
-            <a:endParaRPr lang="en-GB" sz="1400" dirty="0"/>
-          </a:p>
-          <a:p>
-            <a:endParaRPr lang="en-GB" sz="1600" dirty="0"/>
-          </a:p>
-        </p:txBody>
-      </p:sp>
-      <p:sp>
-        <p:nvSpPr>
-          <p:cNvPr id="6" name="TextBox 5">
-            <a:extLst>
-              <a:ext uri="{FF2B5EF4-FFF2-40B4-BE49-F238E27FC236}">
-                <a16:creationId xmlns:a16="http://schemas.microsoft.com/office/drawing/2014/main" id="{6C671371-B8F1-97C1-D2C5-BD2850E814D7}"/>
-              </a:ext>
-            </a:extLst>
-          </p:cNvPr>
-          <p:cNvSpPr txBox="1"/>
-          <p:nvPr/>
-        </p:nvSpPr>
-        <p:spPr>
-          <a:xfrm>
-            <a:off x="9642445" y="54237"/>
-            <a:ext cx="2438400" cy="2308324"/>
-          </a:xfrm>
-          <a:prstGeom prst="rect">
-            <a:avLst/>
-          </a:prstGeom>
-          <a:noFill/>
-          <a:ln>
-            <a:solidFill>
-              <a:schemeClr val="tx1"/>
-            </a:solidFill>
-          </a:ln>
-        </p:spPr>
-        <p:txBody>
-          <a:bodyPr rot="0" spcFirstLastPara="0" vertOverflow="overflow" horzOverflow="overflow" vert="horz" wrap="square" lIns="91440" tIns="45720" rIns="91440" bIns="45720" numCol="1" spcCol="0" rtlCol="0" fromWordArt="0" anchor="t" anchorCtr="0" forceAA="0" compatLnSpc="1">
-            <a:prstTxWarp prst="textNoShape">
-              <a:avLst/>
-            </a:prstTxWarp>
-            <a:spAutoFit/>
-          </a:bodyPr>
-          <a:lstStyle/>
-          <a:p>
-            <a:r>
-              <a:rPr lang="en-GB" sz="1200" dirty="0"/>
-              <a:t>What to do for Next Session</a:t>
-            </a:r>
-          </a:p>
-          <a:p>
-            <a:endParaRPr lang="en-GB" sz="1200" dirty="0"/>
-          </a:p>
-          <a:p>
-            <a:r>
-              <a:rPr lang="en-GB" sz="1200" dirty="0"/>
-              <a:t>Work on sound designs for the game and the characters.</a:t>
-            </a:r>
-          </a:p>
-          <a:p>
-            <a:endParaRPr lang="en-GB" sz="1200" dirty="0"/>
-          </a:p>
-          <a:p>
-            <a:r>
-              <a:rPr lang="en-GB" sz="1200" dirty="0"/>
-              <a:t>Use audio and SFX from other horror games as reference or for the smaller sounds.</a:t>
-            </a:r>
-          </a:p>
-          <a:p>
-            <a:endParaRPr lang="en-GB" sz="1200" dirty="0"/>
-          </a:p>
-          <a:p>
-            <a:r>
-              <a:rPr lang="en-GB" sz="1200" b="1" dirty="0"/>
-              <a:t>Get Camera system operational</a:t>
-            </a:r>
-          </a:p>
-          <a:p>
-            <a:endParaRPr lang="en-GB" sz="1200" dirty="0"/>
-          </a:p>
-          <a:p>
-            <a:endParaRPr lang="en-GB" sz="1200" dirty="0"/>
-          </a:p>
-        </p:txBody>
-      </p:sp>
-      <p:pic>
-        <p:nvPicPr>
-          <p:cNvPr id="8" name="Picture 7">
-            <a:extLst>
-              <a:ext uri="{FF2B5EF4-FFF2-40B4-BE49-F238E27FC236}">
-                <a16:creationId xmlns:a16="http://schemas.microsoft.com/office/drawing/2014/main" id="{2B25F36B-7370-C022-0982-D33C4899384B}"/>
-              </a:ext>
-            </a:extLst>
-          </p:cNvPr>
-          <p:cNvPicPr>
-            <a:picLocks noChangeAspect="1"/>
-          </p:cNvPicPr>
-          <p:nvPr/>
-        </p:nvPicPr>
-        <p:blipFill>
-          <a:blip r:embed="rId2"/>
-          <a:stretch>
-            <a:fillRect/>
-          </a:stretch>
-        </p:blipFill>
-        <p:spPr>
-          <a:xfrm>
-            <a:off x="0" y="4302897"/>
-            <a:ext cx="4356284" cy="2362127"/>
-          </a:xfrm>
-          <a:prstGeom prst="rect">
-            <a:avLst/>
-          </a:prstGeom>
-        </p:spPr>
-      </p:pic>
-      <p:pic>
-        <p:nvPicPr>
-          <p:cNvPr id="10" name="Picture 9">
-            <a:extLst>
-              <a:ext uri="{FF2B5EF4-FFF2-40B4-BE49-F238E27FC236}">
-                <a16:creationId xmlns:a16="http://schemas.microsoft.com/office/drawing/2014/main" id="{330D62C2-AA53-B794-C0B6-312FEE7FF2DF}"/>
-              </a:ext>
-            </a:extLst>
-          </p:cNvPr>
-          <p:cNvPicPr>
-            <a:picLocks noChangeAspect="1"/>
-          </p:cNvPicPr>
-          <p:nvPr/>
-        </p:nvPicPr>
-        <p:blipFill>
-          <a:blip r:embed="rId3"/>
-          <a:stretch>
-            <a:fillRect/>
-          </a:stretch>
-        </p:blipFill>
-        <p:spPr>
-          <a:xfrm>
-            <a:off x="294127" y="428674"/>
-            <a:ext cx="1704008" cy="3354765"/>
-          </a:xfrm>
-          <a:prstGeom prst="rect">
-            <a:avLst/>
-          </a:prstGeom>
-        </p:spPr>
-      </p:pic>
-      <p:pic>
-        <p:nvPicPr>
-          <p:cNvPr id="13" name="Picture 12">
-            <a:extLst>
-              <a:ext uri="{FF2B5EF4-FFF2-40B4-BE49-F238E27FC236}">
-                <a16:creationId xmlns:a16="http://schemas.microsoft.com/office/drawing/2014/main" id="{350428BE-0AC0-96D2-D92A-71AD3D19FADD}"/>
-              </a:ext>
-            </a:extLst>
-          </p:cNvPr>
-          <p:cNvPicPr>
-            <a:picLocks noChangeAspect="1"/>
-          </p:cNvPicPr>
-          <p:nvPr/>
-        </p:nvPicPr>
-        <p:blipFill>
-          <a:blip r:embed="rId4"/>
-          <a:stretch>
-            <a:fillRect/>
-          </a:stretch>
-        </p:blipFill>
-        <p:spPr>
-          <a:xfrm>
-            <a:off x="2092643" y="885888"/>
-            <a:ext cx="3477110" cy="952633"/>
-          </a:xfrm>
-          <a:prstGeom prst="rect">
-            <a:avLst/>
-          </a:prstGeom>
-        </p:spPr>
-      </p:pic>
-    </p:spTree>
-    <p:extLst>
-      <p:ext uri="{BB962C8B-B14F-4D97-AF65-F5344CB8AC3E}">
-        <p14:creationId xmlns:p14="http://schemas.microsoft.com/office/powerpoint/2010/main" val="1285422550"/>
-      </p:ext>
-    </p:extLst>
-  </p:cSld>
-  <p:clrMapOvr>
-    <a:masterClrMapping/>
-  </p:clrMapOvr>
-</p:sld>
-</file>
-
-<file path=ppt/slides/slide40.xml><?xml version="1.0" encoding="utf-8"?>
+<file path=ppt/slides/slide41.xml><?xml version="1.0" encoding="utf-8"?>
 <p:sld xmlns:a="http://schemas.openxmlformats.org/drawingml/2006/main" xmlns:r="http://schemas.openxmlformats.org/officeDocument/2006/relationships" xmlns:p="http://schemas.openxmlformats.org/presentationml/2006/main">
   <p:cSld>
     <p:spTree>
@@ -18279,7 +18514,7 @@
 </p:sld>
 </file>
 
-<file path=ppt/slides/slide41.xml><?xml version="1.0" encoding="utf-8"?>
+<file path=ppt/slides/slide42.xml><?xml version="1.0" encoding="utf-8"?>
 <p:sld xmlns:a="http://schemas.openxmlformats.org/drawingml/2006/main" xmlns:r="http://schemas.openxmlformats.org/officeDocument/2006/relationships" xmlns:p="http://schemas.openxmlformats.org/presentationml/2006/main">
   <p:cSld>
     <p:spTree>
@@ -18982,7 +19217,7 @@
 </p:sld>
 </file>
 
-<file path=ppt/slides/slide42.xml><?xml version="1.0" encoding="utf-8"?>
+<file path=ppt/slides/slide43.xml><?xml version="1.0" encoding="utf-8"?>
 <p:sld xmlns:a="http://schemas.openxmlformats.org/drawingml/2006/main" xmlns:r="http://schemas.openxmlformats.org/officeDocument/2006/relationships" xmlns:p="http://schemas.openxmlformats.org/presentationml/2006/main">
   <p:cSld>
     <p:spTree>
